--- a/docs/activities/Unit-06-Normal-CTL.pptx
+++ b/docs/activities/Unit-06-Normal-CTL.pptx
@@ -9,6 +9,17 @@
     <p:sldId id="257" r:id="rId3"/>
     <p:sldId id="258" r:id="rId4"/>
     <p:sldId id="259" r:id="rId5"/>
+    <p:sldId id="260" r:id="rId6"/>
+    <p:sldId id="261" r:id="rId7"/>
+    <p:sldId id="262" r:id="rId8"/>
+    <p:sldId id="263" r:id="rId9"/>
+    <p:sldId id="264" r:id="rId10"/>
+    <p:sldId id="265" r:id="rId11"/>
+    <p:sldId id="266" r:id="rId12"/>
+    <p:sldId id="267" r:id="rId13"/>
+    <p:sldId id="268" r:id="rId14"/>
+    <p:sldId id="269" r:id="rId15"/>
+    <p:sldId id="270" r:id="rId16"/>
   </p:sldIdLst>
   <p:sldSz cx="9144000" cy="6858000" type="screen4x3"/>
   <p:notesSz cx="6858000" cy="9144000"/>
@@ -2672,6 +2683,1504 @@
 </p:sld>
 </file>
 
+<file path=ppt/slides/slide10.xml><?xml version="1.0" encoding="utf-8"?>
+<p:sld xmlns:a="http://schemas.openxmlformats.org/drawingml/2006/main" xmlns:r="http://schemas.openxmlformats.org/officeDocument/2006/relationships" xmlns:p="http://schemas.openxmlformats.org/presentationml/2006/main">
+  <p:cSld>
+    <p:spTree>
+      <p:nvGrpSpPr>
+        <p:cNvPr id="1" name=""/>
+        <p:cNvGrpSpPr/>
+        <p:nvPr/>
+      </p:nvGrpSpPr>
+      <p:grpSpPr>
+        <a:xfrm>
+          <a:off x="0" y="0"/>
+          <a:ext cx="0" cy="0"/>
+          <a:chOff x="0" y="0"/>
+          <a:chExt cx="0" cy="0"/>
+        </a:xfrm>
+      </p:grpSpPr>
+      <p:sp>
+        <p:nvSpPr>
+          <p:cNvPr id="2" name="Title 1"/>
+          <p:cNvSpPr>
+            <a:spLocks noGrp="1"/>
+          </p:cNvSpPr>
+          <p:nvPr>
+            <p:ph type="title"/>
+          </p:nvPr>
+        </p:nvSpPr>
+        <p:spPr>
+          <a:xfrm>
+            <a:off x="457201" y="204787"/>
+            <a:ext cx="3008313" cy="871538"/>
+          </a:xfrm>
+        </p:spPr>
+        <p:txBody>
+          <a:bodyPr/>
+          <a:lstStyle/>
+          <a:p>
+            <a:pPr lvl="0" indent="0" marL="0">
+              <a:buNone/>
+            </a:pPr>
+            <a:r>
+              <a:rPr/>
+              <a:t>The Empirical Rule</a:t>
+            </a:r>
+          </a:p>
+        </p:txBody>
+      </p:sp>
+      <mc:AlternateContent xmlns:mc="http://schemas.openxmlformats.org/markup-compatibility/2006">
+        <mc:Choice xmlns:a14="http://schemas.microsoft.com/office/drawing/2010/main" Requires="a14">
+          <p:sp>
+            <p:nvSpPr>
+              <p:cNvPr id="4" name="Text Placeholder 3"/>
+              <p:cNvSpPr>
+                <a:spLocks noGrp="1"/>
+              </p:cNvSpPr>
+              <p:nvPr>
+                <p:ph idx="2" sz="half" type="body"/>
+              </p:nvPr>
+            </p:nvSpPr>
+            <p:spPr/>
+            <p:txBody>
+              <a:bodyPr/>
+              <a:lstStyle/>
+              <a:p>
+                <a:pPr lvl="0" indent="0" marL="0">
+                  <a:buNone/>
+                </a:pPr>
+                <a:r>
+                  <a:rPr/>
+                  <a:t>For a normal distribution, approximately:</a:t>
+                </a:r>
+              </a:p>
+              <a:p>
+                <a:pPr lvl="0"/>
+                <a:r>
+                  <a:rPr b="1"/>
+                  <a:t>68%</a:t>
+                </a:r>
+                <a:r>
+                  <a:rPr/>
+                  <a:t> of observations lie within </a:t>
+                </a:r>
+                <a14:m>
+                  <m:oMath xmlns:m="http://schemas.openxmlformats.org/officeDocument/2006/math">
+                    <m:r>
+                      <m:t>μ</m:t>
+                    </m:r>
+                    <m:r>
+                      <m:rPr>
+                        <m:sty m:val="p"/>
+                      </m:rPr>
+                      <m:t>±</m:t>
+                    </m:r>
+                    <m:r>
+                      <m:t>σ</m:t>
+                    </m:r>
+                  </m:oMath>
+                </a14:m>
+                <a:r>
+                  <a:rPr/>
+                  <a:t>;</a:t>
+                </a:r>
+              </a:p>
+              <a:p>
+                <a:pPr lvl="0"/>
+                <a:r>
+                  <a:rPr b="1"/>
+                  <a:t>95%</a:t>
+                </a:r>
+                <a:r>
+                  <a:rPr/>
+                  <a:t> lie within </a:t>
+                </a:r>
+                <a14:m>
+                  <m:oMath xmlns:m="http://schemas.openxmlformats.org/officeDocument/2006/math">
+                    <m:r>
+                      <m:t>μ</m:t>
+                    </m:r>
+                    <m:r>
+                      <m:rPr>
+                        <m:sty m:val="p"/>
+                      </m:rPr>
+                      <m:t>±</m:t>
+                    </m:r>
+                    <m:r>
+                      <m:t>2</m:t>
+                    </m:r>
+                    <m:r>
+                      <m:t>σ</m:t>
+                    </m:r>
+                  </m:oMath>
+                </a14:m>
+                <a:r>
+                  <a:rPr/>
+                  <a:t>;</a:t>
+                </a:r>
+              </a:p>
+              <a:p>
+                <a:pPr lvl="0"/>
+                <a:r>
+                  <a:rPr b="1"/>
+                  <a:t>99.7%</a:t>
+                </a:r>
+                <a:r>
+                  <a:rPr/>
+                  <a:t> lie within </a:t>
+                </a:r>
+                <a14:m>
+                  <m:oMath xmlns:m="http://schemas.openxmlformats.org/officeDocument/2006/math">
+                    <m:r>
+                      <m:t>μ</m:t>
+                    </m:r>
+                    <m:r>
+                      <m:rPr>
+                        <m:sty m:val="p"/>
+                      </m:rPr>
+                      <m:t>±</m:t>
+                    </m:r>
+                    <m:r>
+                      <m:t>3</m:t>
+                    </m:r>
+                    <m:r>
+                      <m:t>σ</m:t>
+                    </m:r>
+                  </m:oMath>
+                </a14:m>
+                <a:r>
+                  <a:rPr/>
+                  <a:t>.</a:t>
+                </a:r>
+              </a:p>
+            </p:txBody>
+          </p:sp>
+        </mc:Choice>
+      </mc:AlternateContent>
+      <p:pic>
+        <p:nvPicPr>
+          <p:cNvPr descr="Unit-06-Normal-CTL_files/figure-pptx/empirical-rule-1.png" id="0" name="Picture 1"/>
+          <p:cNvPicPr>
+            <a:picLocks noGrp="1" noChangeAspect="1"/>
+          </p:cNvPicPr>
+          <p:nvPr/>
+        </p:nvPicPr>
+        <p:blipFill>
+          <a:blip r:embed="rId2"/>
+          <a:stretch>
+            <a:fillRect/>
+          </a:stretch>
+        </p:blipFill>
+        <p:spPr bwMode="auto">
+          <a:xfrm>
+            <a:off x="3568700" y="736600"/>
+            <a:ext cx="5105400" cy="3302000"/>
+          </a:xfrm>
+          <a:prstGeom prst="rect">
+            <a:avLst/>
+          </a:prstGeom>
+          <a:noFill/>
+          <a:ln w="9525">
+            <a:noFill/>
+            <a:headEnd/>
+            <a:tailEnd/>
+          </a:ln>
+        </p:spPr>
+      </p:pic>
+      <p:sp>
+        <p:nvSpPr>
+          <p:cNvPr id="7" name="Slide Number Placeholder 6"/>
+          <p:cNvSpPr>
+            <a:spLocks noGrp="1"/>
+          </p:cNvSpPr>
+          <p:nvPr>
+            <p:ph idx="12" sz="quarter" type="sldNum"/>
+          </p:nvPr>
+        </p:nvSpPr>
+        <p:spPr/>
+        <p:txBody>
+          <a:bodyPr/>
+          <a:lstStyle/>
+          <a:p>
+            <a:fld id="{C5EF2332-01BF-834F-8236-50238282D533}" type="slidenum">
+              <a:rPr lang="en-US" smtClean="0"/>
+              <a:t>‹#›</a:t>
+            </a:fld>
+            <a:endParaRPr lang="en-US"/>
+          </a:p>
+        </p:txBody>
+      </p:sp>
+    </p:spTree>
+  </p:cSld>
+</p:sld>
+</file>
+
+<file path=ppt/slides/slide11.xml><?xml version="1.0" encoding="UTF-8"?><p:sld xmlns:a="http://schemas.openxmlformats.org/drawingml/2006/main" xmlns:r="http://schemas.openxmlformats.org/officeDocument/2006/relationships" xmlns:p="http://schemas.openxmlformats.org/presentationml/2006/main"><p:cSld><p:spTree><p:nvGrpSpPr><p:cNvPr id="1" name="" /><p:cNvGrpSpPr /><p:nvPr /></p:nvGrpSpPr><p:grpSpPr><a:xfrm><a:off x="0" y="0" /><a:ext cx="0" cy="0" /><a:chOff x="0" y="0" /><a:chExt cx="0" cy="0" /></a:xfrm></p:grpSpPr><p:sp><p:nvSpPr><p:cNvPr id="2" name="Title 1" /><p:cNvSpPr><a:spLocks noGrp="1" /></p:cNvSpPr><p:nvPr><p:ph type="title" /></p:nvPr></p:nvSpPr><p:spPr><a:xfrm><a:off x="457201" y="204787" /><a:ext cx="3008313" cy="871538" /></a:xfrm></p:spPr><p:txBody><a:bodyPr /><a:lstStyle /><a:p><a:pPr lvl="0" indent="0" marL="0"><a:buNone /></a:pPr><a:r><a:rPr /><a:t>Empirical Rule: Heights and IQ Scores</a:t></a:r></a:p></p:txBody></p:sp><mc:AlternateContent xmlns:mc="http://schemas.openxmlformats.org/markup-compatibility/2006"><mc:Choice xmlns:a14="http://schemas.microsoft.com/office/drawing/2010/main" Requires="a14"><p:sp><p:nvSpPr><p:cNvPr id="4" name="Text Placeholder 3" /><p:cNvSpPr><a:spLocks noGrp="1" /></p:cNvSpPr><p:nvPr><p:ph idx="2" sz="half" type="body" /></p:nvPr></p:nvSpPr><p:spPr /><p:txBody><a:bodyPr /><a:lstStyle /><a:p><a:pPr lvl="0" indent="0" marL="0"><a:buNone /></a:pPr><a:r><a:rPr /><a:t>For the height model with </a:t></a:r><a14:m><m:oMath xmlns:m="http://schemas.openxmlformats.org/officeDocument/2006/math"><m:r><m:t>μ</m:t></m:r><m:r><m:rPr><m:sty m:val="p" /></m:rPr><m:t>=</m:t></m:r><m:r><m:t>70</m:t></m:r></m:oMath></a14:m><a:r><a:rPr /><a:t> and </a:t></a:r><a14:m><m:oMath xmlns:m="http://schemas.openxmlformats.org/officeDocument/2006/math"><m:r><m:t>σ</m:t></m:r><m:r><m:rPr><m:sty m:val="p" /></m:rPr><m:t>=</m:t></m:r><m:r><m:t>4</m:t></m:r></m:oMath></a14:m><a:r><a:rPr /><a:t>:</a:t></a:r></a:p></p:txBody></p:sp></mc:Choice></mc:AlternateContent><p:graphicFrame><p:nvGraphicFramePr><p:cNvPr id="6" name="Content Placeholder 5" /><p:cNvGraphicFramePr><a:graphicFrameLocks noGrp="1" /></p:cNvGraphicFramePr><p:nvPr><p:ph idx="1" /></p:nvPr></p:nvGraphicFramePr><p:xfrm><a:off x="3568700" y="203200" /><a:ext cx="5105400" cy="4381500" /></p:xfrm><a:graphic><a:graphicData uri="http://schemas.openxmlformats.org/drawingml/2006/table"><a:tbl><a:tblPr firstRow="1" bandRow="1"><a:tableStyleId>{5C22544A-7EE6-4342-B048-85BDC9FD1C3A}</a:tableStyleId></a:tblPr><a:tblGrid><a:gridCol w="1701800" /><a:gridCol w="1701800" /><a:gridCol w="1701800" /></a:tblGrid><a:tr h="0"><a:tc><a:txBody><a:bodyPr /><a:lstStyle /><a:p><a:pPr lvl="0" indent="0" marL="0" algn="l"><a:buNone /></a:pPr><a:r><a:rPr /><a:t>Range</a:t></a:r></a:p></a:txBody><a:tcPr /></a:tc><a:tc><a:txBody><a:bodyPr /><a:lstStyle /><a:p><a:pPr lvl="0" indent="0" marL="0" algn="l"><a:buNone /></a:pPr><a:r><a:rPr /><a:t>Interval (inches)</a:t></a:r></a:p></a:txBody><a:tcPr /></a:tc><a:tc><a:txBody><a:bodyPr /><a:lstStyle /><a:p><a:pPr lvl="0" indent="0" marL="0" algn="l"><a:buNone /></a:pPr><a:r><a:rPr /><a:t>Approximate percentage</a:t></a:r></a:p></a:txBody><a:tcPr /></a:tc></a:tr><a:tr h="0"><a:tc><a:txBody><a:bodyPr /><a:lstStyle /><a:p><a:pPr lvl="0" indent="0" marL="0" algn="l"><a:buNone /></a:pPr><a14:m><m:oMath xmlns:m="http://schemas.openxmlformats.org/officeDocument/2006/math"><m:r><m:t>μ</m:t></m:r><m:r><m:rPr><m:sty m:val="p" /></m:rPr><m:t>±</m:t></m:r><m:r><m:t>σ</m:t></m:r></m:oMath></a14:m></a:p></a:txBody></a:tc><a:tc><a:txBody><a:bodyPr /><a:lstStyle /><a:p><a:pPr lvl="0" indent="0" marL="0" algn="l"><a:buNone /></a:pPr><a:r><a:rPr /><a:t>66–74</a:t></a:r></a:p></a:txBody></a:tc><a:tc><a:txBody><a:bodyPr /><a:lstStyle /><a:p><a:pPr lvl="0" indent="0" marL="0" algn="l"><a:buNone /></a:pPr><a:r><a:rPr /><a:t>68%</a:t></a:r></a:p></a:txBody></a:tc></a:tr><a:tr h="0"><a:tc><a:txBody><a:bodyPr /><a:lstStyle /><a:p><a:pPr lvl="0" indent="0" marL="0" algn="l"><a:buNone /></a:pPr><a14:m><m:oMath xmlns:m="http://schemas.openxmlformats.org/officeDocument/2006/math"><m:r><m:t>μ</m:t></m:r><m:r><m:rPr><m:sty m:val="p" /></m:rPr><m:t>±</m:t></m:r><m:r><m:t>2</m:t></m:r><m:r><m:t>σ</m:t></m:r></m:oMath></a14:m></a:p></a:txBody></a:tc><a:tc><a:txBody><a:bodyPr /><a:lstStyle /><a:p><a:pPr lvl="0" indent="0" marL="0" algn="l"><a:buNone /></a:pPr><a:r><a:rPr /><a:t>62–78</a:t></a:r></a:p></a:txBody></a:tc><a:tc><a:txBody><a:bodyPr /><a:lstStyle /><a:p><a:pPr lvl="0" indent="0" marL="0" algn="l"><a:buNone /></a:pPr><a:r><a:rPr /><a:t>95%</a:t></a:r></a:p></a:txBody></a:tc></a:tr><a:tr h="0"><a:tc><a:txBody><a:bodyPr /><a:lstStyle /><a:p><a:pPr lvl="0" indent="0" marL="0" algn="l"><a:buNone /></a:pPr><a14:m><m:oMath xmlns:m="http://schemas.openxmlformats.org/officeDocument/2006/math"><m:r><m:t>μ</m:t></m:r><m:r><m:rPr><m:sty m:val="p" /></m:rPr><m:t>±</m:t></m:r><m:r><m:t>3</m:t></m:r><m:r><m:t>σ</m:t></m:r></m:oMath></a14:m></a:p></a:txBody></a:tc><a:tc><a:txBody><a:bodyPr /><a:lstStyle /><a:p><a:pPr lvl="0" indent="0" marL="0" algn="l"><a:buNone /></a:pPr><a:r><a:rPr /><a:t>58–82</a:t></a:r></a:p></a:txBody></a:tc><a:tc><a:txBody><a:bodyPr /><a:lstStyle /><a:p><a:pPr lvl="0" indent="0" marL="0" algn="l"><a:buNone /></a:pPr><a:r><a:rPr /><a:t>99.7%</a:t></a:r></a:p></a:txBody></a:tc></a:tr></a:tbl></a:graphicData></a:graphic></p:graphicFrame><p:sp><p:nvSpPr><p:cNvPr id="7" name="Slide Number Placeholder 6" /><p:cNvSpPr><a:spLocks noGrp="1" /></p:cNvSpPr><p:nvPr><p:ph idx="12" sz="quarter" type="sldNum" /></p:nvPr></p:nvSpPr><p:spPr /><p:txBody><a:bodyPr /><a:lstStyle /><a:p><a:fld id="{C5EF2332-01BF-834F-8236-50238282D533}" type="slidenum"><a:rPr lang="en-US" smtClean="0" /><a:t>‹#›</a:t></a:fld><a:endParaRPr lang="en-US" /></a:p></p:txBody></p:sp></p:spTree></p:cSld></p:sld>
+</file>
+
+<file path=ppt/slides/slide12.xml><?xml version="1.0" encoding="utf-8"?>
+<p:sld xmlns:a="http://schemas.openxmlformats.org/drawingml/2006/main" xmlns:r="http://schemas.openxmlformats.org/officeDocument/2006/relationships" xmlns:p="http://schemas.openxmlformats.org/presentationml/2006/main">
+  <p:cSld>
+    <p:spTree>
+      <p:nvGrpSpPr>
+        <p:cNvPr id="1" name=""/>
+        <p:cNvGrpSpPr/>
+        <p:nvPr/>
+      </p:nvGrpSpPr>
+      <p:grpSpPr>
+        <a:xfrm>
+          <a:off x="0" y="0"/>
+          <a:ext cx="0" cy="0"/>
+          <a:chOff x="0" y="0"/>
+          <a:chExt cx="0" cy="0"/>
+        </a:xfrm>
+      </p:grpSpPr>
+      <mc:AlternateContent xmlns:mc="http://schemas.openxmlformats.org/markup-compatibility/2006">
+        <mc:Choice xmlns:a14="http://schemas.microsoft.com/office/drawing/2010/main" Requires="a14">
+          <p:sp>
+            <p:nvSpPr>
+              <p:cNvPr id="3" name="Text Placeholder 2"/>
+              <p:cNvSpPr>
+                <a:spLocks noGrp="1"/>
+              </p:cNvSpPr>
+              <p:nvPr>
+                <p:ph idx="1"/>
+              </p:nvPr>
+            </p:nvSpPr>
+            <p:spPr/>
+            <p:txBody>
+              <a:bodyPr/>
+              <a:lstStyle/>
+              <a:p>
+                <a:pPr lvl="0" indent="0" marL="0">
+                  <a:buNone/>
+                </a:pPr>
+                <a:r>
+                  <a:rPr/>
+                  <a:t>The source also illustrates an approximately normal IQ-score model with </a:t>
+                </a:r>
+                <a14:m>
+                  <m:oMath xmlns:m="http://schemas.openxmlformats.org/officeDocument/2006/math">
+                    <m:r>
+                      <m:t>μ</m:t>
+                    </m:r>
+                    <m:r>
+                      <m:rPr>
+                        <m:sty m:val="p"/>
+                      </m:rPr>
+                      <m:t>=</m:t>
+                    </m:r>
+                    <m:r>
+                      <m:t>100</m:t>
+                    </m:r>
+                  </m:oMath>
+                </a14:m>
+                <a:r>
+                  <a:rPr/>
+                  <a:t> and </a:t>
+                </a:r>
+                <a14:m>
+                  <m:oMath xmlns:m="http://schemas.openxmlformats.org/officeDocument/2006/math">
+                    <m:r>
+                      <m:t>σ</m:t>
+                    </m:r>
+                    <m:r>
+                      <m:rPr>
+                        <m:sty m:val="p"/>
+                      </m:rPr>
+                      <m:t>=</m:t>
+                    </m:r>
+                    <m:r>
+                      <m:t>15</m:t>
+                    </m:r>
+                  </m:oMath>
+                </a14:m>
+                <a:r>
+                  <a:rPr/>
+                  <a:t>. Its corresponding intervals are </a:t>
+                </a:r>
+                <a:r>
+                  <a:rPr b="1"/>
+                  <a:t>85–115</a:t>
+                </a:r>
+                <a:r>
+                  <a:rPr/>
+                  <a:t>, </a:t>
+                </a:r>
+                <a:r>
+                  <a:rPr b="1"/>
+                  <a:t>70–130</a:t>
+                </a:r>
+                <a:r>
+                  <a:rPr/>
+                  <a:t>, and </a:t>
+                </a:r>
+                <a:r>
+                  <a:rPr b="1"/>
+                  <a:t>55–145</a:t>
+                </a:r>
+                <a:r>
+                  <a:rPr/>
+                  <a:t>.</a:t>
+                </a:r>
+              </a:p>
+              <a:p>
+                <a:pPr lvl="0" indent="0" marL="0">
+                  <a:buNone/>
+                </a:pPr>
+                <a:r>
+                  <a:rPr/>
+                  <a:t>The source mentions </a:t>
+                </a:r>
+                <a:r>
+                  <a:rPr i="1"/>
+                  <a:t>The Bell Curve</a:t>
+                </a:r>
+                <a:r>
+                  <a:rPr/>
+                  <a:t> (Herrnstein and Murray, 1994) in this context. The normal model here is used only to illustrate the empirical rule.</a:t>
+                </a:r>
+              </a:p>
+            </p:txBody>
+          </p:sp>
+        </mc:Choice>
+      </mc:AlternateContent>
+      <p:sp>
+        <p:nvSpPr>
+          <p:cNvPr id="4" name="Slide Number Placeholder 3"/>
+          <p:cNvSpPr>
+            <a:spLocks noGrp="1"/>
+          </p:cNvSpPr>
+          <p:nvPr>
+            <p:ph idx="10" sz="quarter" type="sldNum"/>
+          </p:nvPr>
+        </p:nvSpPr>
+        <p:spPr/>
+        <p:txBody>
+          <a:bodyPr/>
+          <a:lstStyle/>
+          <a:p>
+            <a:fld id="{9C13042B-154E-4D18-B726-07B2F714EFCF}" type="slidenum">
+              <a:rPr lang="en-US" smtClean="0"/>
+              <a:pPr/>
+              <a:t>‹#›</a:t>
+            </a:fld>
+            <a:endParaRPr dirty="0" lang="en-US"/>
+          </a:p>
+        </p:txBody>
+      </p:sp>
+    </p:spTree>
+  </p:cSld>
+</p:sld>
+</file>
+
+<file path=ppt/slides/slide13.xml><?xml version="1.0" encoding="utf-8"?>
+<p:sld xmlns:a="http://schemas.openxmlformats.org/drawingml/2006/main" xmlns:r="http://schemas.openxmlformats.org/officeDocument/2006/relationships" xmlns:p="http://schemas.openxmlformats.org/presentationml/2006/main">
+  <p:cSld>
+    <p:spTree>
+      <p:nvGrpSpPr>
+        <p:cNvPr id="1" name=""/>
+        <p:cNvGrpSpPr/>
+        <p:nvPr/>
+      </p:nvGrpSpPr>
+      <p:grpSpPr>
+        <a:xfrm>
+          <a:off x="0" y="0"/>
+          <a:ext cx="0" cy="0"/>
+          <a:chOff x="0" y="0"/>
+          <a:chExt cx="0" cy="0"/>
+        </a:xfrm>
+      </p:grpSpPr>
+      <p:sp>
+        <p:nvSpPr>
+          <p:cNvPr id="2" name="Title 1"/>
+          <p:cNvSpPr>
+            <a:spLocks noGrp="1"/>
+          </p:cNvSpPr>
+          <p:nvPr>
+            <p:ph type="title"/>
+          </p:nvPr>
+        </p:nvSpPr>
+        <p:spPr>
+          <a:xfrm>
+            <a:off x="722313" y="1660820"/>
+            <a:ext cx="7772400" cy="4108156"/>
+          </a:xfrm>
+          <a:prstGeom prst="rect">
+            <a:avLst/>
+          </a:prstGeom>
+        </p:spPr>
+        <p:txBody>
+          <a:bodyPr/>
+          <a:lstStyle/>
+          <a:p>
+            <a:pPr lvl="0" indent="0" marL="0">
+              <a:buNone/>
+            </a:pPr>
+            <a:r>
+              <a:rPr/>
+              <a:t>Standard Normal Distribution: Probabilities</a:t>
+            </a:r>
+          </a:p>
+        </p:txBody>
+      </p:sp>
+      <p:sp>
+        <p:nvSpPr>
+          <p:cNvPr id="3" name="Slide Number Placeholder 2"/>
+          <p:cNvSpPr>
+            <a:spLocks noGrp="1"/>
+          </p:cNvSpPr>
+          <p:nvPr>
+            <p:ph idx="10" sz="quarter" type="sldNum"/>
+          </p:nvPr>
+        </p:nvSpPr>
+        <p:spPr/>
+        <p:txBody>
+          <a:bodyPr/>
+          <a:lstStyle/>
+          <a:p>
+            <a:fld id="{9C13042B-154E-4D18-B726-07B2F714EFCF}" type="slidenum">
+              <a:rPr lang="en-US" smtClean="0"/>
+              <a:pPr/>
+              <a:t>‹#›</a:t>
+            </a:fld>
+            <a:endParaRPr dirty="0" lang="en-US"/>
+          </a:p>
+        </p:txBody>
+      </p:sp>
+    </p:spTree>
+  </p:cSld>
+</p:sld>
+</file>
+
+<file path=ppt/slides/slide14.xml><?xml version="1.0" encoding="utf-8"?>
+<p:sld xmlns:a="http://schemas.openxmlformats.org/drawingml/2006/main" xmlns:r="http://schemas.openxmlformats.org/officeDocument/2006/relationships" xmlns:p="http://schemas.openxmlformats.org/presentationml/2006/main">
+  <p:cSld>
+    <p:spTree>
+      <p:nvGrpSpPr>
+        <p:cNvPr id="1" name=""/>
+        <p:cNvGrpSpPr/>
+        <p:nvPr/>
+      </p:nvGrpSpPr>
+      <p:grpSpPr>
+        <a:xfrm>
+          <a:off x="0" y="0"/>
+          <a:ext cx="0" cy="0"/>
+          <a:chOff x="0" y="0"/>
+          <a:chExt cx="0" cy="0"/>
+        </a:xfrm>
+      </p:grpSpPr>
+      <p:sp>
+        <p:nvSpPr>
+          <p:cNvPr id="2" name="Title Placeholder 1"/>
+          <p:cNvSpPr>
+            <a:spLocks noGrp="1"/>
+          </p:cNvSpPr>
+          <p:nvPr>
+            <p:ph type="title"/>
+          </p:nvPr>
+        </p:nvSpPr>
+        <p:spPr bwMode="auto">
+          <a:xfrm>
+            <a:off x="433680" y="423297"/>
+            <a:ext cx="8229600" cy="784602"/>
+          </a:xfrm>
+          <a:prstGeom prst="rect">
+            <a:avLst/>
+          </a:prstGeom>
+          <a:noFill/>
+          <a:ln w="9525">
+            <a:noFill/>
+            <a:miter lim="800000"/>
+            <a:headEnd/>
+            <a:tailEnd/>
+          </a:ln>
+        </p:spPr>
+        <p:txBody>
+          <a:bodyPr/>
+          <a:lstStyle/>
+          <a:p>
+            <a:pPr lvl="0" indent="0" marL="0">
+              <a:buNone/>
+            </a:pPr>
+            <a:r>
+              <a:rPr/>
+              <a:t>The Standard Normal Distribution</a:t>
+            </a:r>
+          </a:p>
+        </p:txBody>
+      </p:sp>
+      <mc:AlternateContent xmlns:mc="http://schemas.openxmlformats.org/markup-compatibility/2006">
+        <mc:Choice xmlns:a14="http://schemas.microsoft.com/office/drawing/2010/main" Requires="a14">
+          <p:sp>
+            <p:nvSpPr>
+              <p:cNvPr id="3" name="Text Placeholder 2"/>
+              <p:cNvSpPr>
+                <a:spLocks noGrp="1"/>
+              </p:cNvSpPr>
+              <p:nvPr>
+                <p:ph idx="1"/>
+              </p:nvPr>
+            </p:nvSpPr>
+            <p:spPr/>
+            <p:txBody>
+              <a:bodyPr/>
+              <a:lstStyle/>
+              <a:p>
+                <a:pPr lvl="0" indent="0" marL="0">
+                  <a:buNone/>
+                </a:pPr>
+                <a:r>
+                  <a:rPr/>
+                  <a:t>There are infinitely many normal curves: </a:t>
+                </a:r>
+                <a14:m>
+                  <m:oMath xmlns:m="http://schemas.openxmlformats.org/officeDocument/2006/math">
+                    <m:r>
+                      <m:t>μ</m:t>
+                    </m:r>
+                  </m:oMath>
+                </a14:m>
+                <a:r>
+                  <a:rPr/>
+                  <a:t> may be any real number, and </a:t>
+                </a:r>
+                <a14:m>
+                  <m:oMath xmlns:m="http://schemas.openxmlformats.org/officeDocument/2006/math">
+                    <m:r>
+                      <m:t>σ</m:t>
+                    </m:r>
+                  </m:oMath>
+                </a14:m>
+                <a:r>
+                  <a:rPr/>
+                  <a:t> may be any positive real number.</a:t>
+                </a:r>
+              </a:p>
+              <a:p>
+                <a:pPr lvl="0" indent="0" marL="0">
+                  <a:buNone/>
+                </a:pPr>
+                <a:r>
+                  <a:rPr/>
+                  <a:t>The </a:t>
+                </a:r>
+                <a:r>
+                  <a:rPr b="1"/>
+                  <a:t>standard normal distribution</a:t>
+                </a:r>
+                <a:r>
+                  <a:rPr/>
+                  <a:t> has </a:t>
+                </a:r>
+                <a14:m>
+                  <m:oMath xmlns:m="http://schemas.openxmlformats.org/officeDocument/2006/math">
+                    <m:r>
+                      <m:t>μ</m:t>
+                    </m:r>
+                    <m:r>
+                      <m:rPr>
+                        <m:sty m:val="p"/>
+                      </m:rPr>
+                      <m:t>=</m:t>
+                    </m:r>
+                    <m:r>
+                      <m:t>0</m:t>
+                    </m:r>
+                  </m:oMath>
+                </a14:m>
+                <a:r>
+                  <a:rPr/>
+                  <a:t> and </a:t>
+                </a:r>
+                <a14:m>
+                  <m:oMath xmlns:m="http://schemas.openxmlformats.org/officeDocument/2006/math">
+                    <m:r>
+                      <m:t>σ</m:t>
+                    </m:r>
+                    <m:r>
+                      <m:rPr>
+                        <m:sty m:val="p"/>
+                      </m:rPr>
+                      <m:t>=</m:t>
+                    </m:r>
+                    <m:r>
+                      <m:t>1</m:t>
+                    </m:r>
+                  </m:oMath>
+                </a14:m>
+                <a:r>
+                  <a:rPr/>
+                  <a:t>:</a:t>
+                </a:r>
+              </a:p>
+              <a:p>
+                <a:pPr lvl="0" indent="0" marL="0">
+                  <a:buNone/>
+                </a:pPr>
+                <a14:m>
+                  <m:oMathPara xmlns:m="http://schemas.openxmlformats.org/officeDocument/2006/math">
+                    <m:oMathParaPr>
+                      <m:jc m:val="center"/>
+                    </m:oMathParaPr>
+                    <m:oMath>
+                      <m:r>
+                        <m:t>Z</m:t>
+                      </m:r>
+                      <m:r>
+                        <m:rPr>
+                          <m:sty m:val="p"/>
+                        </m:rPr>
+                        <m:t>∼</m:t>
+                      </m:r>
+                      <m:r>
+                        <m:t>N</m:t>
+                      </m:r>
+                      <m:d>
+                        <m:dPr>
+                          <m:begChr m:val="("/>
+                          <m:sepChr m:val=""/>
+                          <m:endChr m:val=")"/>
+                          <m:grow/>
+                        </m:dPr>
+                        <m:e>
+                          <m:r>
+                            <m:t>0</m:t>
+                          </m:r>
+                          <m:r>
+                            <m:rPr>
+                              <m:sty m:val="p"/>
+                            </m:rPr>
+                            <m:t>,</m:t>
+                          </m:r>
+                          <m:r>
+                            <m:t>1</m:t>
+                          </m:r>
+                        </m:e>
+                      </m:d>
+                      <m:r>
+                        <m:rPr>
+                          <m:sty m:val="p"/>
+                        </m:rPr>
+                        <m:t>,</m:t>
+                      </m:r>
+                      <m:r>
+                        <m:t>  </m:t>
+                      </m:r>
+                      <m:sSub>
+                        <m:e>
+                          <m:r>
+                            <m:t>f</m:t>
+                          </m:r>
+                        </m:e>
+                        <m:sub>
+                          <m:r>
+                            <m:t>Z</m:t>
+                          </m:r>
+                        </m:sub>
+                      </m:sSub>
+                      <m:d>
+                        <m:dPr>
+                          <m:begChr m:val="("/>
+                          <m:sepChr m:val=""/>
+                          <m:endChr m:val=")"/>
+                          <m:grow/>
+                        </m:dPr>
+                        <m:e>
+                          <m:r>
+                            <m:t>z</m:t>
+                          </m:r>
+                        </m:e>
+                      </m:d>
+                      <m:r>
+                        <m:rPr>
+                          <m:sty m:val="p"/>
+                        </m:rPr>
+                        <m:t>=</m:t>
+                      </m:r>
+                      <m:f>
+                        <m:fPr>
+                          <m:type m:val="bar"/>
+                        </m:fPr>
+                        <m:num>
+                          <m:r>
+                            <m:t>1</m:t>
+                          </m:r>
+                        </m:num>
+                        <m:den>
+                          <m:rad>
+                            <m:radPr>
+                              <m:degHide m:val="on"/>
+                            </m:radPr>
+                            <m:deg/>
+                            <m:e>
+                              <m:r>
+                                <m:t>2</m:t>
+                              </m:r>
+                              <m:r>
+                                <m:t>π</m:t>
+                              </m:r>
+                            </m:e>
+                          </m:rad>
+                        </m:den>
+                      </m:f>
+                      <m:sSup>
+                        <m:e>
+                          <m:r>
+                            <m:t>e</m:t>
+                          </m:r>
+                        </m:e>
+                        <m:sup>
+                          <m:r>
+                            <m:rPr>
+                              <m:sty m:val="p"/>
+                            </m:rPr>
+                            <m:t>−</m:t>
+                          </m:r>
+                          <m:sSup>
+                            <m:e>
+                              <m:r>
+                                <m:t>z</m:t>
+                              </m:r>
+                            </m:e>
+                            <m:sup>
+                              <m:r>
+                                <m:t>2</m:t>
+                              </m:r>
+                            </m:sup>
+                          </m:sSup>
+                          <m:r>
+                            <m:rPr>
+                              <m:sty m:val="p"/>
+                            </m:rPr>
+                            <m:t>/</m:t>
+                          </m:r>
+                          <m:r>
+                            <m:t>2</m:t>
+                          </m:r>
+                        </m:sup>
+                      </m:sSup>
+                      <m:r>
+                        <m:rPr>
+                          <m:sty m:val="p"/>
+                        </m:rPr>
+                        <m:t>,</m:t>
+                      </m:r>
+                      <m:r>
+                        <m:t> </m:t>
+                      </m:r>
+                      <m:r>
+                        <m:rPr>
+                          <m:sty m:val="p"/>
+                        </m:rPr>
+                        <m:t>−</m:t>
+                      </m:r>
+                      <m:r>
+                        <m:rPr>
+                          <m:sty m:val="p"/>
+                        </m:rPr>
+                        <m:t>∞</m:t>
+                      </m:r>
+                      <m:r>
+                        <m:rPr>
+                          <m:sty m:val="p"/>
+                        </m:rPr>
+                        <m:t>&lt;</m:t>
+                      </m:r>
+                      <m:r>
+                        <m:t>z</m:t>
+                      </m:r>
+                      <m:r>
+                        <m:rPr>
+                          <m:sty m:val="p"/>
+                        </m:rPr>
+                        <m:t>&lt;</m:t>
+                      </m:r>
+                      <m:r>
+                        <m:rPr>
+                          <m:sty m:val="p"/>
+                        </m:rPr>
+                        <m:t>∞</m:t>
+                      </m:r>
+                      <m:r>
+                        <m:rPr>
+                          <m:sty m:val="p"/>
+                        </m:rPr>
+                        <m:t>.</m:t>
+                      </m:r>
+                    </m:oMath>
+                  </m:oMathPara>
+                </a14:m>
+              </a:p>
+              <a:p>
+                <a:pPr lvl="0" indent="0" marL="0">
+                  <a:buNone/>
+                </a:pPr>
+                <a:r>
+                  <a:rPr/>
+                  <a:t>Its density has no elementary antiderivative. We use a </a:t>
+                </a:r>
+                <a:r>
+                  <a:rPr b="1"/>
+                  <a:t>Z-table</a:t>
+                </a:r>
+                <a:r>
+                  <a:rPr/>
+                  <a:t> or software to calculate areas.</a:t>
+                </a:r>
+              </a:p>
+            </p:txBody>
+          </p:sp>
+        </mc:Choice>
+      </mc:AlternateContent>
+      <p:sp>
+        <p:nvSpPr>
+          <p:cNvPr id="4" name="Slide Number Placeholder 3"/>
+          <p:cNvSpPr>
+            <a:spLocks noGrp="1"/>
+          </p:cNvSpPr>
+          <p:nvPr>
+            <p:ph idx="10" sz="quarter" type="sldNum"/>
+          </p:nvPr>
+        </p:nvSpPr>
+        <p:spPr/>
+        <p:txBody>
+          <a:bodyPr/>
+          <a:lstStyle/>
+          <a:p>
+            <a:fld id="{9C13042B-154E-4D18-B726-07B2F714EFCF}" type="slidenum">
+              <a:rPr lang="en-US" smtClean="0"/>
+              <a:pPr/>
+              <a:t>‹#›</a:t>
+            </a:fld>
+            <a:endParaRPr dirty="0" lang="en-US"/>
+          </a:p>
+        </p:txBody>
+      </p:sp>
+    </p:spTree>
+  </p:cSld>
+</p:sld>
+</file>
+
+<file path=ppt/slides/slide15.xml><?xml version="1.0" encoding="utf-8"?>
+<p:sld xmlns:a="http://schemas.openxmlformats.org/drawingml/2006/main" xmlns:r="http://schemas.openxmlformats.org/officeDocument/2006/relationships" xmlns:p="http://schemas.openxmlformats.org/presentationml/2006/main">
+  <p:cSld>
+    <p:spTree>
+      <p:nvGrpSpPr>
+        <p:cNvPr id="1" name=""/>
+        <p:cNvGrpSpPr/>
+        <p:nvPr/>
+      </p:nvGrpSpPr>
+      <p:grpSpPr>
+        <a:xfrm>
+          <a:off x="0" y="0"/>
+          <a:ext cx="0" cy="0"/>
+          <a:chOff x="0" y="0"/>
+          <a:chExt cx="0" cy="0"/>
+        </a:xfrm>
+      </p:grpSpPr>
+      <p:sp>
+        <p:nvSpPr>
+          <p:cNvPr id="2" name="Title Placeholder 1"/>
+          <p:cNvSpPr>
+            <a:spLocks noGrp="1"/>
+          </p:cNvSpPr>
+          <p:nvPr>
+            <p:ph type="title"/>
+          </p:nvPr>
+        </p:nvSpPr>
+        <p:spPr bwMode="auto">
+          <a:xfrm>
+            <a:off x="433680" y="423297"/>
+            <a:ext cx="8229600" cy="784602"/>
+          </a:xfrm>
+          <a:prstGeom prst="rect">
+            <a:avLst/>
+          </a:prstGeom>
+          <a:noFill/>
+          <a:ln w="9525">
+            <a:noFill/>
+            <a:miter lim="800000"/>
+            <a:headEnd/>
+            <a:tailEnd/>
+          </a:ln>
+        </p:spPr>
+        <p:txBody>
+          <a:bodyPr/>
+          <a:lstStyle/>
+          <a:p>
+            <a:pPr lvl="0" indent="0" marL="0">
+              <a:buNone/>
+            </a:pPr>
+            <a:r>
+              <a:rPr/>
+              <a:t>Reading the Z-Table</a:t>
+            </a:r>
+          </a:p>
+        </p:txBody>
+      </p:sp>
+      <mc:AlternateContent xmlns:mc="http://schemas.openxmlformats.org/markup-compatibility/2006">
+        <mc:Choice xmlns:a14="http://schemas.microsoft.com/office/drawing/2010/main" Requires="a14">
+          <p:sp>
+            <p:nvSpPr>
+              <p:cNvPr id="3" name="Text Placeholder 2"/>
+              <p:cNvSpPr>
+                <a:spLocks noGrp="1"/>
+              </p:cNvSpPr>
+              <p:nvPr>
+                <p:ph idx="1"/>
+              </p:nvPr>
+            </p:nvSpPr>
+            <p:spPr/>
+            <p:txBody>
+              <a:bodyPr/>
+              <a:lstStyle/>
+              <a:p>
+                <a:pPr lvl="0"/>
+                <a:r>
+                  <a:rPr/>
+                  <a:t>The total area under the curve is </a:t>
+                </a:r>
+                <a:r>
+                  <a:rPr b="1"/>
+                  <a:t>1</a:t>
+                </a:r>
+                <a:r>
+                  <a:rPr/>
+                  <a:t>.</a:t>
+                </a:r>
+              </a:p>
+              <a:p>
+                <a:pPr lvl="0"/>
+                <a:r>
+                  <a:rPr/>
+                  <a:t>The standard normal curve is symmetric about </a:t>
+                </a:r>
+                <a:r>
+                  <a:rPr b="1"/>
+                  <a:t>0</a:t>
+                </a:r>
+                <a:r>
+                  <a:rPr/>
+                  <a:t>.</a:t>
+                </a:r>
+              </a:p>
+              <a:p>
+                <a:pPr lvl="0"/>
+                <a:r>
+                  <a:rPr/>
+                  <a:t>The table used here gives the area </a:t>
+                </a:r>
+                <a:r>
+                  <a:rPr b="1"/>
+                  <a:t>to the left</a:t>
+                </a:r>
+                <a:r>
+                  <a:rPr/>
+                  <a:t>: </a:t>
+                </a:r>
+                <a14:m>
+                  <m:oMath xmlns:m="http://schemas.openxmlformats.org/officeDocument/2006/math">
+                    <m:r>
+                      <m:t>Φ</m:t>
+                    </m:r>
+                    <m:d>
+                      <m:dPr>
+                        <m:begChr m:val="("/>
+                        <m:sepChr m:val=""/>
+                        <m:endChr m:val=")"/>
+                        <m:grow/>
+                      </m:dPr>
+                      <m:e>
+                        <m:r>
+                          <m:t>z</m:t>
+                        </m:r>
+                      </m:e>
+                    </m:d>
+                    <m:r>
+                      <m:rPr>
+                        <m:sty m:val="p"/>
+                      </m:rPr>
+                      <m:t>=</m:t>
+                    </m:r>
+                    <m:r>
+                      <m:t>P</m:t>
+                    </m:r>
+                    <m:d>
+                      <m:dPr>
+                        <m:begChr m:val="("/>
+                        <m:sepChr m:val=""/>
+                        <m:endChr m:val=")"/>
+                        <m:grow/>
+                      </m:dPr>
+                      <m:e>
+                        <m:r>
+                          <m:t>Z</m:t>
+                        </m:r>
+                        <m:r>
+                          <m:rPr>
+                            <m:sty m:val="p"/>
+                          </m:rPr>
+                          <m:t>≤</m:t>
+                        </m:r>
+                        <m:r>
+                          <m:t>z</m:t>
+                        </m:r>
+                      </m:e>
+                    </m:d>
+                  </m:oMath>
+                </a14:m>
+                <a:r>
+                  <a:rPr/>
+                  <a:t>.</a:t>
+                </a:r>
+              </a:p>
+              <a:p>
+                <a:pPr lvl="0"/>
+                <a:r>
+                  <a:rPr/>
+                  <a:t>Other tables may use different area conventions; always check the table heading.</a:t>
+                </a:r>
+              </a:p>
+              <a:p>
+                <a:pPr lvl="0"/>
+                <a:r>
+                  <a:rPr/>
+                  <a:t>Use the row for the ones and tenths digits and the column for the hundredths digit.</a:t>
+                </a:r>
+              </a:p>
+              <a:p>
+                <a:pPr lvl="0"/>
+                <a:r>
+                  <a:rPr/>
+                  <a:t>For a continuous random variable, </a:t>
+                </a:r>
+                <a14:m>
+                  <m:oMath xmlns:m="http://schemas.openxmlformats.org/officeDocument/2006/math">
+                    <m:r>
+                      <m:t>P</m:t>
+                    </m:r>
+                    <m:d>
+                      <m:dPr>
+                        <m:begChr m:val="("/>
+                        <m:sepChr m:val=""/>
+                        <m:endChr m:val=")"/>
+                        <m:grow/>
+                      </m:dPr>
+                      <m:e>
+                        <m:r>
+                          <m:t>Z</m:t>
+                        </m:r>
+                        <m:r>
+                          <m:rPr>
+                            <m:sty m:val="p"/>
+                          </m:rPr>
+                          <m:t>&lt;</m:t>
+                        </m:r>
+                        <m:r>
+                          <m:t>z</m:t>
+                        </m:r>
+                      </m:e>
+                    </m:d>
+                    <m:r>
+                      <m:rPr>
+                        <m:sty m:val="p"/>
+                      </m:rPr>
+                      <m:t>=</m:t>
+                    </m:r>
+                    <m:r>
+                      <m:t>P</m:t>
+                    </m:r>
+                    <m:d>
+                      <m:dPr>
+                        <m:begChr m:val="("/>
+                        <m:sepChr m:val=""/>
+                        <m:endChr m:val=")"/>
+                        <m:grow/>
+                      </m:dPr>
+                      <m:e>
+                        <m:r>
+                          <m:t>Z</m:t>
+                        </m:r>
+                        <m:r>
+                          <m:rPr>
+                            <m:sty m:val="p"/>
+                          </m:rPr>
+                          <m:t>≤</m:t>
+                        </m:r>
+                        <m:r>
+                          <m:t>z</m:t>
+                        </m:r>
+                      </m:e>
+                    </m:d>
+                  </m:oMath>
+                </a14:m>
+                <a:r>
+                  <a:rPr/>
+                  <a:t>.</a:t>
+                </a:r>
+              </a:p>
+            </p:txBody>
+          </p:sp>
+        </mc:Choice>
+      </mc:AlternateContent>
+      <p:sp>
+        <p:nvSpPr>
+          <p:cNvPr id="4" name="Slide Number Placeholder 3"/>
+          <p:cNvSpPr>
+            <a:spLocks noGrp="1"/>
+          </p:cNvSpPr>
+          <p:nvPr>
+            <p:ph idx="10" sz="quarter" type="sldNum"/>
+          </p:nvPr>
+        </p:nvSpPr>
+        <p:spPr/>
+        <p:txBody>
+          <a:bodyPr/>
+          <a:lstStyle/>
+          <a:p>
+            <a:fld id="{9C13042B-154E-4D18-B726-07B2F714EFCF}" type="slidenum">
+              <a:rPr lang="en-US" smtClean="0"/>
+              <a:pPr/>
+              <a:t>‹#›</a:t>
+            </a:fld>
+            <a:endParaRPr dirty="0" lang="en-US"/>
+          </a:p>
+        </p:txBody>
+      </p:sp>
+    </p:spTree>
+  </p:cSld>
+  <p:timing>
+    <p:tnLst>
+      <p:par>
+        <p:cTn id="1" dur="indefinite" restart="never" nodeType="tmRoot">
+          <p:childTnLst>
+            <p:seq concurrent="1" nextAc="seek">
+              <p:cTn id="2" dur="indefinite" nodeType="mainSeq">
+                <p:childTnLst>
+                  <p:par>
+                    <p:cTn id="3" fill="hold">
+                      <p:stCondLst>
+                        <p:cond delay="indefinite"/>
+                      </p:stCondLst>
+                      <p:childTnLst>
+                        <p:par>
+                          <p:cTn id="4" fill="hold">
+                            <p:stCondLst>
+                              <p:cond delay="0"/>
+                            </p:stCondLst>
+                            <p:childTnLst>
+                              <p:par>
+                                <p:cTn id="5" presetID="1" presetClass="entr" presetSubtype="0" fill="hold" grpId="0" nodeType="clickEffect">
+                                  <p:stCondLst>
+                                    <p:cond delay="0"/>
+                                  </p:stCondLst>
+                                  <p:childTnLst>
+                                    <p:set>
+                                      <p:cBhvr>
+                                        <p:cTn id="6" dur="1" fill="hold">
+                                          <p:stCondLst>
+                                            <p:cond delay="0"/>
+                                          </p:stCondLst>
+                                        </p:cTn>
+                                        <p:tgtEl>
+                                          <p:spTgt spid="3">
+                                            <p:txEl>
+                                              <p:pRg st="0" end="0"/>
+                                            </p:txEl>
+                                          </p:spTgt>
+                                        </p:tgtEl>
+                                        <p:attrNameLst>
+                                          <p:attrName>style.visibility</p:attrName>
+                                        </p:attrNameLst>
+                                      </p:cBhvr>
+                                      <p:to>
+                                        <p:strVal val="visible"/>
+                                      </p:to>
+                                    </p:set>
+                                  </p:childTnLst>
+                                </p:cTn>
+                              </p:par>
+                            </p:childTnLst>
+                          </p:cTn>
+                        </p:par>
+                      </p:childTnLst>
+                    </p:cTn>
+                  </p:par>
+                  <p:par>
+                    <p:cTn id="7" fill="hold">
+                      <p:stCondLst>
+                        <p:cond delay="indefinite"/>
+                      </p:stCondLst>
+                      <p:childTnLst>
+                        <p:par>
+                          <p:cTn id="8" fill="hold">
+                            <p:stCondLst>
+                              <p:cond delay="0"/>
+                            </p:stCondLst>
+                            <p:childTnLst>
+                              <p:par>
+                                <p:cTn id="9" presetID="1" presetClass="entr" presetSubtype="0" fill="hold" grpId="0" nodeType="clickEffect">
+                                  <p:stCondLst>
+                                    <p:cond delay="0"/>
+                                  </p:stCondLst>
+                                  <p:childTnLst>
+                                    <p:set>
+                                      <p:cBhvr>
+                                        <p:cTn id="10" dur="1" fill="hold">
+                                          <p:stCondLst>
+                                            <p:cond delay="0"/>
+                                          </p:stCondLst>
+                                        </p:cTn>
+                                        <p:tgtEl>
+                                          <p:spTgt spid="3">
+                                            <p:txEl>
+                                              <p:pRg st="1" end="1"/>
+                                            </p:txEl>
+                                          </p:spTgt>
+                                        </p:tgtEl>
+                                        <p:attrNameLst>
+                                          <p:attrName>style.visibility</p:attrName>
+                                        </p:attrNameLst>
+                                      </p:cBhvr>
+                                      <p:to>
+                                        <p:strVal val="visible"/>
+                                      </p:to>
+                                    </p:set>
+                                  </p:childTnLst>
+                                </p:cTn>
+                              </p:par>
+                            </p:childTnLst>
+                          </p:cTn>
+                        </p:par>
+                      </p:childTnLst>
+                    </p:cTn>
+                  </p:par>
+                  <p:par>
+                    <p:cTn id="11" fill="hold">
+                      <p:stCondLst>
+                        <p:cond delay="indefinite"/>
+                      </p:stCondLst>
+                      <p:childTnLst>
+                        <p:par>
+                          <p:cTn id="12" fill="hold">
+                            <p:stCondLst>
+                              <p:cond delay="0"/>
+                            </p:stCondLst>
+                            <p:childTnLst>
+                              <p:par>
+                                <p:cTn id="13" presetID="1" presetClass="entr" presetSubtype="0" fill="hold" grpId="0" nodeType="clickEffect">
+                                  <p:stCondLst>
+                                    <p:cond delay="0"/>
+                                  </p:stCondLst>
+                                  <p:childTnLst>
+                                    <p:set>
+                                      <p:cBhvr>
+                                        <p:cTn id="14" dur="1" fill="hold">
+                                          <p:stCondLst>
+                                            <p:cond delay="0"/>
+                                          </p:stCondLst>
+                                        </p:cTn>
+                                        <p:tgtEl>
+                                          <p:spTgt spid="3">
+                                            <p:txEl>
+                                              <p:pRg st="2" end="2"/>
+                                            </p:txEl>
+                                          </p:spTgt>
+                                        </p:tgtEl>
+                                        <p:attrNameLst>
+                                          <p:attrName>style.visibility</p:attrName>
+                                        </p:attrNameLst>
+                                      </p:cBhvr>
+                                      <p:to>
+                                        <p:strVal val="visible"/>
+                                      </p:to>
+                                    </p:set>
+                                  </p:childTnLst>
+                                </p:cTn>
+                              </p:par>
+                            </p:childTnLst>
+                          </p:cTn>
+                        </p:par>
+                      </p:childTnLst>
+                    </p:cTn>
+                  </p:par>
+                  <p:par>
+                    <p:cTn id="15" fill="hold">
+                      <p:stCondLst>
+                        <p:cond delay="indefinite"/>
+                      </p:stCondLst>
+                      <p:childTnLst>
+                        <p:par>
+                          <p:cTn id="16" fill="hold">
+                            <p:stCondLst>
+                              <p:cond delay="0"/>
+                            </p:stCondLst>
+                            <p:childTnLst>
+                              <p:par>
+                                <p:cTn id="17" presetID="1" presetClass="entr" presetSubtype="0" fill="hold" grpId="0" nodeType="clickEffect">
+                                  <p:stCondLst>
+                                    <p:cond delay="0"/>
+                                  </p:stCondLst>
+                                  <p:childTnLst>
+                                    <p:set>
+                                      <p:cBhvr>
+                                        <p:cTn id="18" dur="1" fill="hold">
+                                          <p:stCondLst>
+                                            <p:cond delay="0"/>
+                                          </p:stCondLst>
+                                        </p:cTn>
+                                        <p:tgtEl>
+                                          <p:spTgt spid="3">
+                                            <p:txEl>
+                                              <p:pRg st="3" end="3"/>
+                                            </p:txEl>
+                                          </p:spTgt>
+                                        </p:tgtEl>
+                                        <p:attrNameLst>
+                                          <p:attrName>style.visibility</p:attrName>
+                                        </p:attrNameLst>
+                                      </p:cBhvr>
+                                      <p:to>
+                                        <p:strVal val="visible"/>
+                                      </p:to>
+                                    </p:set>
+                                  </p:childTnLst>
+                                </p:cTn>
+                              </p:par>
+                            </p:childTnLst>
+                          </p:cTn>
+                        </p:par>
+                      </p:childTnLst>
+                    </p:cTn>
+                  </p:par>
+                  <p:par>
+                    <p:cTn id="19" fill="hold">
+                      <p:stCondLst>
+                        <p:cond delay="indefinite"/>
+                      </p:stCondLst>
+                      <p:childTnLst>
+                        <p:par>
+                          <p:cTn id="20" fill="hold">
+                            <p:stCondLst>
+                              <p:cond delay="0"/>
+                            </p:stCondLst>
+                            <p:childTnLst>
+                              <p:par>
+                                <p:cTn id="21" presetID="1" presetClass="entr" presetSubtype="0" fill="hold" grpId="0" nodeType="clickEffect">
+                                  <p:stCondLst>
+                                    <p:cond delay="0"/>
+                                  </p:stCondLst>
+                                  <p:childTnLst>
+                                    <p:set>
+                                      <p:cBhvr>
+                                        <p:cTn id="22" dur="1" fill="hold">
+                                          <p:stCondLst>
+                                            <p:cond delay="0"/>
+                                          </p:stCondLst>
+                                        </p:cTn>
+                                        <p:tgtEl>
+                                          <p:spTgt spid="3">
+                                            <p:txEl>
+                                              <p:pRg st="4" end="4"/>
+                                            </p:txEl>
+                                          </p:spTgt>
+                                        </p:tgtEl>
+                                        <p:attrNameLst>
+                                          <p:attrName>style.visibility</p:attrName>
+                                        </p:attrNameLst>
+                                      </p:cBhvr>
+                                      <p:to>
+                                        <p:strVal val="visible"/>
+                                      </p:to>
+                                    </p:set>
+                                  </p:childTnLst>
+                                </p:cTn>
+                              </p:par>
+                            </p:childTnLst>
+                          </p:cTn>
+                        </p:par>
+                      </p:childTnLst>
+                    </p:cTn>
+                  </p:par>
+                  <p:par>
+                    <p:cTn id="23" fill="hold">
+                      <p:stCondLst>
+                        <p:cond delay="indefinite"/>
+                      </p:stCondLst>
+                      <p:childTnLst>
+                        <p:par>
+                          <p:cTn id="24" fill="hold">
+                            <p:stCondLst>
+                              <p:cond delay="0"/>
+                            </p:stCondLst>
+                            <p:childTnLst>
+                              <p:par>
+                                <p:cTn id="25" presetID="1" presetClass="entr" presetSubtype="0" fill="hold" grpId="0" nodeType="clickEffect">
+                                  <p:stCondLst>
+                                    <p:cond delay="0"/>
+                                  </p:stCondLst>
+                                  <p:childTnLst>
+                                    <p:set>
+                                      <p:cBhvr>
+                                        <p:cTn id="26" dur="1" fill="hold">
+                                          <p:stCondLst>
+                                            <p:cond delay="0"/>
+                                          </p:stCondLst>
+                                        </p:cTn>
+                                        <p:tgtEl>
+                                          <p:spTgt spid="3">
+                                            <p:txEl>
+                                              <p:pRg st="5" end="5"/>
+                                            </p:txEl>
+                                          </p:spTgt>
+                                        </p:tgtEl>
+                                        <p:attrNameLst>
+                                          <p:attrName>style.visibility</p:attrName>
+                                        </p:attrNameLst>
+                                      </p:cBhvr>
+                                      <p:to>
+                                        <p:strVal val="visible"/>
+                                      </p:to>
+                                    </p:set>
+                                  </p:childTnLst>
+                                </p:cTn>
+                              </p:par>
+                            </p:childTnLst>
+                          </p:cTn>
+                        </p:par>
+                      </p:childTnLst>
+                    </p:cTn>
+                  </p:par>
+                </p:childTnLst>
+              </p:cTn>
+              <p:prevCondLst>
+                <p:cond evt="onPrev" delay="0">
+                  <p:tgtEl>
+                    <p:sldTgt/>
+                  </p:tgtEl>
+                </p:cond>
+              </p:prevCondLst>
+              <p:nextCondLst>
+                <p:cond evt="onNext" delay="0">
+                  <p:tgtEl>
+                    <p:sldTgt/>
+                  </p:tgtEl>
+                </p:cond>
+              </p:nextCondLst>
+            </p:seq>
+          </p:childTnLst>
+        </p:cTn>
+      </p:par>
+    </p:tnLst>
+    <p:bldLst>
+      <p:bldP spid="3" grpId="0" uiExpand="1" build="p"/>
+    </p:bldLst>
+  </p:timing>
+</p:sld>
+</file>
+
 <file path=ppt/slides/slide2.xml><?xml version="1.0" encoding="utf-8"?>
 <p:sld xmlns:a="http://schemas.openxmlformats.org/drawingml/2006/main" xmlns:r="http://schemas.openxmlformats.org/officeDocument/2006/relationships" xmlns:p="http://schemas.openxmlformats.org/presentationml/2006/main">
   <p:cSld>
@@ -3522,6 +5031,1415 @@
       <p:bldP spid="3" grpId="0" uiExpand="1" build="p"/>
     </p:bldLst>
   </p:timing>
+</p:sld>
+</file>
+
+<file path=ppt/slides/slide5.xml><?xml version="1.0" encoding="utf-8"?>
+<p:sld xmlns:a="http://schemas.openxmlformats.org/drawingml/2006/main" xmlns:r="http://schemas.openxmlformats.org/officeDocument/2006/relationships" xmlns:p="http://schemas.openxmlformats.org/presentationml/2006/main">
+  <p:cSld>
+    <p:spTree>
+      <p:nvGrpSpPr>
+        <p:cNvPr id="1" name=""/>
+        <p:cNvGrpSpPr/>
+        <p:nvPr/>
+      </p:nvGrpSpPr>
+      <p:grpSpPr>
+        <a:xfrm>
+          <a:off x="0" y="0"/>
+          <a:ext cx="0" cy="0"/>
+          <a:chOff x="0" y="0"/>
+          <a:chExt cx="0" cy="0"/>
+        </a:xfrm>
+      </p:grpSpPr>
+      <p:sp>
+        <p:nvSpPr>
+          <p:cNvPr id="2" name="Title 1"/>
+          <p:cNvSpPr>
+            <a:spLocks noGrp="1"/>
+          </p:cNvSpPr>
+          <p:nvPr>
+            <p:ph type="title"/>
+          </p:nvPr>
+        </p:nvSpPr>
+        <p:spPr>
+          <a:xfrm>
+            <a:off x="722313" y="1660820"/>
+            <a:ext cx="7772400" cy="4108156"/>
+          </a:xfrm>
+          <a:prstGeom prst="rect">
+            <a:avLst/>
+          </a:prstGeom>
+        </p:spPr>
+        <p:txBody>
+          <a:bodyPr/>
+          <a:lstStyle/>
+          <a:p>
+            <a:pPr lvl="0" indent="0" marL="0">
+              <a:buNone/>
+            </a:pPr>
+            <a:r>
+              <a:rPr/>
+              <a:t>Normal Distribution</a:t>
+            </a:r>
+          </a:p>
+        </p:txBody>
+      </p:sp>
+      <p:sp>
+        <p:nvSpPr>
+          <p:cNvPr id="3" name="Slide Number Placeholder 2"/>
+          <p:cNvSpPr>
+            <a:spLocks noGrp="1"/>
+          </p:cNvSpPr>
+          <p:nvPr>
+            <p:ph idx="10" sz="quarter" type="sldNum"/>
+          </p:nvPr>
+        </p:nvSpPr>
+        <p:spPr/>
+        <p:txBody>
+          <a:bodyPr/>
+          <a:lstStyle/>
+          <a:p>
+            <a:fld id="{9C13042B-154E-4D18-B726-07B2F714EFCF}" type="slidenum">
+              <a:rPr lang="en-US" smtClean="0"/>
+              <a:pPr/>
+              <a:t>‹#›</a:t>
+            </a:fld>
+            <a:endParaRPr dirty="0" lang="en-US"/>
+          </a:p>
+        </p:txBody>
+      </p:sp>
+    </p:spTree>
+  </p:cSld>
+</p:sld>
+</file>
+
+<file path=ppt/slides/slide6.xml><?xml version="1.0" encoding="utf-8"?>
+<p:sld xmlns:a="http://schemas.openxmlformats.org/drawingml/2006/main" xmlns:r="http://schemas.openxmlformats.org/officeDocument/2006/relationships" xmlns:p="http://schemas.openxmlformats.org/presentationml/2006/main">
+  <p:cSld>
+    <p:spTree>
+      <p:nvGrpSpPr>
+        <p:cNvPr id="1" name=""/>
+        <p:cNvGrpSpPr/>
+        <p:nvPr/>
+      </p:nvGrpSpPr>
+      <p:grpSpPr>
+        <a:xfrm>
+          <a:off x="0" y="0"/>
+          <a:ext cx="0" cy="0"/>
+          <a:chOff x="0" y="0"/>
+          <a:chExt cx="0" cy="0"/>
+        </a:xfrm>
+      </p:grpSpPr>
+      <p:sp>
+        <p:nvSpPr>
+          <p:cNvPr id="2" name="Title 1"/>
+          <p:cNvSpPr>
+            <a:spLocks noGrp="1"/>
+          </p:cNvSpPr>
+          <p:nvPr>
+            <p:ph type="title"/>
+          </p:nvPr>
+        </p:nvSpPr>
+        <p:spPr>
+          <a:xfrm>
+            <a:off x="457201" y="204787"/>
+            <a:ext cx="3008313" cy="871538"/>
+          </a:xfrm>
+        </p:spPr>
+        <p:txBody>
+          <a:bodyPr/>
+          <a:lstStyle/>
+          <a:p>
+            <a:pPr lvl="0" indent="0" marL="0">
+              <a:buNone/>
+            </a:pPr>
+            <a:r>
+              <a:rPr/>
+              <a:t>The Normal Distribution</a:t>
+            </a:r>
+          </a:p>
+        </p:txBody>
+      </p:sp>
+      <mc:AlternateContent xmlns:mc="http://schemas.openxmlformats.org/markup-compatibility/2006">
+        <mc:Choice xmlns:a14="http://schemas.microsoft.com/office/drawing/2010/main" Requires="a14">
+          <p:sp>
+            <p:nvSpPr>
+              <p:cNvPr id="4" name="Text Placeholder 3"/>
+              <p:cNvSpPr>
+                <a:spLocks noGrp="1"/>
+              </p:cNvSpPr>
+              <p:nvPr>
+                <p:ph idx="2" sz="half" type="body"/>
+              </p:nvPr>
+            </p:nvSpPr>
+            <p:spPr/>
+            <p:txBody>
+              <a:bodyPr/>
+              <a:lstStyle/>
+              <a:p>
+                <a:pPr lvl="0"/>
+                <a:r>
+                  <a:rPr/>
+                  <a:t>The </a:t>
+                </a:r>
+                <a:r>
+                  <a:rPr b="1"/>
+                  <a:t>normal distribution</a:t>
+                </a:r>
+                <a:r>
+                  <a:rPr/>
+                  <a:t>, often called the </a:t>
+                </a:r>
+                <a:r>
+                  <a:rPr b="1"/>
+                  <a:t>bell curve</a:t>
+                </a:r>
+                <a:r>
+                  <a:rPr/>
+                  <a:t>, is an important continuous probability distribution.</a:t>
+                </a:r>
+              </a:p>
+              <a:p>
+                <a:pPr lvl="0"/>
+                <a:r>
+                  <a:rPr/>
+                  <a:t>Its support is </a:t>
+                </a:r>
+                <a14:m>
+                  <m:oMath xmlns:m="http://schemas.openxmlformats.org/officeDocument/2006/math">
+                    <m:d>
+                      <m:dPr>
+                        <m:begChr m:val="("/>
+                        <m:sepChr m:val=""/>
+                        <m:endChr m:val=")"/>
+                        <m:grow/>
+                      </m:dPr>
+                      <m:e>
+                        <m:r>
+                          <m:rPr>
+                            <m:sty m:val="p"/>
+                          </m:rPr>
+                          <m:t>−</m:t>
+                        </m:r>
+                        <m:r>
+                          <m:rPr>
+                            <m:sty m:val="p"/>
+                          </m:rPr>
+                          <m:t>∞</m:t>
+                        </m:r>
+                        <m:r>
+                          <m:rPr>
+                            <m:sty m:val="p"/>
+                          </m:rPr>
+                          <m:t>,</m:t>
+                        </m:r>
+                        <m:r>
+                          <m:rPr>
+                            <m:sty m:val="p"/>
+                          </m:rPr>
+                          <m:t>∞</m:t>
+                        </m:r>
+                      </m:e>
+                    </m:d>
+                  </m:oMath>
+                </a14:m>
+                <a:r>
+                  <a:rPr/>
+                  <a:t>.</a:t>
+                </a:r>
+              </a:p>
+              <a:p>
+                <a:pPr lvl="0"/>
+                <a:r>
+                  <a:rPr/>
+                  <a:t>The curve is centered at its mean </a:t>
+                </a:r>
+                <a14:m>
+                  <m:oMath xmlns:m="http://schemas.openxmlformats.org/officeDocument/2006/math">
+                    <m:r>
+                      <m:t>μ</m:t>
+                    </m:r>
+                  </m:oMath>
+                </a14:m>
+                <a:r>
+                  <a:rPr/>
+                  <a:t>; its spread depends on its standard deviation </a:t>
+                </a:r>
+                <a14:m>
+                  <m:oMath xmlns:m="http://schemas.openxmlformats.org/officeDocument/2006/math">
+                    <m:r>
+                      <m:t>σ</m:t>
+                    </m:r>
+                    <m:r>
+                      <m:rPr>
+                        <m:sty m:val="p"/>
+                      </m:rPr>
+                      <m:t>&gt;</m:t>
+                    </m:r>
+                    <m:r>
+                      <m:t>0</m:t>
+                    </m:r>
+                  </m:oMath>
+                </a14:m>
+                <a:r>
+                  <a:rPr/>
+                  <a:t>.</a:t>
+                </a:r>
+              </a:p>
+              <a:p>
+                <a:pPr lvl="0"/>
+                <a:r>
+                  <a:rPr/>
+                  <a:t>We write </a:t>
+                </a:r>
+                <a14:m>
+                  <m:oMath xmlns:m="http://schemas.openxmlformats.org/officeDocument/2006/math">
+                    <m:r>
+                      <m:t>X</m:t>
+                    </m:r>
+                    <m:r>
+                      <m:rPr>
+                        <m:sty m:val="p"/>
+                      </m:rPr>
+                      <m:t>∼</m:t>
+                    </m:r>
+                    <m:r>
+                      <m:t>N</m:t>
+                    </m:r>
+                    <m:d>
+                      <m:dPr>
+                        <m:begChr m:val="("/>
+                        <m:sepChr m:val=""/>
+                        <m:endChr m:val=")"/>
+                        <m:grow/>
+                      </m:dPr>
+                      <m:e>
+                        <m:r>
+                          <m:t>μ</m:t>
+                        </m:r>
+                        <m:r>
+                          <m:rPr>
+                            <m:sty m:val="p"/>
+                          </m:rPr>
+                          <m:t>,</m:t>
+                        </m:r>
+                        <m:sSup>
+                          <m:e>
+                            <m:r>
+                              <m:t>σ</m:t>
+                            </m:r>
+                          </m:e>
+                          <m:sup>
+                            <m:r>
+                              <m:t>2</m:t>
+                            </m:r>
+                          </m:sup>
+                        </m:sSup>
+                      </m:e>
+                    </m:d>
+                  </m:oMath>
+                </a14:m>
+                <a:r>
+                  <a:rPr/>
+                  <a:t>, using the </a:t>
+                </a:r>
+                <a:r>
+                  <a:rPr b="1"/>
+                  <a:t>variance</a:t>
+                </a:r>
+                <a:r>
+                  <a:rPr/>
+                  <a:t> as the second parameter. The source labels its curves using the mean and standard deviation explicitly.</a:t>
+                </a:r>
+              </a:p>
+            </p:txBody>
+          </p:sp>
+        </mc:Choice>
+      </mc:AlternateContent>
+      <p:pic>
+        <p:nvPicPr>
+          <p:cNvPr descr="Unit-06-Normal-CTL_files/figure-pptx/normal-curve-1.png" id="0" name="Picture 1"/>
+          <p:cNvPicPr>
+            <a:picLocks noGrp="1" noChangeAspect="1"/>
+          </p:cNvPicPr>
+          <p:nvPr/>
+        </p:nvPicPr>
+        <p:blipFill>
+          <a:blip r:embed="rId2"/>
+          <a:stretch>
+            <a:fillRect/>
+          </a:stretch>
+        </p:blipFill>
+        <p:spPr bwMode="auto">
+          <a:xfrm>
+            <a:off x="3568700" y="736600"/>
+            <a:ext cx="5105400" cy="3302000"/>
+          </a:xfrm>
+          <a:prstGeom prst="rect">
+            <a:avLst/>
+          </a:prstGeom>
+          <a:noFill/>
+          <a:ln w="9525">
+            <a:noFill/>
+            <a:headEnd/>
+            <a:tailEnd/>
+          </a:ln>
+        </p:spPr>
+      </p:pic>
+      <p:sp>
+        <p:nvSpPr>
+          <p:cNvPr id="7" name="Slide Number Placeholder 6"/>
+          <p:cNvSpPr>
+            <a:spLocks noGrp="1"/>
+          </p:cNvSpPr>
+          <p:nvPr>
+            <p:ph idx="12" sz="quarter" type="sldNum"/>
+          </p:nvPr>
+        </p:nvSpPr>
+        <p:spPr/>
+        <p:txBody>
+          <a:bodyPr/>
+          <a:lstStyle/>
+          <a:p>
+            <a:fld id="{C5EF2332-01BF-834F-8236-50238282D533}" type="slidenum">
+              <a:rPr lang="en-US" smtClean="0"/>
+              <a:t>‹#›</a:t>
+            </a:fld>
+            <a:endParaRPr lang="en-US"/>
+          </a:p>
+        </p:txBody>
+      </p:sp>
+    </p:spTree>
+  </p:cSld>
+  <p:timing>
+    <p:tnLst>
+      <p:par>
+        <p:cTn id="1" dur="indefinite" restart="never" nodeType="tmRoot">
+          <p:childTnLst>
+            <p:seq concurrent="1" nextAc="seek">
+              <p:cTn id="2" dur="indefinite" nodeType="mainSeq">
+                <p:childTnLst>
+                  <p:par>
+                    <p:cTn id="3" fill="hold">
+                      <p:stCondLst>
+                        <p:cond delay="indefinite"/>
+                      </p:stCondLst>
+                      <p:childTnLst>
+                        <p:par>
+                          <p:cTn id="4" fill="hold">
+                            <p:stCondLst>
+                              <p:cond delay="0"/>
+                            </p:stCondLst>
+                            <p:childTnLst>
+                              <p:par>
+                                <p:cTn id="5" presetID="1" presetClass="entr" presetSubtype="0" fill="hold" grpId="0" nodeType="clickEffect">
+                                  <p:stCondLst>
+                                    <p:cond delay="0"/>
+                                  </p:stCondLst>
+                                  <p:childTnLst>
+                                    <p:set>
+                                      <p:cBhvr>
+                                        <p:cTn id="6" dur="1" fill="hold">
+                                          <p:stCondLst>
+                                            <p:cond delay="0"/>
+                                          </p:stCondLst>
+                                        </p:cTn>
+                                        <p:tgtEl>
+                                          <p:spTgt spid="4">
+                                            <p:txEl>
+                                              <p:pRg st="0" end="0"/>
+                                            </p:txEl>
+                                          </p:spTgt>
+                                        </p:tgtEl>
+                                        <p:attrNameLst>
+                                          <p:attrName>style.visibility</p:attrName>
+                                        </p:attrNameLst>
+                                      </p:cBhvr>
+                                      <p:to>
+                                        <p:strVal val="visible"/>
+                                      </p:to>
+                                    </p:set>
+                                  </p:childTnLst>
+                                </p:cTn>
+                              </p:par>
+                            </p:childTnLst>
+                          </p:cTn>
+                        </p:par>
+                      </p:childTnLst>
+                    </p:cTn>
+                  </p:par>
+                  <p:par>
+                    <p:cTn id="7" fill="hold">
+                      <p:stCondLst>
+                        <p:cond delay="indefinite"/>
+                      </p:stCondLst>
+                      <p:childTnLst>
+                        <p:par>
+                          <p:cTn id="8" fill="hold">
+                            <p:stCondLst>
+                              <p:cond delay="0"/>
+                            </p:stCondLst>
+                            <p:childTnLst>
+                              <p:par>
+                                <p:cTn id="9" presetID="1" presetClass="entr" presetSubtype="0" fill="hold" grpId="0" nodeType="clickEffect">
+                                  <p:stCondLst>
+                                    <p:cond delay="0"/>
+                                  </p:stCondLst>
+                                  <p:childTnLst>
+                                    <p:set>
+                                      <p:cBhvr>
+                                        <p:cTn id="10" dur="1" fill="hold">
+                                          <p:stCondLst>
+                                            <p:cond delay="0"/>
+                                          </p:stCondLst>
+                                        </p:cTn>
+                                        <p:tgtEl>
+                                          <p:spTgt spid="4">
+                                            <p:txEl>
+                                              <p:pRg st="1" end="1"/>
+                                            </p:txEl>
+                                          </p:spTgt>
+                                        </p:tgtEl>
+                                        <p:attrNameLst>
+                                          <p:attrName>style.visibility</p:attrName>
+                                        </p:attrNameLst>
+                                      </p:cBhvr>
+                                      <p:to>
+                                        <p:strVal val="visible"/>
+                                      </p:to>
+                                    </p:set>
+                                  </p:childTnLst>
+                                </p:cTn>
+                              </p:par>
+                            </p:childTnLst>
+                          </p:cTn>
+                        </p:par>
+                      </p:childTnLst>
+                    </p:cTn>
+                  </p:par>
+                  <p:par>
+                    <p:cTn id="11" fill="hold">
+                      <p:stCondLst>
+                        <p:cond delay="indefinite"/>
+                      </p:stCondLst>
+                      <p:childTnLst>
+                        <p:par>
+                          <p:cTn id="12" fill="hold">
+                            <p:stCondLst>
+                              <p:cond delay="0"/>
+                            </p:stCondLst>
+                            <p:childTnLst>
+                              <p:par>
+                                <p:cTn id="13" presetID="1" presetClass="entr" presetSubtype="0" fill="hold" grpId="0" nodeType="clickEffect">
+                                  <p:stCondLst>
+                                    <p:cond delay="0"/>
+                                  </p:stCondLst>
+                                  <p:childTnLst>
+                                    <p:set>
+                                      <p:cBhvr>
+                                        <p:cTn id="14" dur="1" fill="hold">
+                                          <p:stCondLst>
+                                            <p:cond delay="0"/>
+                                          </p:stCondLst>
+                                        </p:cTn>
+                                        <p:tgtEl>
+                                          <p:spTgt spid="4">
+                                            <p:txEl>
+                                              <p:pRg st="2" end="2"/>
+                                            </p:txEl>
+                                          </p:spTgt>
+                                        </p:tgtEl>
+                                        <p:attrNameLst>
+                                          <p:attrName>style.visibility</p:attrName>
+                                        </p:attrNameLst>
+                                      </p:cBhvr>
+                                      <p:to>
+                                        <p:strVal val="visible"/>
+                                      </p:to>
+                                    </p:set>
+                                  </p:childTnLst>
+                                </p:cTn>
+                              </p:par>
+                            </p:childTnLst>
+                          </p:cTn>
+                        </p:par>
+                      </p:childTnLst>
+                    </p:cTn>
+                  </p:par>
+                  <p:par>
+                    <p:cTn id="15" fill="hold">
+                      <p:stCondLst>
+                        <p:cond delay="indefinite"/>
+                      </p:stCondLst>
+                      <p:childTnLst>
+                        <p:par>
+                          <p:cTn id="16" fill="hold">
+                            <p:stCondLst>
+                              <p:cond delay="0"/>
+                            </p:stCondLst>
+                            <p:childTnLst>
+                              <p:par>
+                                <p:cTn id="17" presetID="1" presetClass="entr" presetSubtype="0" fill="hold" grpId="0" nodeType="clickEffect">
+                                  <p:stCondLst>
+                                    <p:cond delay="0"/>
+                                  </p:stCondLst>
+                                  <p:childTnLst>
+                                    <p:set>
+                                      <p:cBhvr>
+                                        <p:cTn id="18" dur="1" fill="hold">
+                                          <p:stCondLst>
+                                            <p:cond delay="0"/>
+                                          </p:stCondLst>
+                                        </p:cTn>
+                                        <p:tgtEl>
+                                          <p:spTgt spid="4">
+                                            <p:txEl>
+                                              <p:pRg st="3" end="3"/>
+                                            </p:txEl>
+                                          </p:spTgt>
+                                        </p:tgtEl>
+                                        <p:attrNameLst>
+                                          <p:attrName>style.visibility</p:attrName>
+                                        </p:attrNameLst>
+                                      </p:cBhvr>
+                                      <p:to>
+                                        <p:strVal val="visible"/>
+                                      </p:to>
+                                    </p:set>
+                                  </p:childTnLst>
+                                </p:cTn>
+                              </p:par>
+                            </p:childTnLst>
+                          </p:cTn>
+                        </p:par>
+                      </p:childTnLst>
+                    </p:cTn>
+                  </p:par>
+                </p:childTnLst>
+              </p:cTn>
+              <p:prevCondLst>
+                <p:cond evt="onPrev" delay="0">
+                  <p:tgtEl>
+                    <p:sldTgt/>
+                  </p:tgtEl>
+                </p:cond>
+              </p:prevCondLst>
+              <p:nextCondLst>
+                <p:cond evt="onNext" delay="0">
+                  <p:tgtEl>
+                    <p:sldTgt/>
+                  </p:tgtEl>
+                </p:cond>
+              </p:nextCondLst>
+            </p:seq>
+          </p:childTnLst>
+        </p:cTn>
+      </p:par>
+    </p:tnLst>
+    <p:bldLst>
+      <p:bldP spid="4" grpId="0" uiExpand="1" build="p"/>
+    </p:bldLst>
+  </p:timing>
+</p:sld>
+</file>
+
+<file path=ppt/slides/slide7.xml><?xml version="1.0" encoding="utf-8"?>
+<p:sld xmlns:a="http://schemas.openxmlformats.org/drawingml/2006/main" xmlns:r="http://schemas.openxmlformats.org/officeDocument/2006/relationships" xmlns:p="http://schemas.openxmlformats.org/presentationml/2006/main">
+  <p:cSld>
+    <p:spTree>
+      <p:nvGrpSpPr>
+        <p:cNvPr id="1" name=""/>
+        <p:cNvGrpSpPr/>
+        <p:nvPr/>
+      </p:nvGrpSpPr>
+      <p:grpSpPr>
+        <a:xfrm>
+          <a:off x="0" y="0"/>
+          <a:ext cx="0" cy="0"/>
+          <a:chOff x="0" y="0"/>
+          <a:chExt cx="0" cy="0"/>
+        </a:xfrm>
+      </p:grpSpPr>
+      <p:sp>
+        <p:nvSpPr>
+          <p:cNvPr id="2" name="Title 1"/>
+          <p:cNvSpPr>
+            <a:spLocks noGrp="1"/>
+          </p:cNvSpPr>
+          <p:nvPr>
+            <p:ph type="title"/>
+          </p:nvPr>
+        </p:nvSpPr>
+        <p:spPr>
+          <a:xfrm>
+            <a:off x="457201" y="204787"/>
+            <a:ext cx="3008313" cy="871538"/>
+          </a:xfrm>
+        </p:spPr>
+        <p:txBody>
+          <a:bodyPr/>
+          <a:lstStyle/>
+          <a:p>
+            <a:pPr lvl="0" indent="0" marL="0">
+              <a:buNone/>
+            </a:pPr>
+            <a:r>
+              <a:rPr/>
+              <a:t>Normal Probability Density Function</a:t>
+            </a:r>
+          </a:p>
+        </p:txBody>
+      </p:sp>
+      <mc:AlternateContent xmlns:mc="http://schemas.openxmlformats.org/markup-compatibility/2006">
+        <mc:Choice xmlns:a14="http://schemas.microsoft.com/office/drawing/2010/main" Requires="a14">
+          <p:sp>
+            <p:nvSpPr>
+              <p:cNvPr id="4" name="Text Placeholder 3"/>
+              <p:cNvSpPr>
+                <a:spLocks noGrp="1"/>
+              </p:cNvSpPr>
+              <p:nvPr>
+                <p:ph idx="2" sz="half" type="body"/>
+              </p:nvPr>
+            </p:nvSpPr>
+            <p:spPr/>
+            <p:txBody>
+              <a:bodyPr/>
+              <a:lstStyle/>
+              <a:p>
+                <a:pPr lvl="0" indent="0" marL="0">
+                  <a:buNone/>
+                </a:pPr>
+                <a14:m>
+                  <m:oMathPara xmlns:m="http://schemas.openxmlformats.org/officeDocument/2006/math">
+                    <m:oMathParaPr>
+                      <m:jc m:val="center"/>
+                    </m:oMathParaPr>
+                    <m:oMath>
+                      <m:sSub>
+                        <m:e>
+                          <m:r>
+                            <m:t>f</m:t>
+                          </m:r>
+                        </m:e>
+                        <m:sub>
+                          <m:r>
+                            <m:t>X</m:t>
+                          </m:r>
+                        </m:sub>
+                      </m:sSub>
+                      <m:d>
+                        <m:dPr>
+                          <m:begChr m:val="("/>
+                          <m:sepChr m:val=""/>
+                          <m:endChr m:val=")"/>
+                          <m:grow/>
+                        </m:dPr>
+                        <m:e>
+                          <m:r>
+                            <m:t>x</m:t>
+                          </m:r>
+                        </m:e>
+                      </m:d>
+                      <m:r>
+                        <m:rPr>
+                          <m:sty m:val="p"/>
+                        </m:rPr>
+                        <m:t>=</m:t>
+                      </m:r>
+                      <m:f>
+                        <m:fPr>
+                          <m:type m:val="bar"/>
+                        </m:fPr>
+                        <m:num>
+                          <m:r>
+                            <m:t>1</m:t>
+                          </m:r>
+                        </m:num>
+                        <m:den>
+                          <m:rad>
+                            <m:radPr>
+                              <m:degHide m:val="on"/>
+                            </m:radPr>
+                            <m:deg/>
+                            <m:e>
+                              <m:r>
+                                <m:t>2</m:t>
+                              </m:r>
+                              <m:r>
+                                <m:t>π</m:t>
+                              </m:r>
+                            </m:e>
+                          </m:rad>
+                          <m:r>
+                            <m:t> </m:t>
+                          </m:r>
+                          <m:r>
+                            <m:t>σ</m:t>
+                          </m:r>
+                        </m:den>
+                      </m:f>
+                      <m:r>
+                        <m:rPr>
+                          <m:sty m:val="p"/>
+                        </m:rPr>
+                        <m:t>exp</m:t>
+                      </m:r>
+                      <m:d>
+                        <m:dPr>
+                          <m:begChr m:val="["/>
+                          <m:sepChr m:val=""/>
+                          <m:endChr m:val="]"/>
+                          <m:grow/>
+                        </m:dPr>
+                        <m:e>
+                          <m:r>
+                            <m:rPr>
+                              <m:sty m:val="p"/>
+                            </m:rPr>
+                            <m:t>−</m:t>
+                          </m:r>
+                          <m:f>
+                            <m:fPr>
+                              <m:type m:val="bar"/>
+                            </m:fPr>
+                            <m:num>
+                              <m:sSup>
+                                <m:e>
+                                  <m:d>
+                                    <m:dPr>
+                                      <m:begChr m:val="("/>
+                                      <m:sepChr m:val=""/>
+                                      <m:endChr m:val=")"/>
+                                      <m:grow/>
+                                    </m:dPr>
+                                    <m:e>
+                                      <m:r>
+                                        <m:t>x</m:t>
+                                      </m:r>
+                                      <m:r>
+                                        <m:rPr>
+                                          <m:sty m:val="p"/>
+                                        </m:rPr>
+                                        <m:t>−</m:t>
+                                      </m:r>
+                                      <m:r>
+                                        <m:t>μ</m:t>
+                                      </m:r>
+                                    </m:e>
+                                  </m:d>
+                                </m:e>
+                                <m:sup>
+                                  <m:r>
+                                    <m:t>2</m:t>
+                                  </m:r>
+                                </m:sup>
+                              </m:sSup>
+                            </m:num>
+                            <m:den>
+                              <m:r>
+                                <m:t>2</m:t>
+                              </m:r>
+                              <m:sSup>
+                                <m:e>
+                                  <m:r>
+                                    <m:t>σ</m:t>
+                                  </m:r>
+                                </m:e>
+                                <m:sup>
+                                  <m:r>
+                                    <m:t>2</m:t>
+                                  </m:r>
+                                </m:sup>
+                              </m:sSup>
+                            </m:den>
+                          </m:f>
+                        </m:e>
+                      </m:d>
+                      <m:r>
+                        <m:rPr>
+                          <m:sty m:val="p"/>
+                        </m:rPr>
+                        <m:t>,</m:t>
+                      </m:r>
+                      <m:r>
+                        <m:t>  </m:t>
+                      </m:r>
+                      <m:r>
+                        <m:rPr>
+                          <m:sty m:val="p"/>
+                        </m:rPr>
+                        <m:t>−</m:t>
+                      </m:r>
+                      <m:r>
+                        <m:rPr>
+                          <m:sty m:val="p"/>
+                        </m:rPr>
+                        <m:t>∞</m:t>
+                      </m:r>
+                      <m:r>
+                        <m:rPr>
+                          <m:sty m:val="p"/>
+                        </m:rPr>
+                        <m:t>&lt;</m:t>
+                      </m:r>
+                      <m:r>
+                        <m:t>x</m:t>
+                      </m:r>
+                      <m:r>
+                        <m:rPr>
+                          <m:sty m:val="p"/>
+                        </m:rPr>
+                        <m:t>&lt;</m:t>
+                      </m:r>
+                      <m:r>
+                        <m:rPr>
+                          <m:sty m:val="p"/>
+                        </m:rPr>
+                        <m:t>∞</m:t>
+                      </m:r>
+                      <m:r>
+                        <m:rPr>
+                          <m:sty m:val="p"/>
+                        </m:rPr>
+                        <m:t>.</m:t>
+                      </m:r>
+                    </m:oMath>
+                  </m:oMathPara>
+                </a14:m>
+              </a:p>
+              <a:p>
+                <a:pPr lvl="0" indent="0" marL="0">
+                  <a:buNone/>
+                </a:pPr>
+                <a:r>
+                  <a:rPr/>
+                  <a:t>The inflection points occur at </a:t>
+                </a:r>
+                <a14:m>
+                  <m:oMath xmlns:m="http://schemas.openxmlformats.org/officeDocument/2006/math">
+                    <m:r>
+                      <m:t>μ</m:t>
+                    </m:r>
+                    <m:r>
+                      <m:rPr>
+                        <m:sty m:val="p"/>
+                      </m:rPr>
+                      <m:t>−</m:t>
+                    </m:r>
+                    <m:r>
+                      <m:t>σ</m:t>
+                    </m:r>
+                  </m:oMath>
+                </a14:m>
+                <a:r>
+                  <a:rPr/>
+                  <a:t> and </a:t>
+                </a:r>
+                <a14:m>
+                  <m:oMath xmlns:m="http://schemas.openxmlformats.org/officeDocument/2006/math">
+                    <m:r>
+                      <m:t>μ</m:t>
+                    </m:r>
+                    <m:r>
+                      <m:rPr>
+                        <m:sty m:val="p"/>
+                      </m:rPr>
+                      <m:t>+</m:t>
+                    </m:r>
+                    <m:r>
+                      <m:t>σ</m:t>
+                    </m:r>
+                  </m:oMath>
+                </a14:m>
+                <a:r>
+                  <a:rPr/>
+                  <a:t>.</a:t>
+                </a:r>
+              </a:p>
+            </p:txBody>
+          </p:sp>
+        </mc:Choice>
+      </mc:AlternateContent>
+      <p:pic>
+        <p:nvPicPr>
+          <p:cNvPr descr="Unit-06-Normal-CTL_files/figure-pptx/inflection-points-1.png" id="0" name="Picture 1"/>
+          <p:cNvPicPr>
+            <a:picLocks noGrp="1" noChangeAspect="1"/>
+          </p:cNvPicPr>
+          <p:nvPr/>
+        </p:nvPicPr>
+        <p:blipFill>
+          <a:blip r:embed="rId2"/>
+          <a:stretch>
+            <a:fillRect/>
+          </a:stretch>
+        </p:blipFill>
+        <p:spPr bwMode="auto">
+          <a:xfrm>
+            <a:off x="3568700" y="736600"/>
+            <a:ext cx="5105400" cy="3302000"/>
+          </a:xfrm>
+          <a:prstGeom prst="rect">
+            <a:avLst/>
+          </a:prstGeom>
+          <a:noFill/>
+          <a:ln w="9525">
+            <a:noFill/>
+            <a:headEnd/>
+            <a:tailEnd/>
+          </a:ln>
+        </p:spPr>
+      </p:pic>
+      <p:sp>
+        <p:nvSpPr>
+          <p:cNvPr id="7" name="Slide Number Placeholder 6"/>
+          <p:cNvSpPr>
+            <a:spLocks noGrp="1"/>
+          </p:cNvSpPr>
+          <p:nvPr>
+            <p:ph idx="12" sz="quarter" type="sldNum"/>
+          </p:nvPr>
+        </p:nvSpPr>
+        <p:spPr/>
+        <p:txBody>
+          <a:bodyPr/>
+          <a:lstStyle/>
+          <a:p>
+            <a:fld id="{C5EF2332-01BF-834F-8236-50238282D533}" type="slidenum">
+              <a:rPr lang="en-US" smtClean="0"/>
+              <a:t>‹#›</a:t>
+            </a:fld>
+            <a:endParaRPr lang="en-US"/>
+          </a:p>
+        </p:txBody>
+      </p:sp>
+    </p:spTree>
+  </p:cSld>
+</p:sld>
+</file>
+
+<file path=ppt/slides/slide8.xml><?xml version="1.0" encoding="utf-8"?>
+<p:sld xmlns:a="http://schemas.openxmlformats.org/drawingml/2006/main" xmlns:r="http://schemas.openxmlformats.org/officeDocument/2006/relationships" xmlns:p="http://schemas.openxmlformats.org/presentationml/2006/main">
+  <p:cSld>
+    <p:spTree>
+      <p:nvGrpSpPr>
+        <p:cNvPr id="1" name=""/>
+        <p:cNvGrpSpPr/>
+        <p:nvPr/>
+      </p:nvGrpSpPr>
+      <p:grpSpPr>
+        <a:xfrm>
+          <a:off x="0" y="0"/>
+          <a:ext cx="0" cy="0"/>
+          <a:chOff x="0" y="0"/>
+          <a:chExt cx="0" cy="0"/>
+        </a:xfrm>
+      </p:grpSpPr>
+      <p:sp>
+        <p:nvSpPr>
+          <p:cNvPr id="2" name="Title 1"/>
+          <p:cNvSpPr>
+            <a:spLocks noGrp="1"/>
+          </p:cNvSpPr>
+          <p:nvPr>
+            <p:ph type="title"/>
+          </p:nvPr>
+        </p:nvSpPr>
+        <p:spPr>
+          <a:xfrm>
+            <a:off x="457201" y="204787"/>
+            <a:ext cx="3008313" cy="871538"/>
+          </a:xfrm>
+        </p:spPr>
+        <p:txBody>
+          <a:bodyPr/>
+          <a:lstStyle/>
+          <a:p>
+            <a:pPr lvl="0" indent="0" marL="0">
+              <a:buNone/>
+            </a:pPr>
+            <a:r>
+              <a:rPr/>
+              <a:t>Comparing Normal Curves</a:t>
+            </a:r>
+          </a:p>
+        </p:txBody>
+      </p:sp>
+      <mc:AlternateContent xmlns:mc="http://schemas.openxmlformats.org/markup-compatibility/2006">
+        <mc:Choice xmlns:a14="http://schemas.microsoft.com/office/drawing/2010/main" Requires="a14">
+          <p:sp>
+            <p:nvSpPr>
+              <p:cNvPr id="4" name="Text Placeholder 3"/>
+              <p:cNvSpPr>
+                <a:spLocks noGrp="1"/>
+              </p:cNvSpPr>
+              <p:nvPr>
+                <p:ph idx="2" sz="half" type="body"/>
+              </p:nvPr>
+            </p:nvSpPr>
+            <p:spPr/>
+            <p:txBody>
+              <a:bodyPr/>
+              <a:lstStyle/>
+              <a:p>
+                <a:pPr lvl="0" indent="0" marL="0">
+                  <a:buNone/>
+                </a:pPr>
+                <a:r>
+                  <a:rPr/>
+                  <a:t>Changing </a:t>
+                </a:r>
+                <a14:m>
+                  <m:oMath xmlns:m="http://schemas.openxmlformats.org/officeDocument/2006/math">
+                    <m:r>
+                      <m:t>μ</m:t>
+                    </m:r>
+                  </m:oMath>
+                </a14:m>
+                <a:r>
+                  <a:rPr/>
+                  <a:t> shifts the center. Increasing </a:t>
+                </a:r>
+                <a14:m>
+                  <m:oMath xmlns:m="http://schemas.openxmlformats.org/officeDocument/2006/math">
+                    <m:r>
+                      <m:t>σ</m:t>
+                    </m:r>
+                  </m:oMath>
+                </a14:m>
+                <a:r>
+                  <a:rPr/>
+                  <a:t> makes the curve wider and lowers its peak.</a:t>
+                </a:r>
+              </a:p>
+            </p:txBody>
+          </p:sp>
+        </mc:Choice>
+      </mc:AlternateContent>
+      <p:pic>
+        <p:nvPicPr>
+          <p:cNvPr descr="Unit-06-Normal-CTL_files/figure-pptx/compare-normal-curves-1.png" id="0" name="Picture 1"/>
+          <p:cNvPicPr>
+            <a:picLocks noGrp="1" noChangeAspect="1"/>
+          </p:cNvPicPr>
+          <p:nvPr/>
+        </p:nvPicPr>
+        <p:blipFill>
+          <a:blip r:embed="rId2"/>
+          <a:stretch>
+            <a:fillRect/>
+          </a:stretch>
+        </p:blipFill>
+        <p:spPr bwMode="auto">
+          <a:xfrm>
+            <a:off x="3568700" y="736600"/>
+            <a:ext cx="5105400" cy="3302000"/>
+          </a:xfrm>
+          <a:prstGeom prst="rect">
+            <a:avLst/>
+          </a:prstGeom>
+          <a:noFill/>
+          <a:ln w="9525">
+            <a:noFill/>
+            <a:headEnd/>
+            <a:tailEnd/>
+          </a:ln>
+        </p:spPr>
+      </p:pic>
+      <p:sp>
+        <p:nvSpPr>
+          <p:cNvPr id="7" name="Slide Number Placeholder 6"/>
+          <p:cNvSpPr>
+            <a:spLocks noGrp="1"/>
+          </p:cNvSpPr>
+          <p:nvPr>
+            <p:ph idx="12" sz="quarter" type="sldNum"/>
+          </p:nvPr>
+        </p:nvSpPr>
+        <p:spPr/>
+        <p:txBody>
+          <a:bodyPr/>
+          <a:lstStyle/>
+          <a:p>
+            <a:fld id="{C5EF2332-01BF-834F-8236-50238282D533}" type="slidenum">
+              <a:rPr lang="en-US" smtClean="0"/>
+              <a:t>‹#›</a:t>
+            </a:fld>
+            <a:endParaRPr lang="en-US"/>
+          </a:p>
+        </p:txBody>
+      </p:sp>
+    </p:spTree>
+  </p:cSld>
+</p:sld>
+</file>
+
+<file path=ppt/slides/slide9.xml><?xml version="1.0" encoding="utf-8"?>
+<p:sld xmlns:a="http://schemas.openxmlformats.org/drawingml/2006/main" xmlns:r="http://schemas.openxmlformats.org/officeDocument/2006/relationships" xmlns:p="http://schemas.openxmlformats.org/presentationml/2006/main">
+  <p:cSld>
+    <p:spTree>
+      <p:nvGrpSpPr>
+        <p:cNvPr id="1" name=""/>
+        <p:cNvGrpSpPr/>
+        <p:nvPr/>
+      </p:nvGrpSpPr>
+      <p:grpSpPr>
+        <a:xfrm>
+          <a:off x="0" y="0"/>
+          <a:ext cx="0" cy="0"/>
+          <a:chOff x="0" y="0"/>
+          <a:chExt cx="0" cy="0"/>
+        </a:xfrm>
+      </p:grpSpPr>
+      <p:sp>
+        <p:nvSpPr>
+          <p:cNvPr id="2" name="Title Placeholder 1"/>
+          <p:cNvSpPr>
+            <a:spLocks noGrp="1"/>
+          </p:cNvSpPr>
+          <p:nvPr>
+            <p:ph type="title"/>
+          </p:nvPr>
+        </p:nvSpPr>
+        <p:spPr bwMode="auto">
+          <a:xfrm>
+            <a:off x="433680" y="423297"/>
+            <a:ext cx="8229600" cy="784602"/>
+          </a:xfrm>
+          <a:prstGeom prst="rect">
+            <a:avLst/>
+          </a:prstGeom>
+          <a:noFill/>
+          <a:ln w="9525">
+            <a:noFill/>
+            <a:miter lim="800000"/>
+            <a:headEnd/>
+            <a:tailEnd/>
+          </a:ln>
+        </p:spPr>
+        <p:txBody>
+          <a:bodyPr/>
+          <a:lstStyle/>
+          <a:p>
+            <a:pPr lvl="0" indent="0" marL="0">
+              <a:buNone/>
+            </a:pPr>
+            <a:r>
+              <a:rPr/>
+              <a:t>Example: Adult Heights</a:t>
+            </a:r>
+          </a:p>
+        </p:txBody>
+      </p:sp>
+      <mc:AlternateContent xmlns:mc="http://schemas.openxmlformats.org/markup-compatibility/2006">
+        <mc:Choice xmlns:a14="http://schemas.microsoft.com/office/drawing/2010/main" Requires="a14">
+          <p:sp>
+            <p:nvSpPr>
+              <p:cNvPr id="3" name="Text Placeholder 2"/>
+              <p:cNvSpPr>
+                <a:spLocks noGrp="1"/>
+              </p:cNvSpPr>
+              <p:nvPr>
+                <p:ph idx="1"/>
+              </p:nvPr>
+            </p:nvSpPr>
+            <p:spPr/>
+            <p:txBody>
+              <a:bodyPr/>
+              <a:lstStyle/>
+              <a:p>
+                <a:pPr lvl="0" indent="0" marL="0">
+                  <a:buNone/>
+                </a:pPr>
+                <a:r>
+                  <a:rPr/>
+                  <a:t>Suppose adult men’s heights are approximately normal with mean </a:t>
+                </a:r>
+                <a14:m>
+                  <m:oMath xmlns:m="http://schemas.openxmlformats.org/officeDocument/2006/math">
+                    <m:r>
+                      <m:t>μ</m:t>
+                    </m:r>
+                    <m:r>
+                      <m:rPr>
+                        <m:sty m:val="p"/>
+                      </m:rPr>
+                      <m:t>=</m:t>
+                    </m:r>
+                    <m:r>
+                      <m:t>70</m:t>
+                    </m:r>
+                  </m:oMath>
+                </a14:m>
+                <a:r>
+                  <a:rPr/>
+                  <a:t> inches and standard deviation </a:t>
+                </a:r>
+                <a14:m>
+                  <m:oMath xmlns:m="http://schemas.openxmlformats.org/officeDocument/2006/math">
+                    <m:r>
+                      <m:t>σ</m:t>
+                    </m:r>
+                    <m:r>
+                      <m:rPr>
+                        <m:sty m:val="p"/>
+                      </m:rPr>
+                      <m:t>=</m:t>
+                    </m:r>
+                    <m:r>
+                      <m:t>4</m:t>
+                    </m:r>
+                  </m:oMath>
+                </a14:m>
+                <a:r>
+                  <a:rPr/>
+                  <a:t> inches.</a:t>
+                </a:r>
+              </a:p>
+              <a:p>
+                <a:pPr lvl="0" indent="0" marL="0">
+                  <a:buNone/>
+                </a:pPr>
+                <a:r>
+                  <a:rPr/>
+                  <a:t>How tall would someone be if their height were </a:t>
+                </a:r>
+                <a:r>
+                  <a:rPr b="1"/>
+                  <a:t>10 standard deviations above the mean</a:t>
+                </a:r>
+                <a:r>
+                  <a:rPr/>
+                  <a:t>?</a:t>
+                </a:r>
+              </a:p>
+              <a:p>
+                <a:pPr lvl="0" indent="0" marL="0">
+                  <a:buNone/>
+                </a:pPr>
+                <a14:m>
+                  <m:oMathPara xmlns:m="http://schemas.openxmlformats.org/officeDocument/2006/math">
+                    <m:oMathParaPr>
+                      <m:jc m:val="center"/>
+                    </m:oMathParaPr>
+                    <m:oMath>
+                      <m:r>
+                        <m:t>70</m:t>
+                      </m:r>
+                      <m:r>
+                        <m:rPr>
+                          <m:sty m:val="p"/>
+                        </m:rPr>
+                        <m:t>+</m:t>
+                      </m:r>
+                      <m:r>
+                        <m:t>10</m:t>
+                      </m:r>
+                      <m:d>
+                        <m:dPr>
+                          <m:begChr m:val="("/>
+                          <m:sepChr m:val=""/>
+                          <m:endChr m:val=")"/>
+                          <m:grow/>
+                        </m:dPr>
+                        <m:e>
+                          <m:r>
+                            <m:t>4</m:t>
+                          </m:r>
+                        </m:e>
+                      </m:d>
+                      <m:r>
+                        <m:rPr>
+                          <m:sty m:val="p"/>
+                        </m:rPr>
+                        <m:t>=</m:t>
+                      </m:r>
+                      <m:r>
+                        <m:t>110</m:t>
+                      </m:r>
+                      <m:r>
+                        <m:rPr>
+                          <m:nor/>
+                          <m:sty m:val="p"/>
+                        </m:rPr>
+                        <m:t> inches</m:t>
+                      </m:r>
+                      <m:r>
+                        <m:rPr>
+                          <m:sty m:val="p"/>
+                        </m:rPr>
+                        <m:t>=</m:t>
+                      </m:r>
+                      <m:r>
+                        <m:t>9</m:t>
+                      </m:r>
+                      <m:r>
+                        <m:rPr>
+                          <m:nor/>
+                          <m:sty m:val="p"/>
+                        </m:rPr>
+                        <m:t> feet </m:t>
+                      </m:r>
+                      <m:r>
+                        <m:t>2</m:t>
+                      </m:r>
+                      <m:r>
+                        <m:rPr>
+                          <m:nor/>
+                          <m:sty m:val="p"/>
+                        </m:rPr>
+                        <m:t> inches</m:t>
+                      </m:r>
+                      <m:r>
+                        <m:rPr>
+                          <m:sty m:val="p"/>
+                        </m:rPr>
+                        <m:t>.</m:t>
+                      </m:r>
+                    </m:oMath>
+                  </m:oMathPara>
+                </a14:m>
+              </a:p>
+              <a:p>
+                <a:pPr lvl="0" indent="0" marL="0">
+                  <a:buNone/>
+                </a:pPr>
+                <a:r>
+                  <a:rPr/>
+                  <a:t>This illustrates how extreme a value 10 standard deviations above the mean would be. For comparison, the source describes the tallest recorded man as approximately 8 feet 11 inches tall.</a:t>
+                </a:r>
+              </a:p>
+            </p:txBody>
+          </p:sp>
+        </mc:Choice>
+      </mc:AlternateContent>
+      <p:sp>
+        <p:nvSpPr>
+          <p:cNvPr id="4" name="Slide Number Placeholder 3"/>
+          <p:cNvSpPr>
+            <a:spLocks noGrp="1"/>
+          </p:cNvSpPr>
+          <p:nvPr>
+            <p:ph idx="10" sz="quarter" type="sldNum"/>
+          </p:nvPr>
+        </p:nvSpPr>
+        <p:spPr/>
+        <p:txBody>
+          <a:bodyPr/>
+          <a:lstStyle/>
+          <a:p>
+            <a:fld id="{9C13042B-154E-4D18-B726-07B2F714EFCF}" type="slidenum">
+              <a:rPr lang="en-US" smtClean="0"/>
+              <a:pPr/>
+              <a:t>‹#›</a:t>
+            </a:fld>
+            <a:endParaRPr dirty="0" lang="en-US"/>
+          </a:p>
+        </p:txBody>
+      </p:sp>
+    </p:spTree>
+  </p:cSld>
 </p:sld>
 </file>
 

--- a/docs/activities/Unit-06-Normal-CTL.pptx
+++ b/docs/activities/Unit-06-Normal-CTL.pptx
@@ -10,16 +10,6 @@
     <p:sldId id="258" r:id="rId4"/>
     <p:sldId id="259" r:id="rId5"/>
     <p:sldId id="260" r:id="rId6"/>
-    <p:sldId id="261" r:id="rId7"/>
-    <p:sldId id="262" r:id="rId8"/>
-    <p:sldId id="263" r:id="rId9"/>
-    <p:sldId id="264" r:id="rId10"/>
-    <p:sldId id="265" r:id="rId11"/>
-    <p:sldId id="266" r:id="rId12"/>
-    <p:sldId id="267" r:id="rId13"/>
-    <p:sldId id="268" r:id="rId14"/>
-    <p:sldId id="269" r:id="rId15"/>
-    <p:sldId id="270" r:id="rId16"/>
   </p:sldIdLst>
   <p:sldSz cx="9144000" cy="6858000" type="screen4x3"/>
   <p:notesSz cx="6858000" cy="9144000"/>
@@ -2683,1504 +2673,6 @@
 </p:sld>
 </file>
 
-<file path=ppt/slides/slide10.xml><?xml version="1.0" encoding="utf-8"?>
-<p:sld xmlns:a="http://schemas.openxmlformats.org/drawingml/2006/main" xmlns:r="http://schemas.openxmlformats.org/officeDocument/2006/relationships" xmlns:p="http://schemas.openxmlformats.org/presentationml/2006/main">
-  <p:cSld>
-    <p:spTree>
-      <p:nvGrpSpPr>
-        <p:cNvPr id="1" name=""/>
-        <p:cNvGrpSpPr/>
-        <p:nvPr/>
-      </p:nvGrpSpPr>
-      <p:grpSpPr>
-        <a:xfrm>
-          <a:off x="0" y="0"/>
-          <a:ext cx="0" cy="0"/>
-          <a:chOff x="0" y="0"/>
-          <a:chExt cx="0" cy="0"/>
-        </a:xfrm>
-      </p:grpSpPr>
-      <p:sp>
-        <p:nvSpPr>
-          <p:cNvPr id="2" name="Title 1"/>
-          <p:cNvSpPr>
-            <a:spLocks noGrp="1"/>
-          </p:cNvSpPr>
-          <p:nvPr>
-            <p:ph type="title"/>
-          </p:nvPr>
-        </p:nvSpPr>
-        <p:spPr>
-          <a:xfrm>
-            <a:off x="457201" y="204787"/>
-            <a:ext cx="3008313" cy="871538"/>
-          </a:xfrm>
-        </p:spPr>
-        <p:txBody>
-          <a:bodyPr/>
-          <a:lstStyle/>
-          <a:p>
-            <a:pPr lvl="0" indent="0" marL="0">
-              <a:buNone/>
-            </a:pPr>
-            <a:r>
-              <a:rPr/>
-              <a:t>The Empirical Rule</a:t>
-            </a:r>
-          </a:p>
-        </p:txBody>
-      </p:sp>
-      <mc:AlternateContent xmlns:mc="http://schemas.openxmlformats.org/markup-compatibility/2006">
-        <mc:Choice xmlns:a14="http://schemas.microsoft.com/office/drawing/2010/main" Requires="a14">
-          <p:sp>
-            <p:nvSpPr>
-              <p:cNvPr id="4" name="Text Placeholder 3"/>
-              <p:cNvSpPr>
-                <a:spLocks noGrp="1"/>
-              </p:cNvSpPr>
-              <p:nvPr>
-                <p:ph idx="2" sz="half" type="body"/>
-              </p:nvPr>
-            </p:nvSpPr>
-            <p:spPr/>
-            <p:txBody>
-              <a:bodyPr/>
-              <a:lstStyle/>
-              <a:p>
-                <a:pPr lvl="0" indent="0" marL="0">
-                  <a:buNone/>
-                </a:pPr>
-                <a:r>
-                  <a:rPr/>
-                  <a:t>For a normal distribution, approximately:</a:t>
-                </a:r>
-              </a:p>
-              <a:p>
-                <a:pPr lvl="0"/>
-                <a:r>
-                  <a:rPr b="1"/>
-                  <a:t>68%</a:t>
-                </a:r>
-                <a:r>
-                  <a:rPr/>
-                  <a:t> of observations lie within </a:t>
-                </a:r>
-                <a14:m>
-                  <m:oMath xmlns:m="http://schemas.openxmlformats.org/officeDocument/2006/math">
-                    <m:r>
-                      <m:t>μ</m:t>
-                    </m:r>
-                    <m:r>
-                      <m:rPr>
-                        <m:sty m:val="p"/>
-                      </m:rPr>
-                      <m:t>±</m:t>
-                    </m:r>
-                    <m:r>
-                      <m:t>σ</m:t>
-                    </m:r>
-                  </m:oMath>
-                </a14:m>
-                <a:r>
-                  <a:rPr/>
-                  <a:t>;</a:t>
-                </a:r>
-              </a:p>
-              <a:p>
-                <a:pPr lvl="0"/>
-                <a:r>
-                  <a:rPr b="1"/>
-                  <a:t>95%</a:t>
-                </a:r>
-                <a:r>
-                  <a:rPr/>
-                  <a:t> lie within </a:t>
-                </a:r>
-                <a14:m>
-                  <m:oMath xmlns:m="http://schemas.openxmlformats.org/officeDocument/2006/math">
-                    <m:r>
-                      <m:t>μ</m:t>
-                    </m:r>
-                    <m:r>
-                      <m:rPr>
-                        <m:sty m:val="p"/>
-                      </m:rPr>
-                      <m:t>±</m:t>
-                    </m:r>
-                    <m:r>
-                      <m:t>2</m:t>
-                    </m:r>
-                    <m:r>
-                      <m:t>σ</m:t>
-                    </m:r>
-                  </m:oMath>
-                </a14:m>
-                <a:r>
-                  <a:rPr/>
-                  <a:t>;</a:t>
-                </a:r>
-              </a:p>
-              <a:p>
-                <a:pPr lvl="0"/>
-                <a:r>
-                  <a:rPr b="1"/>
-                  <a:t>99.7%</a:t>
-                </a:r>
-                <a:r>
-                  <a:rPr/>
-                  <a:t> lie within </a:t>
-                </a:r>
-                <a14:m>
-                  <m:oMath xmlns:m="http://schemas.openxmlformats.org/officeDocument/2006/math">
-                    <m:r>
-                      <m:t>μ</m:t>
-                    </m:r>
-                    <m:r>
-                      <m:rPr>
-                        <m:sty m:val="p"/>
-                      </m:rPr>
-                      <m:t>±</m:t>
-                    </m:r>
-                    <m:r>
-                      <m:t>3</m:t>
-                    </m:r>
-                    <m:r>
-                      <m:t>σ</m:t>
-                    </m:r>
-                  </m:oMath>
-                </a14:m>
-                <a:r>
-                  <a:rPr/>
-                  <a:t>.</a:t>
-                </a:r>
-              </a:p>
-            </p:txBody>
-          </p:sp>
-        </mc:Choice>
-      </mc:AlternateContent>
-      <p:pic>
-        <p:nvPicPr>
-          <p:cNvPr descr="Unit-06-Normal-CTL_files/figure-pptx/empirical-rule-1.png" id="0" name="Picture 1"/>
-          <p:cNvPicPr>
-            <a:picLocks noGrp="1" noChangeAspect="1"/>
-          </p:cNvPicPr>
-          <p:nvPr/>
-        </p:nvPicPr>
-        <p:blipFill>
-          <a:blip r:embed="rId2"/>
-          <a:stretch>
-            <a:fillRect/>
-          </a:stretch>
-        </p:blipFill>
-        <p:spPr bwMode="auto">
-          <a:xfrm>
-            <a:off x="3568700" y="736600"/>
-            <a:ext cx="5105400" cy="3302000"/>
-          </a:xfrm>
-          <a:prstGeom prst="rect">
-            <a:avLst/>
-          </a:prstGeom>
-          <a:noFill/>
-          <a:ln w="9525">
-            <a:noFill/>
-            <a:headEnd/>
-            <a:tailEnd/>
-          </a:ln>
-        </p:spPr>
-      </p:pic>
-      <p:sp>
-        <p:nvSpPr>
-          <p:cNvPr id="7" name="Slide Number Placeholder 6"/>
-          <p:cNvSpPr>
-            <a:spLocks noGrp="1"/>
-          </p:cNvSpPr>
-          <p:nvPr>
-            <p:ph idx="12" sz="quarter" type="sldNum"/>
-          </p:nvPr>
-        </p:nvSpPr>
-        <p:spPr/>
-        <p:txBody>
-          <a:bodyPr/>
-          <a:lstStyle/>
-          <a:p>
-            <a:fld id="{C5EF2332-01BF-834F-8236-50238282D533}" type="slidenum">
-              <a:rPr lang="en-US" smtClean="0"/>
-              <a:t>‹#›</a:t>
-            </a:fld>
-            <a:endParaRPr lang="en-US"/>
-          </a:p>
-        </p:txBody>
-      </p:sp>
-    </p:spTree>
-  </p:cSld>
-</p:sld>
-</file>
-
-<file path=ppt/slides/slide11.xml><?xml version="1.0" encoding="UTF-8"?><p:sld xmlns:a="http://schemas.openxmlformats.org/drawingml/2006/main" xmlns:r="http://schemas.openxmlformats.org/officeDocument/2006/relationships" xmlns:p="http://schemas.openxmlformats.org/presentationml/2006/main"><p:cSld><p:spTree><p:nvGrpSpPr><p:cNvPr id="1" name="" /><p:cNvGrpSpPr /><p:nvPr /></p:nvGrpSpPr><p:grpSpPr><a:xfrm><a:off x="0" y="0" /><a:ext cx="0" cy="0" /><a:chOff x="0" y="0" /><a:chExt cx="0" cy="0" /></a:xfrm></p:grpSpPr><p:sp><p:nvSpPr><p:cNvPr id="2" name="Title 1" /><p:cNvSpPr><a:spLocks noGrp="1" /></p:cNvSpPr><p:nvPr><p:ph type="title" /></p:nvPr></p:nvSpPr><p:spPr><a:xfrm><a:off x="457201" y="204787" /><a:ext cx="3008313" cy="871538" /></a:xfrm></p:spPr><p:txBody><a:bodyPr /><a:lstStyle /><a:p><a:pPr lvl="0" indent="0" marL="0"><a:buNone /></a:pPr><a:r><a:rPr /><a:t>Empirical Rule: Heights and IQ Scores</a:t></a:r></a:p></p:txBody></p:sp><mc:AlternateContent xmlns:mc="http://schemas.openxmlformats.org/markup-compatibility/2006"><mc:Choice xmlns:a14="http://schemas.microsoft.com/office/drawing/2010/main" Requires="a14"><p:sp><p:nvSpPr><p:cNvPr id="4" name="Text Placeholder 3" /><p:cNvSpPr><a:spLocks noGrp="1" /></p:cNvSpPr><p:nvPr><p:ph idx="2" sz="half" type="body" /></p:nvPr></p:nvSpPr><p:spPr /><p:txBody><a:bodyPr /><a:lstStyle /><a:p><a:pPr lvl="0" indent="0" marL="0"><a:buNone /></a:pPr><a:r><a:rPr /><a:t>For the height model with </a:t></a:r><a14:m><m:oMath xmlns:m="http://schemas.openxmlformats.org/officeDocument/2006/math"><m:r><m:t>μ</m:t></m:r><m:r><m:rPr><m:sty m:val="p" /></m:rPr><m:t>=</m:t></m:r><m:r><m:t>70</m:t></m:r></m:oMath></a14:m><a:r><a:rPr /><a:t> and </a:t></a:r><a14:m><m:oMath xmlns:m="http://schemas.openxmlformats.org/officeDocument/2006/math"><m:r><m:t>σ</m:t></m:r><m:r><m:rPr><m:sty m:val="p" /></m:rPr><m:t>=</m:t></m:r><m:r><m:t>4</m:t></m:r></m:oMath></a14:m><a:r><a:rPr /><a:t>:</a:t></a:r></a:p></p:txBody></p:sp></mc:Choice></mc:AlternateContent><p:graphicFrame><p:nvGraphicFramePr><p:cNvPr id="6" name="Content Placeholder 5" /><p:cNvGraphicFramePr><a:graphicFrameLocks noGrp="1" /></p:cNvGraphicFramePr><p:nvPr><p:ph idx="1" /></p:nvPr></p:nvGraphicFramePr><p:xfrm><a:off x="3568700" y="203200" /><a:ext cx="5105400" cy="4381500" /></p:xfrm><a:graphic><a:graphicData uri="http://schemas.openxmlformats.org/drawingml/2006/table"><a:tbl><a:tblPr firstRow="1" bandRow="1"><a:tableStyleId>{5C22544A-7EE6-4342-B048-85BDC9FD1C3A}</a:tableStyleId></a:tblPr><a:tblGrid><a:gridCol w="1701800" /><a:gridCol w="1701800" /><a:gridCol w="1701800" /></a:tblGrid><a:tr h="0"><a:tc><a:txBody><a:bodyPr /><a:lstStyle /><a:p><a:pPr lvl="0" indent="0" marL="0" algn="l"><a:buNone /></a:pPr><a:r><a:rPr /><a:t>Range</a:t></a:r></a:p></a:txBody><a:tcPr /></a:tc><a:tc><a:txBody><a:bodyPr /><a:lstStyle /><a:p><a:pPr lvl="0" indent="0" marL="0" algn="l"><a:buNone /></a:pPr><a:r><a:rPr /><a:t>Interval (inches)</a:t></a:r></a:p></a:txBody><a:tcPr /></a:tc><a:tc><a:txBody><a:bodyPr /><a:lstStyle /><a:p><a:pPr lvl="0" indent="0" marL="0" algn="l"><a:buNone /></a:pPr><a:r><a:rPr /><a:t>Approximate percentage</a:t></a:r></a:p></a:txBody><a:tcPr /></a:tc></a:tr><a:tr h="0"><a:tc><a:txBody><a:bodyPr /><a:lstStyle /><a:p><a:pPr lvl="0" indent="0" marL="0" algn="l"><a:buNone /></a:pPr><a14:m><m:oMath xmlns:m="http://schemas.openxmlformats.org/officeDocument/2006/math"><m:r><m:t>μ</m:t></m:r><m:r><m:rPr><m:sty m:val="p" /></m:rPr><m:t>±</m:t></m:r><m:r><m:t>σ</m:t></m:r></m:oMath></a14:m></a:p></a:txBody></a:tc><a:tc><a:txBody><a:bodyPr /><a:lstStyle /><a:p><a:pPr lvl="0" indent="0" marL="0" algn="l"><a:buNone /></a:pPr><a:r><a:rPr /><a:t>66–74</a:t></a:r></a:p></a:txBody></a:tc><a:tc><a:txBody><a:bodyPr /><a:lstStyle /><a:p><a:pPr lvl="0" indent="0" marL="0" algn="l"><a:buNone /></a:pPr><a:r><a:rPr /><a:t>68%</a:t></a:r></a:p></a:txBody></a:tc></a:tr><a:tr h="0"><a:tc><a:txBody><a:bodyPr /><a:lstStyle /><a:p><a:pPr lvl="0" indent="0" marL="0" algn="l"><a:buNone /></a:pPr><a14:m><m:oMath xmlns:m="http://schemas.openxmlformats.org/officeDocument/2006/math"><m:r><m:t>μ</m:t></m:r><m:r><m:rPr><m:sty m:val="p" /></m:rPr><m:t>±</m:t></m:r><m:r><m:t>2</m:t></m:r><m:r><m:t>σ</m:t></m:r></m:oMath></a14:m></a:p></a:txBody></a:tc><a:tc><a:txBody><a:bodyPr /><a:lstStyle /><a:p><a:pPr lvl="0" indent="0" marL="0" algn="l"><a:buNone /></a:pPr><a:r><a:rPr /><a:t>62–78</a:t></a:r></a:p></a:txBody></a:tc><a:tc><a:txBody><a:bodyPr /><a:lstStyle /><a:p><a:pPr lvl="0" indent="0" marL="0" algn="l"><a:buNone /></a:pPr><a:r><a:rPr /><a:t>95%</a:t></a:r></a:p></a:txBody></a:tc></a:tr><a:tr h="0"><a:tc><a:txBody><a:bodyPr /><a:lstStyle /><a:p><a:pPr lvl="0" indent="0" marL="0" algn="l"><a:buNone /></a:pPr><a14:m><m:oMath xmlns:m="http://schemas.openxmlformats.org/officeDocument/2006/math"><m:r><m:t>μ</m:t></m:r><m:r><m:rPr><m:sty m:val="p" /></m:rPr><m:t>±</m:t></m:r><m:r><m:t>3</m:t></m:r><m:r><m:t>σ</m:t></m:r></m:oMath></a14:m></a:p></a:txBody></a:tc><a:tc><a:txBody><a:bodyPr /><a:lstStyle /><a:p><a:pPr lvl="0" indent="0" marL="0" algn="l"><a:buNone /></a:pPr><a:r><a:rPr /><a:t>58–82</a:t></a:r></a:p></a:txBody></a:tc><a:tc><a:txBody><a:bodyPr /><a:lstStyle /><a:p><a:pPr lvl="0" indent="0" marL="0" algn="l"><a:buNone /></a:pPr><a:r><a:rPr /><a:t>99.7%</a:t></a:r></a:p></a:txBody></a:tc></a:tr></a:tbl></a:graphicData></a:graphic></p:graphicFrame><p:sp><p:nvSpPr><p:cNvPr id="7" name="Slide Number Placeholder 6" /><p:cNvSpPr><a:spLocks noGrp="1" /></p:cNvSpPr><p:nvPr><p:ph idx="12" sz="quarter" type="sldNum" /></p:nvPr></p:nvSpPr><p:spPr /><p:txBody><a:bodyPr /><a:lstStyle /><a:p><a:fld id="{C5EF2332-01BF-834F-8236-50238282D533}" type="slidenum"><a:rPr lang="en-US" smtClean="0" /><a:t>‹#›</a:t></a:fld><a:endParaRPr lang="en-US" /></a:p></p:txBody></p:sp></p:spTree></p:cSld></p:sld>
-</file>
-
-<file path=ppt/slides/slide12.xml><?xml version="1.0" encoding="utf-8"?>
-<p:sld xmlns:a="http://schemas.openxmlformats.org/drawingml/2006/main" xmlns:r="http://schemas.openxmlformats.org/officeDocument/2006/relationships" xmlns:p="http://schemas.openxmlformats.org/presentationml/2006/main">
-  <p:cSld>
-    <p:spTree>
-      <p:nvGrpSpPr>
-        <p:cNvPr id="1" name=""/>
-        <p:cNvGrpSpPr/>
-        <p:nvPr/>
-      </p:nvGrpSpPr>
-      <p:grpSpPr>
-        <a:xfrm>
-          <a:off x="0" y="0"/>
-          <a:ext cx="0" cy="0"/>
-          <a:chOff x="0" y="0"/>
-          <a:chExt cx="0" cy="0"/>
-        </a:xfrm>
-      </p:grpSpPr>
-      <mc:AlternateContent xmlns:mc="http://schemas.openxmlformats.org/markup-compatibility/2006">
-        <mc:Choice xmlns:a14="http://schemas.microsoft.com/office/drawing/2010/main" Requires="a14">
-          <p:sp>
-            <p:nvSpPr>
-              <p:cNvPr id="3" name="Text Placeholder 2"/>
-              <p:cNvSpPr>
-                <a:spLocks noGrp="1"/>
-              </p:cNvSpPr>
-              <p:nvPr>
-                <p:ph idx="1"/>
-              </p:nvPr>
-            </p:nvSpPr>
-            <p:spPr/>
-            <p:txBody>
-              <a:bodyPr/>
-              <a:lstStyle/>
-              <a:p>
-                <a:pPr lvl="0" indent="0" marL="0">
-                  <a:buNone/>
-                </a:pPr>
-                <a:r>
-                  <a:rPr/>
-                  <a:t>The source also illustrates an approximately normal IQ-score model with </a:t>
-                </a:r>
-                <a14:m>
-                  <m:oMath xmlns:m="http://schemas.openxmlformats.org/officeDocument/2006/math">
-                    <m:r>
-                      <m:t>μ</m:t>
-                    </m:r>
-                    <m:r>
-                      <m:rPr>
-                        <m:sty m:val="p"/>
-                      </m:rPr>
-                      <m:t>=</m:t>
-                    </m:r>
-                    <m:r>
-                      <m:t>100</m:t>
-                    </m:r>
-                  </m:oMath>
-                </a14:m>
-                <a:r>
-                  <a:rPr/>
-                  <a:t> and </a:t>
-                </a:r>
-                <a14:m>
-                  <m:oMath xmlns:m="http://schemas.openxmlformats.org/officeDocument/2006/math">
-                    <m:r>
-                      <m:t>σ</m:t>
-                    </m:r>
-                    <m:r>
-                      <m:rPr>
-                        <m:sty m:val="p"/>
-                      </m:rPr>
-                      <m:t>=</m:t>
-                    </m:r>
-                    <m:r>
-                      <m:t>15</m:t>
-                    </m:r>
-                  </m:oMath>
-                </a14:m>
-                <a:r>
-                  <a:rPr/>
-                  <a:t>. Its corresponding intervals are </a:t>
-                </a:r>
-                <a:r>
-                  <a:rPr b="1"/>
-                  <a:t>85–115</a:t>
-                </a:r>
-                <a:r>
-                  <a:rPr/>
-                  <a:t>, </a:t>
-                </a:r>
-                <a:r>
-                  <a:rPr b="1"/>
-                  <a:t>70–130</a:t>
-                </a:r>
-                <a:r>
-                  <a:rPr/>
-                  <a:t>, and </a:t>
-                </a:r>
-                <a:r>
-                  <a:rPr b="1"/>
-                  <a:t>55–145</a:t>
-                </a:r>
-                <a:r>
-                  <a:rPr/>
-                  <a:t>.</a:t>
-                </a:r>
-              </a:p>
-              <a:p>
-                <a:pPr lvl="0" indent="0" marL="0">
-                  <a:buNone/>
-                </a:pPr>
-                <a:r>
-                  <a:rPr/>
-                  <a:t>The source mentions </a:t>
-                </a:r>
-                <a:r>
-                  <a:rPr i="1"/>
-                  <a:t>The Bell Curve</a:t>
-                </a:r>
-                <a:r>
-                  <a:rPr/>
-                  <a:t> (Herrnstein and Murray, 1994) in this context. The normal model here is used only to illustrate the empirical rule.</a:t>
-                </a:r>
-              </a:p>
-            </p:txBody>
-          </p:sp>
-        </mc:Choice>
-      </mc:AlternateContent>
-      <p:sp>
-        <p:nvSpPr>
-          <p:cNvPr id="4" name="Slide Number Placeholder 3"/>
-          <p:cNvSpPr>
-            <a:spLocks noGrp="1"/>
-          </p:cNvSpPr>
-          <p:nvPr>
-            <p:ph idx="10" sz="quarter" type="sldNum"/>
-          </p:nvPr>
-        </p:nvSpPr>
-        <p:spPr/>
-        <p:txBody>
-          <a:bodyPr/>
-          <a:lstStyle/>
-          <a:p>
-            <a:fld id="{9C13042B-154E-4D18-B726-07B2F714EFCF}" type="slidenum">
-              <a:rPr lang="en-US" smtClean="0"/>
-              <a:pPr/>
-              <a:t>‹#›</a:t>
-            </a:fld>
-            <a:endParaRPr dirty="0" lang="en-US"/>
-          </a:p>
-        </p:txBody>
-      </p:sp>
-    </p:spTree>
-  </p:cSld>
-</p:sld>
-</file>
-
-<file path=ppt/slides/slide13.xml><?xml version="1.0" encoding="utf-8"?>
-<p:sld xmlns:a="http://schemas.openxmlformats.org/drawingml/2006/main" xmlns:r="http://schemas.openxmlformats.org/officeDocument/2006/relationships" xmlns:p="http://schemas.openxmlformats.org/presentationml/2006/main">
-  <p:cSld>
-    <p:spTree>
-      <p:nvGrpSpPr>
-        <p:cNvPr id="1" name=""/>
-        <p:cNvGrpSpPr/>
-        <p:nvPr/>
-      </p:nvGrpSpPr>
-      <p:grpSpPr>
-        <a:xfrm>
-          <a:off x="0" y="0"/>
-          <a:ext cx="0" cy="0"/>
-          <a:chOff x="0" y="0"/>
-          <a:chExt cx="0" cy="0"/>
-        </a:xfrm>
-      </p:grpSpPr>
-      <p:sp>
-        <p:nvSpPr>
-          <p:cNvPr id="2" name="Title 1"/>
-          <p:cNvSpPr>
-            <a:spLocks noGrp="1"/>
-          </p:cNvSpPr>
-          <p:nvPr>
-            <p:ph type="title"/>
-          </p:nvPr>
-        </p:nvSpPr>
-        <p:spPr>
-          <a:xfrm>
-            <a:off x="722313" y="1660820"/>
-            <a:ext cx="7772400" cy="4108156"/>
-          </a:xfrm>
-          <a:prstGeom prst="rect">
-            <a:avLst/>
-          </a:prstGeom>
-        </p:spPr>
-        <p:txBody>
-          <a:bodyPr/>
-          <a:lstStyle/>
-          <a:p>
-            <a:pPr lvl="0" indent="0" marL="0">
-              <a:buNone/>
-            </a:pPr>
-            <a:r>
-              <a:rPr/>
-              <a:t>Standard Normal Distribution: Probabilities</a:t>
-            </a:r>
-          </a:p>
-        </p:txBody>
-      </p:sp>
-      <p:sp>
-        <p:nvSpPr>
-          <p:cNvPr id="3" name="Slide Number Placeholder 2"/>
-          <p:cNvSpPr>
-            <a:spLocks noGrp="1"/>
-          </p:cNvSpPr>
-          <p:nvPr>
-            <p:ph idx="10" sz="quarter" type="sldNum"/>
-          </p:nvPr>
-        </p:nvSpPr>
-        <p:spPr/>
-        <p:txBody>
-          <a:bodyPr/>
-          <a:lstStyle/>
-          <a:p>
-            <a:fld id="{9C13042B-154E-4D18-B726-07B2F714EFCF}" type="slidenum">
-              <a:rPr lang="en-US" smtClean="0"/>
-              <a:pPr/>
-              <a:t>‹#›</a:t>
-            </a:fld>
-            <a:endParaRPr dirty="0" lang="en-US"/>
-          </a:p>
-        </p:txBody>
-      </p:sp>
-    </p:spTree>
-  </p:cSld>
-</p:sld>
-</file>
-
-<file path=ppt/slides/slide14.xml><?xml version="1.0" encoding="utf-8"?>
-<p:sld xmlns:a="http://schemas.openxmlformats.org/drawingml/2006/main" xmlns:r="http://schemas.openxmlformats.org/officeDocument/2006/relationships" xmlns:p="http://schemas.openxmlformats.org/presentationml/2006/main">
-  <p:cSld>
-    <p:spTree>
-      <p:nvGrpSpPr>
-        <p:cNvPr id="1" name=""/>
-        <p:cNvGrpSpPr/>
-        <p:nvPr/>
-      </p:nvGrpSpPr>
-      <p:grpSpPr>
-        <a:xfrm>
-          <a:off x="0" y="0"/>
-          <a:ext cx="0" cy="0"/>
-          <a:chOff x="0" y="0"/>
-          <a:chExt cx="0" cy="0"/>
-        </a:xfrm>
-      </p:grpSpPr>
-      <p:sp>
-        <p:nvSpPr>
-          <p:cNvPr id="2" name="Title Placeholder 1"/>
-          <p:cNvSpPr>
-            <a:spLocks noGrp="1"/>
-          </p:cNvSpPr>
-          <p:nvPr>
-            <p:ph type="title"/>
-          </p:nvPr>
-        </p:nvSpPr>
-        <p:spPr bwMode="auto">
-          <a:xfrm>
-            <a:off x="433680" y="423297"/>
-            <a:ext cx="8229600" cy="784602"/>
-          </a:xfrm>
-          <a:prstGeom prst="rect">
-            <a:avLst/>
-          </a:prstGeom>
-          <a:noFill/>
-          <a:ln w="9525">
-            <a:noFill/>
-            <a:miter lim="800000"/>
-            <a:headEnd/>
-            <a:tailEnd/>
-          </a:ln>
-        </p:spPr>
-        <p:txBody>
-          <a:bodyPr/>
-          <a:lstStyle/>
-          <a:p>
-            <a:pPr lvl="0" indent="0" marL="0">
-              <a:buNone/>
-            </a:pPr>
-            <a:r>
-              <a:rPr/>
-              <a:t>The Standard Normal Distribution</a:t>
-            </a:r>
-          </a:p>
-        </p:txBody>
-      </p:sp>
-      <mc:AlternateContent xmlns:mc="http://schemas.openxmlformats.org/markup-compatibility/2006">
-        <mc:Choice xmlns:a14="http://schemas.microsoft.com/office/drawing/2010/main" Requires="a14">
-          <p:sp>
-            <p:nvSpPr>
-              <p:cNvPr id="3" name="Text Placeholder 2"/>
-              <p:cNvSpPr>
-                <a:spLocks noGrp="1"/>
-              </p:cNvSpPr>
-              <p:nvPr>
-                <p:ph idx="1"/>
-              </p:nvPr>
-            </p:nvSpPr>
-            <p:spPr/>
-            <p:txBody>
-              <a:bodyPr/>
-              <a:lstStyle/>
-              <a:p>
-                <a:pPr lvl="0" indent="0" marL="0">
-                  <a:buNone/>
-                </a:pPr>
-                <a:r>
-                  <a:rPr/>
-                  <a:t>There are infinitely many normal curves: </a:t>
-                </a:r>
-                <a14:m>
-                  <m:oMath xmlns:m="http://schemas.openxmlformats.org/officeDocument/2006/math">
-                    <m:r>
-                      <m:t>μ</m:t>
-                    </m:r>
-                  </m:oMath>
-                </a14:m>
-                <a:r>
-                  <a:rPr/>
-                  <a:t> may be any real number, and </a:t>
-                </a:r>
-                <a14:m>
-                  <m:oMath xmlns:m="http://schemas.openxmlformats.org/officeDocument/2006/math">
-                    <m:r>
-                      <m:t>σ</m:t>
-                    </m:r>
-                  </m:oMath>
-                </a14:m>
-                <a:r>
-                  <a:rPr/>
-                  <a:t> may be any positive real number.</a:t>
-                </a:r>
-              </a:p>
-              <a:p>
-                <a:pPr lvl="0" indent="0" marL="0">
-                  <a:buNone/>
-                </a:pPr>
-                <a:r>
-                  <a:rPr/>
-                  <a:t>The </a:t>
-                </a:r>
-                <a:r>
-                  <a:rPr b="1"/>
-                  <a:t>standard normal distribution</a:t>
-                </a:r>
-                <a:r>
-                  <a:rPr/>
-                  <a:t> has </a:t>
-                </a:r>
-                <a14:m>
-                  <m:oMath xmlns:m="http://schemas.openxmlformats.org/officeDocument/2006/math">
-                    <m:r>
-                      <m:t>μ</m:t>
-                    </m:r>
-                    <m:r>
-                      <m:rPr>
-                        <m:sty m:val="p"/>
-                      </m:rPr>
-                      <m:t>=</m:t>
-                    </m:r>
-                    <m:r>
-                      <m:t>0</m:t>
-                    </m:r>
-                  </m:oMath>
-                </a14:m>
-                <a:r>
-                  <a:rPr/>
-                  <a:t> and </a:t>
-                </a:r>
-                <a14:m>
-                  <m:oMath xmlns:m="http://schemas.openxmlformats.org/officeDocument/2006/math">
-                    <m:r>
-                      <m:t>σ</m:t>
-                    </m:r>
-                    <m:r>
-                      <m:rPr>
-                        <m:sty m:val="p"/>
-                      </m:rPr>
-                      <m:t>=</m:t>
-                    </m:r>
-                    <m:r>
-                      <m:t>1</m:t>
-                    </m:r>
-                  </m:oMath>
-                </a14:m>
-                <a:r>
-                  <a:rPr/>
-                  <a:t>:</a:t>
-                </a:r>
-              </a:p>
-              <a:p>
-                <a:pPr lvl="0" indent="0" marL="0">
-                  <a:buNone/>
-                </a:pPr>
-                <a14:m>
-                  <m:oMathPara xmlns:m="http://schemas.openxmlformats.org/officeDocument/2006/math">
-                    <m:oMathParaPr>
-                      <m:jc m:val="center"/>
-                    </m:oMathParaPr>
-                    <m:oMath>
-                      <m:r>
-                        <m:t>Z</m:t>
-                      </m:r>
-                      <m:r>
-                        <m:rPr>
-                          <m:sty m:val="p"/>
-                        </m:rPr>
-                        <m:t>∼</m:t>
-                      </m:r>
-                      <m:r>
-                        <m:t>N</m:t>
-                      </m:r>
-                      <m:d>
-                        <m:dPr>
-                          <m:begChr m:val="("/>
-                          <m:sepChr m:val=""/>
-                          <m:endChr m:val=")"/>
-                          <m:grow/>
-                        </m:dPr>
-                        <m:e>
-                          <m:r>
-                            <m:t>0</m:t>
-                          </m:r>
-                          <m:r>
-                            <m:rPr>
-                              <m:sty m:val="p"/>
-                            </m:rPr>
-                            <m:t>,</m:t>
-                          </m:r>
-                          <m:r>
-                            <m:t>1</m:t>
-                          </m:r>
-                        </m:e>
-                      </m:d>
-                      <m:r>
-                        <m:rPr>
-                          <m:sty m:val="p"/>
-                        </m:rPr>
-                        <m:t>,</m:t>
-                      </m:r>
-                      <m:r>
-                        <m:t>  </m:t>
-                      </m:r>
-                      <m:sSub>
-                        <m:e>
-                          <m:r>
-                            <m:t>f</m:t>
-                          </m:r>
-                        </m:e>
-                        <m:sub>
-                          <m:r>
-                            <m:t>Z</m:t>
-                          </m:r>
-                        </m:sub>
-                      </m:sSub>
-                      <m:d>
-                        <m:dPr>
-                          <m:begChr m:val="("/>
-                          <m:sepChr m:val=""/>
-                          <m:endChr m:val=")"/>
-                          <m:grow/>
-                        </m:dPr>
-                        <m:e>
-                          <m:r>
-                            <m:t>z</m:t>
-                          </m:r>
-                        </m:e>
-                      </m:d>
-                      <m:r>
-                        <m:rPr>
-                          <m:sty m:val="p"/>
-                        </m:rPr>
-                        <m:t>=</m:t>
-                      </m:r>
-                      <m:f>
-                        <m:fPr>
-                          <m:type m:val="bar"/>
-                        </m:fPr>
-                        <m:num>
-                          <m:r>
-                            <m:t>1</m:t>
-                          </m:r>
-                        </m:num>
-                        <m:den>
-                          <m:rad>
-                            <m:radPr>
-                              <m:degHide m:val="on"/>
-                            </m:radPr>
-                            <m:deg/>
-                            <m:e>
-                              <m:r>
-                                <m:t>2</m:t>
-                              </m:r>
-                              <m:r>
-                                <m:t>π</m:t>
-                              </m:r>
-                            </m:e>
-                          </m:rad>
-                        </m:den>
-                      </m:f>
-                      <m:sSup>
-                        <m:e>
-                          <m:r>
-                            <m:t>e</m:t>
-                          </m:r>
-                        </m:e>
-                        <m:sup>
-                          <m:r>
-                            <m:rPr>
-                              <m:sty m:val="p"/>
-                            </m:rPr>
-                            <m:t>−</m:t>
-                          </m:r>
-                          <m:sSup>
-                            <m:e>
-                              <m:r>
-                                <m:t>z</m:t>
-                              </m:r>
-                            </m:e>
-                            <m:sup>
-                              <m:r>
-                                <m:t>2</m:t>
-                              </m:r>
-                            </m:sup>
-                          </m:sSup>
-                          <m:r>
-                            <m:rPr>
-                              <m:sty m:val="p"/>
-                            </m:rPr>
-                            <m:t>/</m:t>
-                          </m:r>
-                          <m:r>
-                            <m:t>2</m:t>
-                          </m:r>
-                        </m:sup>
-                      </m:sSup>
-                      <m:r>
-                        <m:rPr>
-                          <m:sty m:val="p"/>
-                        </m:rPr>
-                        <m:t>,</m:t>
-                      </m:r>
-                      <m:r>
-                        <m:t> </m:t>
-                      </m:r>
-                      <m:r>
-                        <m:rPr>
-                          <m:sty m:val="p"/>
-                        </m:rPr>
-                        <m:t>−</m:t>
-                      </m:r>
-                      <m:r>
-                        <m:rPr>
-                          <m:sty m:val="p"/>
-                        </m:rPr>
-                        <m:t>∞</m:t>
-                      </m:r>
-                      <m:r>
-                        <m:rPr>
-                          <m:sty m:val="p"/>
-                        </m:rPr>
-                        <m:t>&lt;</m:t>
-                      </m:r>
-                      <m:r>
-                        <m:t>z</m:t>
-                      </m:r>
-                      <m:r>
-                        <m:rPr>
-                          <m:sty m:val="p"/>
-                        </m:rPr>
-                        <m:t>&lt;</m:t>
-                      </m:r>
-                      <m:r>
-                        <m:rPr>
-                          <m:sty m:val="p"/>
-                        </m:rPr>
-                        <m:t>∞</m:t>
-                      </m:r>
-                      <m:r>
-                        <m:rPr>
-                          <m:sty m:val="p"/>
-                        </m:rPr>
-                        <m:t>.</m:t>
-                      </m:r>
-                    </m:oMath>
-                  </m:oMathPara>
-                </a14:m>
-              </a:p>
-              <a:p>
-                <a:pPr lvl="0" indent="0" marL="0">
-                  <a:buNone/>
-                </a:pPr>
-                <a:r>
-                  <a:rPr/>
-                  <a:t>Its density has no elementary antiderivative. We use a </a:t>
-                </a:r>
-                <a:r>
-                  <a:rPr b="1"/>
-                  <a:t>Z-table</a:t>
-                </a:r>
-                <a:r>
-                  <a:rPr/>
-                  <a:t> or software to calculate areas.</a:t>
-                </a:r>
-              </a:p>
-            </p:txBody>
-          </p:sp>
-        </mc:Choice>
-      </mc:AlternateContent>
-      <p:sp>
-        <p:nvSpPr>
-          <p:cNvPr id="4" name="Slide Number Placeholder 3"/>
-          <p:cNvSpPr>
-            <a:spLocks noGrp="1"/>
-          </p:cNvSpPr>
-          <p:nvPr>
-            <p:ph idx="10" sz="quarter" type="sldNum"/>
-          </p:nvPr>
-        </p:nvSpPr>
-        <p:spPr/>
-        <p:txBody>
-          <a:bodyPr/>
-          <a:lstStyle/>
-          <a:p>
-            <a:fld id="{9C13042B-154E-4D18-B726-07B2F714EFCF}" type="slidenum">
-              <a:rPr lang="en-US" smtClean="0"/>
-              <a:pPr/>
-              <a:t>‹#›</a:t>
-            </a:fld>
-            <a:endParaRPr dirty="0" lang="en-US"/>
-          </a:p>
-        </p:txBody>
-      </p:sp>
-    </p:spTree>
-  </p:cSld>
-</p:sld>
-</file>
-
-<file path=ppt/slides/slide15.xml><?xml version="1.0" encoding="utf-8"?>
-<p:sld xmlns:a="http://schemas.openxmlformats.org/drawingml/2006/main" xmlns:r="http://schemas.openxmlformats.org/officeDocument/2006/relationships" xmlns:p="http://schemas.openxmlformats.org/presentationml/2006/main">
-  <p:cSld>
-    <p:spTree>
-      <p:nvGrpSpPr>
-        <p:cNvPr id="1" name=""/>
-        <p:cNvGrpSpPr/>
-        <p:nvPr/>
-      </p:nvGrpSpPr>
-      <p:grpSpPr>
-        <a:xfrm>
-          <a:off x="0" y="0"/>
-          <a:ext cx="0" cy="0"/>
-          <a:chOff x="0" y="0"/>
-          <a:chExt cx="0" cy="0"/>
-        </a:xfrm>
-      </p:grpSpPr>
-      <p:sp>
-        <p:nvSpPr>
-          <p:cNvPr id="2" name="Title Placeholder 1"/>
-          <p:cNvSpPr>
-            <a:spLocks noGrp="1"/>
-          </p:cNvSpPr>
-          <p:nvPr>
-            <p:ph type="title"/>
-          </p:nvPr>
-        </p:nvSpPr>
-        <p:spPr bwMode="auto">
-          <a:xfrm>
-            <a:off x="433680" y="423297"/>
-            <a:ext cx="8229600" cy="784602"/>
-          </a:xfrm>
-          <a:prstGeom prst="rect">
-            <a:avLst/>
-          </a:prstGeom>
-          <a:noFill/>
-          <a:ln w="9525">
-            <a:noFill/>
-            <a:miter lim="800000"/>
-            <a:headEnd/>
-            <a:tailEnd/>
-          </a:ln>
-        </p:spPr>
-        <p:txBody>
-          <a:bodyPr/>
-          <a:lstStyle/>
-          <a:p>
-            <a:pPr lvl="0" indent="0" marL="0">
-              <a:buNone/>
-            </a:pPr>
-            <a:r>
-              <a:rPr/>
-              <a:t>Reading the Z-Table</a:t>
-            </a:r>
-          </a:p>
-        </p:txBody>
-      </p:sp>
-      <mc:AlternateContent xmlns:mc="http://schemas.openxmlformats.org/markup-compatibility/2006">
-        <mc:Choice xmlns:a14="http://schemas.microsoft.com/office/drawing/2010/main" Requires="a14">
-          <p:sp>
-            <p:nvSpPr>
-              <p:cNvPr id="3" name="Text Placeholder 2"/>
-              <p:cNvSpPr>
-                <a:spLocks noGrp="1"/>
-              </p:cNvSpPr>
-              <p:nvPr>
-                <p:ph idx="1"/>
-              </p:nvPr>
-            </p:nvSpPr>
-            <p:spPr/>
-            <p:txBody>
-              <a:bodyPr/>
-              <a:lstStyle/>
-              <a:p>
-                <a:pPr lvl="0"/>
-                <a:r>
-                  <a:rPr/>
-                  <a:t>The total area under the curve is </a:t>
-                </a:r>
-                <a:r>
-                  <a:rPr b="1"/>
-                  <a:t>1</a:t>
-                </a:r>
-                <a:r>
-                  <a:rPr/>
-                  <a:t>.</a:t>
-                </a:r>
-              </a:p>
-              <a:p>
-                <a:pPr lvl="0"/>
-                <a:r>
-                  <a:rPr/>
-                  <a:t>The standard normal curve is symmetric about </a:t>
-                </a:r>
-                <a:r>
-                  <a:rPr b="1"/>
-                  <a:t>0</a:t>
-                </a:r>
-                <a:r>
-                  <a:rPr/>
-                  <a:t>.</a:t>
-                </a:r>
-              </a:p>
-              <a:p>
-                <a:pPr lvl="0"/>
-                <a:r>
-                  <a:rPr/>
-                  <a:t>The table used here gives the area </a:t>
-                </a:r>
-                <a:r>
-                  <a:rPr b="1"/>
-                  <a:t>to the left</a:t>
-                </a:r>
-                <a:r>
-                  <a:rPr/>
-                  <a:t>: </a:t>
-                </a:r>
-                <a14:m>
-                  <m:oMath xmlns:m="http://schemas.openxmlformats.org/officeDocument/2006/math">
-                    <m:r>
-                      <m:t>Φ</m:t>
-                    </m:r>
-                    <m:d>
-                      <m:dPr>
-                        <m:begChr m:val="("/>
-                        <m:sepChr m:val=""/>
-                        <m:endChr m:val=")"/>
-                        <m:grow/>
-                      </m:dPr>
-                      <m:e>
-                        <m:r>
-                          <m:t>z</m:t>
-                        </m:r>
-                      </m:e>
-                    </m:d>
-                    <m:r>
-                      <m:rPr>
-                        <m:sty m:val="p"/>
-                      </m:rPr>
-                      <m:t>=</m:t>
-                    </m:r>
-                    <m:r>
-                      <m:t>P</m:t>
-                    </m:r>
-                    <m:d>
-                      <m:dPr>
-                        <m:begChr m:val="("/>
-                        <m:sepChr m:val=""/>
-                        <m:endChr m:val=")"/>
-                        <m:grow/>
-                      </m:dPr>
-                      <m:e>
-                        <m:r>
-                          <m:t>Z</m:t>
-                        </m:r>
-                        <m:r>
-                          <m:rPr>
-                            <m:sty m:val="p"/>
-                          </m:rPr>
-                          <m:t>≤</m:t>
-                        </m:r>
-                        <m:r>
-                          <m:t>z</m:t>
-                        </m:r>
-                      </m:e>
-                    </m:d>
-                  </m:oMath>
-                </a14:m>
-                <a:r>
-                  <a:rPr/>
-                  <a:t>.</a:t>
-                </a:r>
-              </a:p>
-              <a:p>
-                <a:pPr lvl="0"/>
-                <a:r>
-                  <a:rPr/>
-                  <a:t>Other tables may use different area conventions; always check the table heading.</a:t>
-                </a:r>
-              </a:p>
-              <a:p>
-                <a:pPr lvl="0"/>
-                <a:r>
-                  <a:rPr/>
-                  <a:t>Use the row for the ones and tenths digits and the column for the hundredths digit.</a:t>
-                </a:r>
-              </a:p>
-              <a:p>
-                <a:pPr lvl="0"/>
-                <a:r>
-                  <a:rPr/>
-                  <a:t>For a continuous random variable, </a:t>
-                </a:r>
-                <a14:m>
-                  <m:oMath xmlns:m="http://schemas.openxmlformats.org/officeDocument/2006/math">
-                    <m:r>
-                      <m:t>P</m:t>
-                    </m:r>
-                    <m:d>
-                      <m:dPr>
-                        <m:begChr m:val="("/>
-                        <m:sepChr m:val=""/>
-                        <m:endChr m:val=")"/>
-                        <m:grow/>
-                      </m:dPr>
-                      <m:e>
-                        <m:r>
-                          <m:t>Z</m:t>
-                        </m:r>
-                        <m:r>
-                          <m:rPr>
-                            <m:sty m:val="p"/>
-                          </m:rPr>
-                          <m:t>&lt;</m:t>
-                        </m:r>
-                        <m:r>
-                          <m:t>z</m:t>
-                        </m:r>
-                      </m:e>
-                    </m:d>
-                    <m:r>
-                      <m:rPr>
-                        <m:sty m:val="p"/>
-                      </m:rPr>
-                      <m:t>=</m:t>
-                    </m:r>
-                    <m:r>
-                      <m:t>P</m:t>
-                    </m:r>
-                    <m:d>
-                      <m:dPr>
-                        <m:begChr m:val="("/>
-                        <m:sepChr m:val=""/>
-                        <m:endChr m:val=")"/>
-                        <m:grow/>
-                      </m:dPr>
-                      <m:e>
-                        <m:r>
-                          <m:t>Z</m:t>
-                        </m:r>
-                        <m:r>
-                          <m:rPr>
-                            <m:sty m:val="p"/>
-                          </m:rPr>
-                          <m:t>≤</m:t>
-                        </m:r>
-                        <m:r>
-                          <m:t>z</m:t>
-                        </m:r>
-                      </m:e>
-                    </m:d>
-                  </m:oMath>
-                </a14:m>
-                <a:r>
-                  <a:rPr/>
-                  <a:t>.</a:t>
-                </a:r>
-              </a:p>
-            </p:txBody>
-          </p:sp>
-        </mc:Choice>
-      </mc:AlternateContent>
-      <p:sp>
-        <p:nvSpPr>
-          <p:cNvPr id="4" name="Slide Number Placeholder 3"/>
-          <p:cNvSpPr>
-            <a:spLocks noGrp="1"/>
-          </p:cNvSpPr>
-          <p:nvPr>
-            <p:ph idx="10" sz="quarter" type="sldNum"/>
-          </p:nvPr>
-        </p:nvSpPr>
-        <p:spPr/>
-        <p:txBody>
-          <a:bodyPr/>
-          <a:lstStyle/>
-          <a:p>
-            <a:fld id="{9C13042B-154E-4D18-B726-07B2F714EFCF}" type="slidenum">
-              <a:rPr lang="en-US" smtClean="0"/>
-              <a:pPr/>
-              <a:t>‹#›</a:t>
-            </a:fld>
-            <a:endParaRPr dirty="0" lang="en-US"/>
-          </a:p>
-        </p:txBody>
-      </p:sp>
-    </p:spTree>
-  </p:cSld>
-  <p:timing>
-    <p:tnLst>
-      <p:par>
-        <p:cTn id="1" dur="indefinite" restart="never" nodeType="tmRoot">
-          <p:childTnLst>
-            <p:seq concurrent="1" nextAc="seek">
-              <p:cTn id="2" dur="indefinite" nodeType="mainSeq">
-                <p:childTnLst>
-                  <p:par>
-                    <p:cTn id="3" fill="hold">
-                      <p:stCondLst>
-                        <p:cond delay="indefinite"/>
-                      </p:stCondLst>
-                      <p:childTnLst>
-                        <p:par>
-                          <p:cTn id="4" fill="hold">
-                            <p:stCondLst>
-                              <p:cond delay="0"/>
-                            </p:stCondLst>
-                            <p:childTnLst>
-                              <p:par>
-                                <p:cTn id="5" presetID="1" presetClass="entr" presetSubtype="0" fill="hold" grpId="0" nodeType="clickEffect">
-                                  <p:stCondLst>
-                                    <p:cond delay="0"/>
-                                  </p:stCondLst>
-                                  <p:childTnLst>
-                                    <p:set>
-                                      <p:cBhvr>
-                                        <p:cTn id="6" dur="1" fill="hold">
-                                          <p:stCondLst>
-                                            <p:cond delay="0"/>
-                                          </p:stCondLst>
-                                        </p:cTn>
-                                        <p:tgtEl>
-                                          <p:spTgt spid="3">
-                                            <p:txEl>
-                                              <p:pRg st="0" end="0"/>
-                                            </p:txEl>
-                                          </p:spTgt>
-                                        </p:tgtEl>
-                                        <p:attrNameLst>
-                                          <p:attrName>style.visibility</p:attrName>
-                                        </p:attrNameLst>
-                                      </p:cBhvr>
-                                      <p:to>
-                                        <p:strVal val="visible"/>
-                                      </p:to>
-                                    </p:set>
-                                  </p:childTnLst>
-                                </p:cTn>
-                              </p:par>
-                            </p:childTnLst>
-                          </p:cTn>
-                        </p:par>
-                      </p:childTnLst>
-                    </p:cTn>
-                  </p:par>
-                  <p:par>
-                    <p:cTn id="7" fill="hold">
-                      <p:stCondLst>
-                        <p:cond delay="indefinite"/>
-                      </p:stCondLst>
-                      <p:childTnLst>
-                        <p:par>
-                          <p:cTn id="8" fill="hold">
-                            <p:stCondLst>
-                              <p:cond delay="0"/>
-                            </p:stCondLst>
-                            <p:childTnLst>
-                              <p:par>
-                                <p:cTn id="9" presetID="1" presetClass="entr" presetSubtype="0" fill="hold" grpId="0" nodeType="clickEffect">
-                                  <p:stCondLst>
-                                    <p:cond delay="0"/>
-                                  </p:stCondLst>
-                                  <p:childTnLst>
-                                    <p:set>
-                                      <p:cBhvr>
-                                        <p:cTn id="10" dur="1" fill="hold">
-                                          <p:stCondLst>
-                                            <p:cond delay="0"/>
-                                          </p:stCondLst>
-                                        </p:cTn>
-                                        <p:tgtEl>
-                                          <p:spTgt spid="3">
-                                            <p:txEl>
-                                              <p:pRg st="1" end="1"/>
-                                            </p:txEl>
-                                          </p:spTgt>
-                                        </p:tgtEl>
-                                        <p:attrNameLst>
-                                          <p:attrName>style.visibility</p:attrName>
-                                        </p:attrNameLst>
-                                      </p:cBhvr>
-                                      <p:to>
-                                        <p:strVal val="visible"/>
-                                      </p:to>
-                                    </p:set>
-                                  </p:childTnLst>
-                                </p:cTn>
-                              </p:par>
-                            </p:childTnLst>
-                          </p:cTn>
-                        </p:par>
-                      </p:childTnLst>
-                    </p:cTn>
-                  </p:par>
-                  <p:par>
-                    <p:cTn id="11" fill="hold">
-                      <p:stCondLst>
-                        <p:cond delay="indefinite"/>
-                      </p:stCondLst>
-                      <p:childTnLst>
-                        <p:par>
-                          <p:cTn id="12" fill="hold">
-                            <p:stCondLst>
-                              <p:cond delay="0"/>
-                            </p:stCondLst>
-                            <p:childTnLst>
-                              <p:par>
-                                <p:cTn id="13" presetID="1" presetClass="entr" presetSubtype="0" fill="hold" grpId="0" nodeType="clickEffect">
-                                  <p:stCondLst>
-                                    <p:cond delay="0"/>
-                                  </p:stCondLst>
-                                  <p:childTnLst>
-                                    <p:set>
-                                      <p:cBhvr>
-                                        <p:cTn id="14" dur="1" fill="hold">
-                                          <p:stCondLst>
-                                            <p:cond delay="0"/>
-                                          </p:stCondLst>
-                                        </p:cTn>
-                                        <p:tgtEl>
-                                          <p:spTgt spid="3">
-                                            <p:txEl>
-                                              <p:pRg st="2" end="2"/>
-                                            </p:txEl>
-                                          </p:spTgt>
-                                        </p:tgtEl>
-                                        <p:attrNameLst>
-                                          <p:attrName>style.visibility</p:attrName>
-                                        </p:attrNameLst>
-                                      </p:cBhvr>
-                                      <p:to>
-                                        <p:strVal val="visible"/>
-                                      </p:to>
-                                    </p:set>
-                                  </p:childTnLst>
-                                </p:cTn>
-                              </p:par>
-                            </p:childTnLst>
-                          </p:cTn>
-                        </p:par>
-                      </p:childTnLst>
-                    </p:cTn>
-                  </p:par>
-                  <p:par>
-                    <p:cTn id="15" fill="hold">
-                      <p:stCondLst>
-                        <p:cond delay="indefinite"/>
-                      </p:stCondLst>
-                      <p:childTnLst>
-                        <p:par>
-                          <p:cTn id="16" fill="hold">
-                            <p:stCondLst>
-                              <p:cond delay="0"/>
-                            </p:stCondLst>
-                            <p:childTnLst>
-                              <p:par>
-                                <p:cTn id="17" presetID="1" presetClass="entr" presetSubtype="0" fill="hold" grpId="0" nodeType="clickEffect">
-                                  <p:stCondLst>
-                                    <p:cond delay="0"/>
-                                  </p:stCondLst>
-                                  <p:childTnLst>
-                                    <p:set>
-                                      <p:cBhvr>
-                                        <p:cTn id="18" dur="1" fill="hold">
-                                          <p:stCondLst>
-                                            <p:cond delay="0"/>
-                                          </p:stCondLst>
-                                        </p:cTn>
-                                        <p:tgtEl>
-                                          <p:spTgt spid="3">
-                                            <p:txEl>
-                                              <p:pRg st="3" end="3"/>
-                                            </p:txEl>
-                                          </p:spTgt>
-                                        </p:tgtEl>
-                                        <p:attrNameLst>
-                                          <p:attrName>style.visibility</p:attrName>
-                                        </p:attrNameLst>
-                                      </p:cBhvr>
-                                      <p:to>
-                                        <p:strVal val="visible"/>
-                                      </p:to>
-                                    </p:set>
-                                  </p:childTnLst>
-                                </p:cTn>
-                              </p:par>
-                            </p:childTnLst>
-                          </p:cTn>
-                        </p:par>
-                      </p:childTnLst>
-                    </p:cTn>
-                  </p:par>
-                  <p:par>
-                    <p:cTn id="19" fill="hold">
-                      <p:stCondLst>
-                        <p:cond delay="indefinite"/>
-                      </p:stCondLst>
-                      <p:childTnLst>
-                        <p:par>
-                          <p:cTn id="20" fill="hold">
-                            <p:stCondLst>
-                              <p:cond delay="0"/>
-                            </p:stCondLst>
-                            <p:childTnLst>
-                              <p:par>
-                                <p:cTn id="21" presetID="1" presetClass="entr" presetSubtype="0" fill="hold" grpId="0" nodeType="clickEffect">
-                                  <p:stCondLst>
-                                    <p:cond delay="0"/>
-                                  </p:stCondLst>
-                                  <p:childTnLst>
-                                    <p:set>
-                                      <p:cBhvr>
-                                        <p:cTn id="22" dur="1" fill="hold">
-                                          <p:stCondLst>
-                                            <p:cond delay="0"/>
-                                          </p:stCondLst>
-                                        </p:cTn>
-                                        <p:tgtEl>
-                                          <p:spTgt spid="3">
-                                            <p:txEl>
-                                              <p:pRg st="4" end="4"/>
-                                            </p:txEl>
-                                          </p:spTgt>
-                                        </p:tgtEl>
-                                        <p:attrNameLst>
-                                          <p:attrName>style.visibility</p:attrName>
-                                        </p:attrNameLst>
-                                      </p:cBhvr>
-                                      <p:to>
-                                        <p:strVal val="visible"/>
-                                      </p:to>
-                                    </p:set>
-                                  </p:childTnLst>
-                                </p:cTn>
-                              </p:par>
-                            </p:childTnLst>
-                          </p:cTn>
-                        </p:par>
-                      </p:childTnLst>
-                    </p:cTn>
-                  </p:par>
-                  <p:par>
-                    <p:cTn id="23" fill="hold">
-                      <p:stCondLst>
-                        <p:cond delay="indefinite"/>
-                      </p:stCondLst>
-                      <p:childTnLst>
-                        <p:par>
-                          <p:cTn id="24" fill="hold">
-                            <p:stCondLst>
-                              <p:cond delay="0"/>
-                            </p:stCondLst>
-                            <p:childTnLst>
-                              <p:par>
-                                <p:cTn id="25" presetID="1" presetClass="entr" presetSubtype="0" fill="hold" grpId="0" nodeType="clickEffect">
-                                  <p:stCondLst>
-                                    <p:cond delay="0"/>
-                                  </p:stCondLst>
-                                  <p:childTnLst>
-                                    <p:set>
-                                      <p:cBhvr>
-                                        <p:cTn id="26" dur="1" fill="hold">
-                                          <p:stCondLst>
-                                            <p:cond delay="0"/>
-                                          </p:stCondLst>
-                                        </p:cTn>
-                                        <p:tgtEl>
-                                          <p:spTgt spid="3">
-                                            <p:txEl>
-                                              <p:pRg st="5" end="5"/>
-                                            </p:txEl>
-                                          </p:spTgt>
-                                        </p:tgtEl>
-                                        <p:attrNameLst>
-                                          <p:attrName>style.visibility</p:attrName>
-                                        </p:attrNameLst>
-                                      </p:cBhvr>
-                                      <p:to>
-                                        <p:strVal val="visible"/>
-                                      </p:to>
-                                    </p:set>
-                                  </p:childTnLst>
-                                </p:cTn>
-                              </p:par>
-                            </p:childTnLst>
-                          </p:cTn>
-                        </p:par>
-                      </p:childTnLst>
-                    </p:cTn>
-                  </p:par>
-                </p:childTnLst>
-              </p:cTn>
-              <p:prevCondLst>
-                <p:cond evt="onPrev" delay="0">
-                  <p:tgtEl>
-                    <p:sldTgt/>
-                  </p:tgtEl>
-                </p:cond>
-              </p:prevCondLst>
-              <p:nextCondLst>
-                <p:cond evt="onNext" delay="0">
-                  <p:tgtEl>
-                    <p:sldTgt/>
-                  </p:tgtEl>
-                </p:cond>
-              </p:nextCondLst>
-            </p:seq>
-          </p:childTnLst>
-        </p:cTn>
-      </p:par>
-    </p:tnLst>
-    <p:bldLst>
-      <p:bldP spid="3" grpId="0" uiExpand="1" build="p"/>
-    </p:bldLst>
-  </p:timing>
-</p:sld>
-</file>
-
 <file path=ppt/slides/slide2.xml><?xml version="1.0" encoding="utf-8"?>
 <p:sld xmlns:a="http://schemas.openxmlformats.org/drawingml/2006/main" xmlns:r="http://schemas.openxmlformats.org/officeDocument/2006/relationships" xmlns:p="http://schemas.openxmlformats.org/presentationml/2006/main">
   <p:cSld>
@@ -4707,6 +3199,515 @@
             </a:pPr>
             <a:r>
               <a:rPr/>
+              <a:t>Lecture Notes</a:t>
+            </a:r>
+          </a:p>
+        </p:txBody>
+      </p:sp>
+      <p:sp>
+        <p:nvSpPr>
+          <p:cNvPr id="3" name="Text Placeholder 2"/>
+          <p:cNvSpPr>
+            <a:spLocks noGrp="1"/>
+          </p:cNvSpPr>
+          <p:nvPr>
+            <p:ph idx="1"/>
+          </p:nvPr>
+        </p:nvSpPr>
+        <p:spPr/>
+        <p:txBody>
+          <a:bodyPr/>
+          <a:lstStyle/>
+          <a:p>
+            <a:pPr lvl="0"/>
+            <a:r>
+              <a:rPr/>
+              <a:t>Download the </a:t>
+            </a:r>
+            <a:r>
+              <a:rPr>
+                <a:hlinkClick r:id="rId2"/>
+              </a:rPr>
+              <a:t>Lecture Notes Unit 06A: Normal Distribution</a:t>
+            </a:r>
+            <a:r>
+              <a:rPr/>
+              <a:t> and </a:t>
+            </a:r>
+            <a:r>
+              <a:rPr>
+                <a:hlinkClick r:id="rId3"/>
+              </a:rPr>
+              <a:t>Lecture Notes Unit 06B: Central Limit Theorem</a:t>
+            </a:r>
+            <a:r>
+              <a:rPr/>
+              <a:t> – review the covered topics thoroughly after class. These lecture notes provide a more detailed and elaborated version of the material covered during class.</a:t>
+            </a:r>
+          </a:p>
+          <a:p>
+            <a:pPr lvl="0"/>
+            <a:r>
+              <a:rPr/>
+              <a:t>For units where Lecture Notes/Handouts are provided, they should serve as one of your core course resources. For these units, you are not expected to use the textbook as your primary study resource, but feel free to go through the related topics in the textbooks (mentioned in the class) if you want to!</a:t>
+            </a:r>
+          </a:p>
+          <a:p>
+            <a:pPr lvl="0"/>
+            <a:r>
+              <a:rPr/>
+              <a:t>You do not need to print the lecture notes or bring a printed copy to class. Save the printing money and buy yourself a treat instead! :)</a:t>
+            </a:r>
+          </a:p>
+          <a:p>
+            <a:pPr lvl="0" indent="0" marL="0">
+              <a:buNone/>
+            </a:pPr>
+            <a:r>
+              <a:rPr/>
+              <a:t>-When lecture notes are available, please follow this order when studying:</a:t>
+            </a:r>
+          </a:p>
+          <a:p>
+            <a:pPr lvl="0"/>
+            <a:r>
+              <a:rPr/>
+              <a:t>Class Notes/Handouts: Your primary resource. These reflect exactly what we discuss, emphasize, and use in class.</a:t>
+            </a:r>
+          </a:p>
+          <a:p>
+            <a:pPr lvl="0"/>
+            <a:r>
+              <a:rPr/>
+              <a:t>Lecture Notes: Your main supplementary (required) resource. Use these for additional explanations, details, examples, and review after class.</a:t>
+            </a:r>
+          </a:p>
+          <a:p>
+            <a:pPr lvl="0"/>
+            <a:r>
+              <a:rPr/>
+              <a:t>Textbook: Use it when you would like to go through some additional (optional) resource.</a:t>
+            </a:r>
+          </a:p>
+          <a:p>
+            <a:pPr lvl="0" indent="0" marL="0">
+              <a:buNone/>
+            </a:pPr>
+            <a:r>
+              <a:rPr/>
+              <a:t>Always prioritize the Class Notes if you notice any difference in notation, terminology, approach, or emphasis between the Class Notes and the Lecture Notes. Occasionally, I may present a concept or use notation slightly differently in class. I will also do my best to point out any important discrepancies as we move through the semester.</a:t>
+            </a:r>
+          </a:p>
+        </p:txBody>
+      </p:sp>
+      <p:sp>
+        <p:nvSpPr>
+          <p:cNvPr id="4" name="Slide Number Placeholder 3"/>
+          <p:cNvSpPr>
+            <a:spLocks noGrp="1"/>
+          </p:cNvSpPr>
+          <p:nvPr>
+            <p:ph idx="10" sz="quarter" type="sldNum"/>
+          </p:nvPr>
+        </p:nvSpPr>
+        <p:spPr/>
+        <p:txBody>
+          <a:bodyPr/>
+          <a:lstStyle/>
+          <a:p>
+            <a:fld id="{9C13042B-154E-4D18-B726-07B2F714EFCF}" type="slidenum">
+              <a:rPr lang="en-US" smtClean="0"/>
+              <a:pPr/>
+              <a:t>‹#›</a:t>
+            </a:fld>
+            <a:endParaRPr dirty="0" lang="en-US"/>
+          </a:p>
+        </p:txBody>
+      </p:sp>
+    </p:spTree>
+  </p:cSld>
+  <p:timing>
+    <p:tnLst>
+      <p:par>
+        <p:cTn id="1" dur="indefinite" restart="never" nodeType="tmRoot">
+          <p:childTnLst>
+            <p:seq concurrent="1" nextAc="seek">
+              <p:cTn id="2" dur="indefinite" nodeType="mainSeq">
+                <p:childTnLst>
+                  <p:par>
+                    <p:cTn id="3" fill="hold">
+                      <p:stCondLst>
+                        <p:cond delay="indefinite"/>
+                      </p:stCondLst>
+                      <p:childTnLst>
+                        <p:par>
+                          <p:cTn id="4" fill="hold">
+                            <p:stCondLst>
+                              <p:cond delay="0"/>
+                            </p:stCondLst>
+                            <p:childTnLst>
+                              <p:par>
+                                <p:cTn id="5" presetID="1" presetClass="entr" presetSubtype="0" fill="hold" grpId="0" nodeType="clickEffect">
+                                  <p:stCondLst>
+                                    <p:cond delay="0"/>
+                                  </p:stCondLst>
+                                  <p:childTnLst>
+                                    <p:set>
+                                      <p:cBhvr>
+                                        <p:cTn id="6" dur="1" fill="hold">
+                                          <p:stCondLst>
+                                            <p:cond delay="0"/>
+                                          </p:stCondLst>
+                                        </p:cTn>
+                                        <p:tgtEl>
+                                          <p:spTgt spid="3">
+                                            <p:txEl>
+                                              <p:pRg st="0" end="0"/>
+                                            </p:txEl>
+                                          </p:spTgt>
+                                        </p:tgtEl>
+                                        <p:attrNameLst>
+                                          <p:attrName>style.visibility</p:attrName>
+                                        </p:attrNameLst>
+                                      </p:cBhvr>
+                                      <p:to>
+                                        <p:strVal val="visible"/>
+                                      </p:to>
+                                    </p:set>
+                                  </p:childTnLst>
+                                </p:cTn>
+                              </p:par>
+                            </p:childTnLst>
+                          </p:cTn>
+                        </p:par>
+                      </p:childTnLst>
+                    </p:cTn>
+                  </p:par>
+                  <p:par>
+                    <p:cTn id="7" fill="hold">
+                      <p:stCondLst>
+                        <p:cond delay="indefinite"/>
+                      </p:stCondLst>
+                      <p:childTnLst>
+                        <p:par>
+                          <p:cTn id="8" fill="hold">
+                            <p:stCondLst>
+                              <p:cond delay="0"/>
+                            </p:stCondLst>
+                            <p:childTnLst>
+                              <p:par>
+                                <p:cTn id="9" presetID="1" presetClass="entr" presetSubtype="0" fill="hold" grpId="0" nodeType="clickEffect">
+                                  <p:stCondLst>
+                                    <p:cond delay="0"/>
+                                  </p:stCondLst>
+                                  <p:childTnLst>
+                                    <p:set>
+                                      <p:cBhvr>
+                                        <p:cTn id="10" dur="1" fill="hold">
+                                          <p:stCondLst>
+                                            <p:cond delay="0"/>
+                                          </p:stCondLst>
+                                        </p:cTn>
+                                        <p:tgtEl>
+                                          <p:spTgt spid="3">
+                                            <p:txEl>
+                                              <p:pRg st="1" end="1"/>
+                                            </p:txEl>
+                                          </p:spTgt>
+                                        </p:tgtEl>
+                                        <p:attrNameLst>
+                                          <p:attrName>style.visibility</p:attrName>
+                                        </p:attrNameLst>
+                                      </p:cBhvr>
+                                      <p:to>
+                                        <p:strVal val="visible"/>
+                                      </p:to>
+                                    </p:set>
+                                  </p:childTnLst>
+                                </p:cTn>
+                              </p:par>
+                            </p:childTnLst>
+                          </p:cTn>
+                        </p:par>
+                      </p:childTnLst>
+                    </p:cTn>
+                  </p:par>
+                  <p:par>
+                    <p:cTn id="11" fill="hold">
+                      <p:stCondLst>
+                        <p:cond delay="indefinite"/>
+                      </p:stCondLst>
+                      <p:childTnLst>
+                        <p:par>
+                          <p:cTn id="12" fill="hold">
+                            <p:stCondLst>
+                              <p:cond delay="0"/>
+                            </p:stCondLst>
+                            <p:childTnLst>
+                              <p:par>
+                                <p:cTn id="13" presetID="1" presetClass="entr" presetSubtype="0" fill="hold" grpId="0" nodeType="clickEffect">
+                                  <p:stCondLst>
+                                    <p:cond delay="0"/>
+                                  </p:stCondLst>
+                                  <p:childTnLst>
+                                    <p:set>
+                                      <p:cBhvr>
+                                        <p:cTn id="14" dur="1" fill="hold">
+                                          <p:stCondLst>
+                                            <p:cond delay="0"/>
+                                          </p:stCondLst>
+                                        </p:cTn>
+                                        <p:tgtEl>
+                                          <p:spTgt spid="3">
+                                            <p:txEl>
+                                              <p:pRg st="2" end="2"/>
+                                            </p:txEl>
+                                          </p:spTgt>
+                                        </p:tgtEl>
+                                        <p:attrNameLst>
+                                          <p:attrName>style.visibility</p:attrName>
+                                        </p:attrNameLst>
+                                      </p:cBhvr>
+                                      <p:to>
+                                        <p:strVal val="visible"/>
+                                      </p:to>
+                                    </p:set>
+                                  </p:childTnLst>
+                                </p:cTn>
+                              </p:par>
+                            </p:childTnLst>
+                          </p:cTn>
+                        </p:par>
+                      </p:childTnLst>
+                    </p:cTn>
+                  </p:par>
+                  <p:par>
+                    <p:cTn id="15" fill="hold">
+                      <p:stCondLst>
+                        <p:cond delay="indefinite"/>
+                      </p:stCondLst>
+                      <p:childTnLst>
+                        <p:par>
+                          <p:cTn id="16" fill="hold">
+                            <p:stCondLst>
+                              <p:cond delay="0"/>
+                            </p:stCondLst>
+                            <p:childTnLst>
+                              <p:par>
+                                <p:cTn id="17" presetID="1" presetClass="entr" presetSubtype="0" fill="hold" grpId="0" nodeType="clickEffect">
+                                  <p:stCondLst>
+                                    <p:cond delay="0"/>
+                                  </p:stCondLst>
+                                  <p:childTnLst>
+                                    <p:set>
+                                      <p:cBhvr>
+                                        <p:cTn id="18" dur="1" fill="hold">
+                                          <p:stCondLst>
+                                            <p:cond delay="0"/>
+                                          </p:stCondLst>
+                                        </p:cTn>
+                                        <p:tgtEl>
+                                          <p:spTgt spid="3">
+                                            <p:txEl>
+                                              <p:pRg st="4" end="4"/>
+                                            </p:txEl>
+                                          </p:spTgt>
+                                        </p:tgtEl>
+                                        <p:attrNameLst>
+                                          <p:attrName>style.visibility</p:attrName>
+                                        </p:attrNameLst>
+                                      </p:cBhvr>
+                                      <p:to>
+                                        <p:strVal val="visible"/>
+                                      </p:to>
+                                    </p:set>
+                                  </p:childTnLst>
+                                </p:cTn>
+                              </p:par>
+                            </p:childTnLst>
+                          </p:cTn>
+                        </p:par>
+                      </p:childTnLst>
+                    </p:cTn>
+                  </p:par>
+                  <p:par>
+                    <p:cTn id="19" fill="hold">
+                      <p:stCondLst>
+                        <p:cond delay="indefinite"/>
+                      </p:stCondLst>
+                      <p:childTnLst>
+                        <p:par>
+                          <p:cTn id="20" fill="hold">
+                            <p:stCondLst>
+                              <p:cond delay="0"/>
+                            </p:stCondLst>
+                            <p:childTnLst>
+                              <p:par>
+                                <p:cTn id="21" presetID="1" presetClass="entr" presetSubtype="0" fill="hold" grpId="0" nodeType="clickEffect">
+                                  <p:stCondLst>
+                                    <p:cond delay="0"/>
+                                  </p:stCondLst>
+                                  <p:childTnLst>
+                                    <p:set>
+                                      <p:cBhvr>
+                                        <p:cTn id="22" dur="1" fill="hold">
+                                          <p:stCondLst>
+                                            <p:cond delay="0"/>
+                                          </p:stCondLst>
+                                        </p:cTn>
+                                        <p:tgtEl>
+                                          <p:spTgt spid="3">
+                                            <p:txEl>
+                                              <p:pRg st="5" end="5"/>
+                                            </p:txEl>
+                                          </p:spTgt>
+                                        </p:tgtEl>
+                                        <p:attrNameLst>
+                                          <p:attrName>style.visibility</p:attrName>
+                                        </p:attrNameLst>
+                                      </p:cBhvr>
+                                      <p:to>
+                                        <p:strVal val="visible"/>
+                                      </p:to>
+                                    </p:set>
+                                  </p:childTnLst>
+                                </p:cTn>
+                              </p:par>
+                            </p:childTnLst>
+                          </p:cTn>
+                        </p:par>
+                      </p:childTnLst>
+                    </p:cTn>
+                  </p:par>
+                  <p:par>
+                    <p:cTn id="23" fill="hold">
+                      <p:stCondLst>
+                        <p:cond delay="indefinite"/>
+                      </p:stCondLst>
+                      <p:childTnLst>
+                        <p:par>
+                          <p:cTn id="24" fill="hold">
+                            <p:stCondLst>
+                              <p:cond delay="0"/>
+                            </p:stCondLst>
+                            <p:childTnLst>
+                              <p:par>
+                                <p:cTn id="25" presetID="1" presetClass="entr" presetSubtype="0" fill="hold" grpId="0" nodeType="clickEffect">
+                                  <p:stCondLst>
+                                    <p:cond delay="0"/>
+                                  </p:stCondLst>
+                                  <p:childTnLst>
+                                    <p:set>
+                                      <p:cBhvr>
+                                        <p:cTn id="26" dur="1" fill="hold">
+                                          <p:stCondLst>
+                                            <p:cond delay="0"/>
+                                          </p:stCondLst>
+                                        </p:cTn>
+                                        <p:tgtEl>
+                                          <p:spTgt spid="3">
+                                            <p:txEl>
+                                              <p:pRg st="6" end="6"/>
+                                            </p:txEl>
+                                          </p:spTgt>
+                                        </p:tgtEl>
+                                        <p:attrNameLst>
+                                          <p:attrName>style.visibility</p:attrName>
+                                        </p:attrNameLst>
+                                      </p:cBhvr>
+                                      <p:to>
+                                        <p:strVal val="visible"/>
+                                      </p:to>
+                                    </p:set>
+                                  </p:childTnLst>
+                                </p:cTn>
+                              </p:par>
+                            </p:childTnLst>
+                          </p:cTn>
+                        </p:par>
+                      </p:childTnLst>
+                    </p:cTn>
+                  </p:par>
+                </p:childTnLst>
+              </p:cTn>
+              <p:prevCondLst>
+                <p:cond evt="onPrev" delay="0">
+                  <p:tgtEl>
+                    <p:sldTgt/>
+                  </p:tgtEl>
+                </p:cond>
+              </p:prevCondLst>
+              <p:nextCondLst>
+                <p:cond evt="onNext" delay="0">
+                  <p:tgtEl>
+                    <p:sldTgt/>
+                  </p:tgtEl>
+                </p:cond>
+              </p:nextCondLst>
+            </p:seq>
+          </p:childTnLst>
+        </p:cTn>
+      </p:par>
+    </p:tnLst>
+    <p:bldLst>
+      <p:bldP spid="3" grpId="0" uiExpand="1" build="p"/>
+    </p:bldLst>
+  </p:timing>
+</p:sld>
+</file>
+
+<file path=ppt/slides/slide5.xml><?xml version="1.0" encoding="utf-8"?>
+<p:sld xmlns:a="http://schemas.openxmlformats.org/drawingml/2006/main" xmlns:r="http://schemas.openxmlformats.org/officeDocument/2006/relationships" xmlns:p="http://schemas.openxmlformats.org/presentationml/2006/main">
+  <p:cSld>
+    <p:spTree>
+      <p:nvGrpSpPr>
+        <p:cNvPr id="1" name=""/>
+        <p:cNvGrpSpPr/>
+        <p:nvPr/>
+      </p:nvGrpSpPr>
+      <p:grpSpPr>
+        <a:xfrm>
+          <a:off x="0" y="0"/>
+          <a:ext cx="0" cy="0"/>
+          <a:chOff x="0" y="0"/>
+          <a:chExt cx="0" cy="0"/>
+        </a:xfrm>
+      </p:grpSpPr>
+      <p:sp>
+        <p:nvSpPr>
+          <p:cNvPr id="2" name="Title Placeholder 1"/>
+          <p:cNvSpPr>
+            <a:spLocks noGrp="1"/>
+          </p:cNvSpPr>
+          <p:nvPr>
+            <p:ph type="title"/>
+          </p:nvPr>
+        </p:nvSpPr>
+        <p:spPr bwMode="auto">
+          <a:xfrm>
+            <a:off x="433680" y="423297"/>
+            <a:ext cx="8229600" cy="784602"/>
+          </a:xfrm>
+          <a:prstGeom prst="rect">
+            <a:avLst/>
+          </a:prstGeom>
+          <a:noFill/>
+          <a:ln w="9525">
+            <a:noFill/>
+            <a:miter lim="800000"/>
+            <a:headEnd/>
+            <a:tailEnd/>
+          </a:ln>
+        </p:spPr>
+        <p:txBody>
+          <a:bodyPr/>
+          <a:lstStyle/>
+          <a:p>
+            <a:pPr lvl="0" indent="0" marL="0">
+              <a:buNone/>
+            </a:pPr>
+            <a:r>
+              <a:rPr/>
               <a:t>Practice Problems</a:t>
             </a:r>
           </a:p>
@@ -5031,1415 +4032,6 @@
       <p:bldP spid="3" grpId="0" uiExpand="1" build="p"/>
     </p:bldLst>
   </p:timing>
-</p:sld>
-</file>
-
-<file path=ppt/slides/slide5.xml><?xml version="1.0" encoding="utf-8"?>
-<p:sld xmlns:a="http://schemas.openxmlformats.org/drawingml/2006/main" xmlns:r="http://schemas.openxmlformats.org/officeDocument/2006/relationships" xmlns:p="http://schemas.openxmlformats.org/presentationml/2006/main">
-  <p:cSld>
-    <p:spTree>
-      <p:nvGrpSpPr>
-        <p:cNvPr id="1" name=""/>
-        <p:cNvGrpSpPr/>
-        <p:nvPr/>
-      </p:nvGrpSpPr>
-      <p:grpSpPr>
-        <a:xfrm>
-          <a:off x="0" y="0"/>
-          <a:ext cx="0" cy="0"/>
-          <a:chOff x="0" y="0"/>
-          <a:chExt cx="0" cy="0"/>
-        </a:xfrm>
-      </p:grpSpPr>
-      <p:sp>
-        <p:nvSpPr>
-          <p:cNvPr id="2" name="Title 1"/>
-          <p:cNvSpPr>
-            <a:spLocks noGrp="1"/>
-          </p:cNvSpPr>
-          <p:nvPr>
-            <p:ph type="title"/>
-          </p:nvPr>
-        </p:nvSpPr>
-        <p:spPr>
-          <a:xfrm>
-            <a:off x="722313" y="1660820"/>
-            <a:ext cx="7772400" cy="4108156"/>
-          </a:xfrm>
-          <a:prstGeom prst="rect">
-            <a:avLst/>
-          </a:prstGeom>
-        </p:spPr>
-        <p:txBody>
-          <a:bodyPr/>
-          <a:lstStyle/>
-          <a:p>
-            <a:pPr lvl="0" indent="0" marL="0">
-              <a:buNone/>
-            </a:pPr>
-            <a:r>
-              <a:rPr/>
-              <a:t>Normal Distribution</a:t>
-            </a:r>
-          </a:p>
-        </p:txBody>
-      </p:sp>
-      <p:sp>
-        <p:nvSpPr>
-          <p:cNvPr id="3" name="Slide Number Placeholder 2"/>
-          <p:cNvSpPr>
-            <a:spLocks noGrp="1"/>
-          </p:cNvSpPr>
-          <p:nvPr>
-            <p:ph idx="10" sz="quarter" type="sldNum"/>
-          </p:nvPr>
-        </p:nvSpPr>
-        <p:spPr/>
-        <p:txBody>
-          <a:bodyPr/>
-          <a:lstStyle/>
-          <a:p>
-            <a:fld id="{9C13042B-154E-4D18-B726-07B2F714EFCF}" type="slidenum">
-              <a:rPr lang="en-US" smtClean="0"/>
-              <a:pPr/>
-              <a:t>‹#›</a:t>
-            </a:fld>
-            <a:endParaRPr dirty="0" lang="en-US"/>
-          </a:p>
-        </p:txBody>
-      </p:sp>
-    </p:spTree>
-  </p:cSld>
-</p:sld>
-</file>
-
-<file path=ppt/slides/slide6.xml><?xml version="1.0" encoding="utf-8"?>
-<p:sld xmlns:a="http://schemas.openxmlformats.org/drawingml/2006/main" xmlns:r="http://schemas.openxmlformats.org/officeDocument/2006/relationships" xmlns:p="http://schemas.openxmlformats.org/presentationml/2006/main">
-  <p:cSld>
-    <p:spTree>
-      <p:nvGrpSpPr>
-        <p:cNvPr id="1" name=""/>
-        <p:cNvGrpSpPr/>
-        <p:nvPr/>
-      </p:nvGrpSpPr>
-      <p:grpSpPr>
-        <a:xfrm>
-          <a:off x="0" y="0"/>
-          <a:ext cx="0" cy="0"/>
-          <a:chOff x="0" y="0"/>
-          <a:chExt cx="0" cy="0"/>
-        </a:xfrm>
-      </p:grpSpPr>
-      <p:sp>
-        <p:nvSpPr>
-          <p:cNvPr id="2" name="Title 1"/>
-          <p:cNvSpPr>
-            <a:spLocks noGrp="1"/>
-          </p:cNvSpPr>
-          <p:nvPr>
-            <p:ph type="title"/>
-          </p:nvPr>
-        </p:nvSpPr>
-        <p:spPr>
-          <a:xfrm>
-            <a:off x="457201" y="204787"/>
-            <a:ext cx="3008313" cy="871538"/>
-          </a:xfrm>
-        </p:spPr>
-        <p:txBody>
-          <a:bodyPr/>
-          <a:lstStyle/>
-          <a:p>
-            <a:pPr lvl="0" indent="0" marL="0">
-              <a:buNone/>
-            </a:pPr>
-            <a:r>
-              <a:rPr/>
-              <a:t>The Normal Distribution</a:t>
-            </a:r>
-          </a:p>
-        </p:txBody>
-      </p:sp>
-      <mc:AlternateContent xmlns:mc="http://schemas.openxmlformats.org/markup-compatibility/2006">
-        <mc:Choice xmlns:a14="http://schemas.microsoft.com/office/drawing/2010/main" Requires="a14">
-          <p:sp>
-            <p:nvSpPr>
-              <p:cNvPr id="4" name="Text Placeholder 3"/>
-              <p:cNvSpPr>
-                <a:spLocks noGrp="1"/>
-              </p:cNvSpPr>
-              <p:nvPr>
-                <p:ph idx="2" sz="half" type="body"/>
-              </p:nvPr>
-            </p:nvSpPr>
-            <p:spPr/>
-            <p:txBody>
-              <a:bodyPr/>
-              <a:lstStyle/>
-              <a:p>
-                <a:pPr lvl="0"/>
-                <a:r>
-                  <a:rPr/>
-                  <a:t>The </a:t>
-                </a:r>
-                <a:r>
-                  <a:rPr b="1"/>
-                  <a:t>normal distribution</a:t>
-                </a:r>
-                <a:r>
-                  <a:rPr/>
-                  <a:t>, often called the </a:t>
-                </a:r>
-                <a:r>
-                  <a:rPr b="1"/>
-                  <a:t>bell curve</a:t>
-                </a:r>
-                <a:r>
-                  <a:rPr/>
-                  <a:t>, is an important continuous probability distribution.</a:t>
-                </a:r>
-              </a:p>
-              <a:p>
-                <a:pPr lvl="0"/>
-                <a:r>
-                  <a:rPr/>
-                  <a:t>Its support is </a:t>
-                </a:r>
-                <a14:m>
-                  <m:oMath xmlns:m="http://schemas.openxmlformats.org/officeDocument/2006/math">
-                    <m:d>
-                      <m:dPr>
-                        <m:begChr m:val="("/>
-                        <m:sepChr m:val=""/>
-                        <m:endChr m:val=")"/>
-                        <m:grow/>
-                      </m:dPr>
-                      <m:e>
-                        <m:r>
-                          <m:rPr>
-                            <m:sty m:val="p"/>
-                          </m:rPr>
-                          <m:t>−</m:t>
-                        </m:r>
-                        <m:r>
-                          <m:rPr>
-                            <m:sty m:val="p"/>
-                          </m:rPr>
-                          <m:t>∞</m:t>
-                        </m:r>
-                        <m:r>
-                          <m:rPr>
-                            <m:sty m:val="p"/>
-                          </m:rPr>
-                          <m:t>,</m:t>
-                        </m:r>
-                        <m:r>
-                          <m:rPr>
-                            <m:sty m:val="p"/>
-                          </m:rPr>
-                          <m:t>∞</m:t>
-                        </m:r>
-                      </m:e>
-                    </m:d>
-                  </m:oMath>
-                </a14:m>
-                <a:r>
-                  <a:rPr/>
-                  <a:t>.</a:t>
-                </a:r>
-              </a:p>
-              <a:p>
-                <a:pPr lvl="0"/>
-                <a:r>
-                  <a:rPr/>
-                  <a:t>The curve is centered at its mean </a:t>
-                </a:r>
-                <a14:m>
-                  <m:oMath xmlns:m="http://schemas.openxmlformats.org/officeDocument/2006/math">
-                    <m:r>
-                      <m:t>μ</m:t>
-                    </m:r>
-                  </m:oMath>
-                </a14:m>
-                <a:r>
-                  <a:rPr/>
-                  <a:t>; its spread depends on its standard deviation </a:t>
-                </a:r>
-                <a14:m>
-                  <m:oMath xmlns:m="http://schemas.openxmlformats.org/officeDocument/2006/math">
-                    <m:r>
-                      <m:t>σ</m:t>
-                    </m:r>
-                    <m:r>
-                      <m:rPr>
-                        <m:sty m:val="p"/>
-                      </m:rPr>
-                      <m:t>&gt;</m:t>
-                    </m:r>
-                    <m:r>
-                      <m:t>0</m:t>
-                    </m:r>
-                  </m:oMath>
-                </a14:m>
-                <a:r>
-                  <a:rPr/>
-                  <a:t>.</a:t>
-                </a:r>
-              </a:p>
-              <a:p>
-                <a:pPr lvl="0"/>
-                <a:r>
-                  <a:rPr/>
-                  <a:t>We write </a:t>
-                </a:r>
-                <a14:m>
-                  <m:oMath xmlns:m="http://schemas.openxmlformats.org/officeDocument/2006/math">
-                    <m:r>
-                      <m:t>X</m:t>
-                    </m:r>
-                    <m:r>
-                      <m:rPr>
-                        <m:sty m:val="p"/>
-                      </m:rPr>
-                      <m:t>∼</m:t>
-                    </m:r>
-                    <m:r>
-                      <m:t>N</m:t>
-                    </m:r>
-                    <m:d>
-                      <m:dPr>
-                        <m:begChr m:val="("/>
-                        <m:sepChr m:val=""/>
-                        <m:endChr m:val=")"/>
-                        <m:grow/>
-                      </m:dPr>
-                      <m:e>
-                        <m:r>
-                          <m:t>μ</m:t>
-                        </m:r>
-                        <m:r>
-                          <m:rPr>
-                            <m:sty m:val="p"/>
-                          </m:rPr>
-                          <m:t>,</m:t>
-                        </m:r>
-                        <m:sSup>
-                          <m:e>
-                            <m:r>
-                              <m:t>σ</m:t>
-                            </m:r>
-                          </m:e>
-                          <m:sup>
-                            <m:r>
-                              <m:t>2</m:t>
-                            </m:r>
-                          </m:sup>
-                        </m:sSup>
-                      </m:e>
-                    </m:d>
-                  </m:oMath>
-                </a14:m>
-                <a:r>
-                  <a:rPr/>
-                  <a:t>, using the </a:t>
-                </a:r>
-                <a:r>
-                  <a:rPr b="1"/>
-                  <a:t>variance</a:t>
-                </a:r>
-                <a:r>
-                  <a:rPr/>
-                  <a:t> as the second parameter. The source labels its curves using the mean and standard deviation explicitly.</a:t>
-                </a:r>
-              </a:p>
-            </p:txBody>
-          </p:sp>
-        </mc:Choice>
-      </mc:AlternateContent>
-      <p:pic>
-        <p:nvPicPr>
-          <p:cNvPr descr="Unit-06-Normal-CTL_files/figure-pptx/normal-curve-1.png" id="0" name="Picture 1"/>
-          <p:cNvPicPr>
-            <a:picLocks noGrp="1" noChangeAspect="1"/>
-          </p:cNvPicPr>
-          <p:nvPr/>
-        </p:nvPicPr>
-        <p:blipFill>
-          <a:blip r:embed="rId2"/>
-          <a:stretch>
-            <a:fillRect/>
-          </a:stretch>
-        </p:blipFill>
-        <p:spPr bwMode="auto">
-          <a:xfrm>
-            <a:off x="3568700" y="736600"/>
-            <a:ext cx="5105400" cy="3302000"/>
-          </a:xfrm>
-          <a:prstGeom prst="rect">
-            <a:avLst/>
-          </a:prstGeom>
-          <a:noFill/>
-          <a:ln w="9525">
-            <a:noFill/>
-            <a:headEnd/>
-            <a:tailEnd/>
-          </a:ln>
-        </p:spPr>
-      </p:pic>
-      <p:sp>
-        <p:nvSpPr>
-          <p:cNvPr id="7" name="Slide Number Placeholder 6"/>
-          <p:cNvSpPr>
-            <a:spLocks noGrp="1"/>
-          </p:cNvSpPr>
-          <p:nvPr>
-            <p:ph idx="12" sz="quarter" type="sldNum"/>
-          </p:nvPr>
-        </p:nvSpPr>
-        <p:spPr/>
-        <p:txBody>
-          <a:bodyPr/>
-          <a:lstStyle/>
-          <a:p>
-            <a:fld id="{C5EF2332-01BF-834F-8236-50238282D533}" type="slidenum">
-              <a:rPr lang="en-US" smtClean="0"/>
-              <a:t>‹#›</a:t>
-            </a:fld>
-            <a:endParaRPr lang="en-US"/>
-          </a:p>
-        </p:txBody>
-      </p:sp>
-    </p:spTree>
-  </p:cSld>
-  <p:timing>
-    <p:tnLst>
-      <p:par>
-        <p:cTn id="1" dur="indefinite" restart="never" nodeType="tmRoot">
-          <p:childTnLst>
-            <p:seq concurrent="1" nextAc="seek">
-              <p:cTn id="2" dur="indefinite" nodeType="mainSeq">
-                <p:childTnLst>
-                  <p:par>
-                    <p:cTn id="3" fill="hold">
-                      <p:stCondLst>
-                        <p:cond delay="indefinite"/>
-                      </p:stCondLst>
-                      <p:childTnLst>
-                        <p:par>
-                          <p:cTn id="4" fill="hold">
-                            <p:stCondLst>
-                              <p:cond delay="0"/>
-                            </p:stCondLst>
-                            <p:childTnLst>
-                              <p:par>
-                                <p:cTn id="5" presetID="1" presetClass="entr" presetSubtype="0" fill="hold" grpId="0" nodeType="clickEffect">
-                                  <p:stCondLst>
-                                    <p:cond delay="0"/>
-                                  </p:stCondLst>
-                                  <p:childTnLst>
-                                    <p:set>
-                                      <p:cBhvr>
-                                        <p:cTn id="6" dur="1" fill="hold">
-                                          <p:stCondLst>
-                                            <p:cond delay="0"/>
-                                          </p:stCondLst>
-                                        </p:cTn>
-                                        <p:tgtEl>
-                                          <p:spTgt spid="4">
-                                            <p:txEl>
-                                              <p:pRg st="0" end="0"/>
-                                            </p:txEl>
-                                          </p:spTgt>
-                                        </p:tgtEl>
-                                        <p:attrNameLst>
-                                          <p:attrName>style.visibility</p:attrName>
-                                        </p:attrNameLst>
-                                      </p:cBhvr>
-                                      <p:to>
-                                        <p:strVal val="visible"/>
-                                      </p:to>
-                                    </p:set>
-                                  </p:childTnLst>
-                                </p:cTn>
-                              </p:par>
-                            </p:childTnLst>
-                          </p:cTn>
-                        </p:par>
-                      </p:childTnLst>
-                    </p:cTn>
-                  </p:par>
-                  <p:par>
-                    <p:cTn id="7" fill="hold">
-                      <p:stCondLst>
-                        <p:cond delay="indefinite"/>
-                      </p:stCondLst>
-                      <p:childTnLst>
-                        <p:par>
-                          <p:cTn id="8" fill="hold">
-                            <p:stCondLst>
-                              <p:cond delay="0"/>
-                            </p:stCondLst>
-                            <p:childTnLst>
-                              <p:par>
-                                <p:cTn id="9" presetID="1" presetClass="entr" presetSubtype="0" fill="hold" grpId="0" nodeType="clickEffect">
-                                  <p:stCondLst>
-                                    <p:cond delay="0"/>
-                                  </p:stCondLst>
-                                  <p:childTnLst>
-                                    <p:set>
-                                      <p:cBhvr>
-                                        <p:cTn id="10" dur="1" fill="hold">
-                                          <p:stCondLst>
-                                            <p:cond delay="0"/>
-                                          </p:stCondLst>
-                                        </p:cTn>
-                                        <p:tgtEl>
-                                          <p:spTgt spid="4">
-                                            <p:txEl>
-                                              <p:pRg st="1" end="1"/>
-                                            </p:txEl>
-                                          </p:spTgt>
-                                        </p:tgtEl>
-                                        <p:attrNameLst>
-                                          <p:attrName>style.visibility</p:attrName>
-                                        </p:attrNameLst>
-                                      </p:cBhvr>
-                                      <p:to>
-                                        <p:strVal val="visible"/>
-                                      </p:to>
-                                    </p:set>
-                                  </p:childTnLst>
-                                </p:cTn>
-                              </p:par>
-                            </p:childTnLst>
-                          </p:cTn>
-                        </p:par>
-                      </p:childTnLst>
-                    </p:cTn>
-                  </p:par>
-                  <p:par>
-                    <p:cTn id="11" fill="hold">
-                      <p:stCondLst>
-                        <p:cond delay="indefinite"/>
-                      </p:stCondLst>
-                      <p:childTnLst>
-                        <p:par>
-                          <p:cTn id="12" fill="hold">
-                            <p:stCondLst>
-                              <p:cond delay="0"/>
-                            </p:stCondLst>
-                            <p:childTnLst>
-                              <p:par>
-                                <p:cTn id="13" presetID="1" presetClass="entr" presetSubtype="0" fill="hold" grpId="0" nodeType="clickEffect">
-                                  <p:stCondLst>
-                                    <p:cond delay="0"/>
-                                  </p:stCondLst>
-                                  <p:childTnLst>
-                                    <p:set>
-                                      <p:cBhvr>
-                                        <p:cTn id="14" dur="1" fill="hold">
-                                          <p:stCondLst>
-                                            <p:cond delay="0"/>
-                                          </p:stCondLst>
-                                        </p:cTn>
-                                        <p:tgtEl>
-                                          <p:spTgt spid="4">
-                                            <p:txEl>
-                                              <p:pRg st="2" end="2"/>
-                                            </p:txEl>
-                                          </p:spTgt>
-                                        </p:tgtEl>
-                                        <p:attrNameLst>
-                                          <p:attrName>style.visibility</p:attrName>
-                                        </p:attrNameLst>
-                                      </p:cBhvr>
-                                      <p:to>
-                                        <p:strVal val="visible"/>
-                                      </p:to>
-                                    </p:set>
-                                  </p:childTnLst>
-                                </p:cTn>
-                              </p:par>
-                            </p:childTnLst>
-                          </p:cTn>
-                        </p:par>
-                      </p:childTnLst>
-                    </p:cTn>
-                  </p:par>
-                  <p:par>
-                    <p:cTn id="15" fill="hold">
-                      <p:stCondLst>
-                        <p:cond delay="indefinite"/>
-                      </p:stCondLst>
-                      <p:childTnLst>
-                        <p:par>
-                          <p:cTn id="16" fill="hold">
-                            <p:stCondLst>
-                              <p:cond delay="0"/>
-                            </p:stCondLst>
-                            <p:childTnLst>
-                              <p:par>
-                                <p:cTn id="17" presetID="1" presetClass="entr" presetSubtype="0" fill="hold" grpId="0" nodeType="clickEffect">
-                                  <p:stCondLst>
-                                    <p:cond delay="0"/>
-                                  </p:stCondLst>
-                                  <p:childTnLst>
-                                    <p:set>
-                                      <p:cBhvr>
-                                        <p:cTn id="18" dur="1" fill="hold">
-                                          <p:stCondLst>
-                                            <p:cond delay="0"/>
-                                          </p:stCondLst>
-                                        </p:cTn>
-                                        <p:tgtEl>
-                                          <p:spTgt spid="4">
-                                            <p:txEl>
-                                              <p:pRg st="3" end="3"/>
-                                            </p:txEl>
-                                          </p:spTgt>
-                                        </p:tgtEl>
-                                        <p:attrNameLst>
-                                          <p:attrName>style.visibility</p:attrName>
-                                        </p:attrNameLst>
-                                      </p:cBhvr>
-                                      <p:to>
-                                        <p:strVal val="visible"/>
-                                      </p:to>
-                                    </p:set>
-                                  </p:childTnLst>
-                                </p:cTn>
-                              </p:par>
-                            </p:childTnLst>
-                          </p:cTn>
-                        </p:par>
-                      </p:childTnLst>
-                    </p:cTn>
-                  </p:par>
-                </p:childTnLst>
-              </p:cTn>
-              <p:prevCondLst>
-                <p:cond evt="onPrev" delay="0">
-                  <p:tgtEl>
-                    <p:sldTgt/>
-                  </p:tgtEl>
-                </p:cond>
-              </p:prevCondLst>
-              <p:nextCondLst>
-                <p:cond evt="onNext" delay="0">
-                  <p:tgtEl>
-                    <p:sldTgt/>
-                  </p:tgtEl>
-                </p:cond>
-              </p:nextCondLst>
-            </p:seq>
-          </p:childTnLst>
-        </p:cTn>
-      </p:par>
-    </p:tnLst>
-    <p:bldLst>
-      <p:bldP spid="4" grpId="0" uiExpand="1" build="p"/>
-    </p:bldLst>
-  </p:timing>
-</p:sld>
-</file>
-
-<file path=ppt/slides/slide7.xml><?xml version="1.0" encoding="utf-8"?>
-<p:sld xmlns:a="http://schemas.openxmlformats.org/drawingml/2006/main" xmlns:r="http://schemas.openxmlformats.org/officeDocument/2006/relationships" xmlns:p="http://schemas.openxmlformats.org/presentationml/2006/main">
-  <p:cSld>
-    <p:spTree>
-      <p:nvGrpSpPr>
-        <p:cNvPr id="1" name=""/>
-        <p:cNvGrpSpPr/>
-        <p:nvPr/>
-      </p:nvGrpSpPr>
-      <p:grpSpPr>
-        <a:xfrm>
-          <a:off x="0" y="0"/>
-          <a:ext cx="0" cy="0"/>
-          <a:chOff x="0" y="0"/>
-          <a:chExt cx="0" cy="0"/>
-        </a:xfrm>
-      </p:grpSpPr>
-      <p:sp>
-        <p:nvSpPr>
-          <p:cNvPr id="2" name="Title 1"/>
-          <p:cNvSpPr>
-            <a:spLocks noGrp="1"/>
-          </p:cNvSpPr>
-          <p:nvPr>
-            <p:ph type="title"/>
-          </p:nvPr>
-        </p:nvSpPr>
-        <p:spPr>
-          <a:xfrm>
-            <a:off x="457201" y="204787"/>
-            <a:ext cx="3008313" cy="871538"/>
-          </a:xfrm>
-        </p:spPr>
-        <p:txBody>
-          <a:bodyPr/>
-          <a:lstStyle/>
-          <a:p>
-            <a:pPr lvl="0" indent="0" marL="0">
-              <a:buNone/>
-            </a:pPr>
-            <a:r>
-              <a:rPr/>
-              <a:t>Normal Probability Density Function</a:t>
-            </a:r>
-          </a:p>
-        </p:txBody>
-      </p:sp>
-      <mc:AlternateContent xmlns:mc="http://schemas.openxmlformats.org/markup-compatibility/2006">
-        <mc:Choice xmlns:a14="http://schemas.microsoft.com/office/drawing/2010/main" Requires="a14">
-          <p:sp>
-            <p:nvSpPr>
-              <p:cNvPr id="4" name="Text Placeholder 3"/>
-              <p:cNvSpPr>
-                <a:spLocks noGrp="1"/>
-              </p:cNvSpPr>
-              <p:nvPr>
-                <p:ph idx="2" sz="half" type="body"/>
-              </p:nvPr>
-            </p:nvSpPr>
-            <p:spPr/>
-            <p:txBody>
-              <a:bodyPr/>
-              <a:lstStyle/>
-              <a:p>
-                <a:pPr lvl="0" indent="0" marL="0">
-                  <a:buNone/>
-                </a:pPr>
-                <a14:m>
-                  <m:oMathPara xmlns:m="http://schemas.openxmlformats.org/officeDocument/2006/math">
-                    <m:oMathParaPr>
-                      <m:jc m:val="center"/>
-                    </m:oMathParaPr>
-                    <m:oMath>
-                      <m:sSub>
-                        <m:e>
-                          <m:r>
-                            <m:t>f</m:t>
-                          </m:r>
-                        </m:e>
-                        <m:sub>
-                          <m:r>
-                            <m:t>X</m:t>
-                          </m:r>
-                        </m:sub>
-                      </m:sSub>
-                      <m:d>
-                        <m:dPr>
-                          <m:begChr m:val="("/>
-                          <m:sepChr m:val=""/>
-                          <m:endChr m:val=")"/>
-                          <m:grow/>
-                        </m:dPr>
-                        <m:e>
-                          <m:r>
-                            <m:t>x</m:t>
-                          </m:r>
-                        </m:e>
-                      </m:d>
-                      <m:r>
-                        <m:rPr>
-                          <m:sty m:val="p"/>
-                        </m:rPr>
-                        <m:t>=</m:t>
-                      </m:r>
-                      <m:f>
-                        <m:fPr>
-                          <m:type m:val="bar"/>
-                        </m:fPr>
-                        <m:num>
-                          <m:r>
-                            <m:t>1</m:t>
-                          </m:r>
-                        </m:num>
-                        <m:den>
-                          <m:rad>
-                            <m:radPr>
-                              <m:degHide m:val="on"/>
-                            </m:radPr>
-                            <m:deg/>
-                            <m:e>
-                              <m:r>
-                                <m:t>2</m:t>
-                              </m:r>
-                              <m:r>
-                                <m:t>π</m:t>
-                              </m:r>
-                            </m:e>
-                          </m:rad>
-                          <m:r>
-                            <m:t> </m:t>
-                          </m:r>
-                          <m:r>
-                            <m:t>σ</m:t>
-                          </m:r>
-                        </m:den>
-                      </m:f>
-                      <m:r>
-                        <m:rPr>
-                          <m:sty m:val="p"/>
-                        </m:rPr>
-                        <m:t>exp</m:t>
-                      </m:r>
-                      <m:d>
-                        <m:dPr>
-                          <m:begChr m:val="["/>
-                          <m:sepChr m:val=""/>
-                          <m:endChr m:val="]"/>
-                          <m:grow/>
-                        </m:dPr>
-                        <m:e>
-                          <m:r>
-                            <m:rPr>
-                              <m:sty m:val="p"/>
-                            </m:rPr>
-                            <m:t>−</m:t>
-                          </m:r>
-                          <m:f>
-                            <m:fPr>
-                              <m:type m:val="bar"/>
-                            </m:fPr>
-                            <m:num>
-                              <m:sSup>
-                                <m:e>
-                                  <m:d>
-                                    <m:dPr>
-                                      <m:begChr m:val="("/>
-                                      <m:sepChr m:val=""/>
-                                      <m:endChr m:val=")"/>
-                                      <m:grow/>
-                                    </m:dPr>
-                                    <m:e>
-                                      <m:r>
-                                        <m:t>x</m:t>
-                                      </m:r>
-                                      <m:r>
-                                        <m:rPr>
-                                          <m:sty m:val="p"/>
-                                        </m:rPr>
-                                        <m:t>−</m:t>
-                                      </m:r>
-                                      <m:r>
-                                        <m:t>μ</m:t>
-                                      </m:r>
-                                    </m:e>
-                                  </m:d>
-                                </m:e>
-                                <m:sup>
-                                  <m:r>
-                                    <m:t>2</m:t>
-                                  </m:r>
-                                </m:sup>
-                              </m:sSup>
-                            </m:num>
-                            <m:den>
-                              <m:r>
-                                <m:t>2</m:t>
-                              </m:r>
-                              <m:sSup>
-                                <m:e>
-                                  <m:r>
-                                    <m:t>σ</m:t>
-                                  </m:r>
-                                </m:e>
-                                <m:sup>
-                                  <m:r>
-                                    <m:t>2</m:t>
-                                  </m:r>
-                                </m:sup>
-                              </m:sSup>
-                            </m:den>
-                          </m:f>
-                        </m:e>
-                      </m:d>
-                      <m:r>
-                        <m:rPr>
-                          <m:sty m:val="p"/>
-                        </m:rPr>
-                        <m:t>,</m:t>
-                      </m:r>
-                      <m:r>
-                        <m:t>  </m:t>
-                      </m:r>
-                      <m:r>
-                        <m:rPr>
-                          <m:sty m:val="p"/>
-                        </m:rPr>
-                        <m:t>−</m:t>
-                      </m:r>
-                      <m:r>
-                        <m:rPr>
-                          <m:sty m:val="p"/>
-                        </m:rPr>
-                        <m:t>∞</m:t>
-                      </m:r>
-                      <m:r>
-                        <m:rPr>
-                          <m:sty m:val="p"/>
-                        </m:rPr>
-                        <m:t>&lt;</m:t>
-                      </m:r>
-                      <m:r>
-                        <m:t>x</m:t>
-                      </m:r>
-                      <m:r>
-                        <m:rPr>
-                          <m:sty m:val="p"/>
-                        </m:rPr>
-                        <m:t>&lt;</m:t>
-                      </m:r>
-                      <m:r>
-                        <m:rPr>
-                          <m:sty m:val="p"/>
-                        </m:rPr>
-                        <m:t>∞</m:t>
-                      </m:r>
-                      <m:r>
-                        <m:rPr>
-                          <m:sty m:val="p"/>
-                        </m:rPr>
-                        <m:t>.</m:t>
-                      </m:r>
-                    </m:oMath>
-                  </m:oMathPara>
-                </a14:m>
-              </a:p>
-              <a:p>
-                <a:pPr lvl="0" indent="0" marL="0">
-                  <a:buNone/>
-                </a:pPr>
-                <a:r>
-                  <a:rPr/>
-                  <a:t>The inflection points occur at </a:t>
-                </a:r>
-                <a14:m>
-                  <m:oMath xmlns:m="http://schemas.openxmlformats.org/officeDocument/2006/math">
-                    <m:r>
-                      <m:t>μ</m:t>
-                    </m:r>
-                    <m:r>
-                      <m:rPr>
-                        <m:sty m:val="p"/>
-                      </m:rPr>
-                      <m:t>−</m:t>
-                    </m:r>
-                    <m:r>
-                      <m:t>σ</m:t>
-                    </m:r>
-                  </m:oMath>
-                </a14:m>
-                <a:r>
-                  <a:rPr/>
-                  <a:t> and </a:t>
-                </a:r>
-                <a14:m>
-                  <m:oMath xmlns:m="http://schemas.openxmlformats.org/officeDocument/2006/math">
-                    <m:r>
-                      <m:t>μ</m:t>
-                    </m:r>
-                    <m:r>
-                      <m:rPr>
-                        <m:sty m:val="p"/>
-                      </m:rPr>
-                      <m:t>+</m:t>
-                    </m:r>
-                    <m:r>
-                      <m:t>σ</m:t>
-                    </m:r>
-                  </m:oMath>
-                </a14:m>
-                <a:r>
-                  <a:rPr/>
-                  <a:t>.</a:t>
-                </a:r>
-              </a:p>
-            </p:txBody>
-          </p:sp>
-        </mc:Choice>
-      </mc:AlternateContent>
-      <p:pic>
-        <p:nvPicPr>
-          <p:cNvPr descr="Unit-06-Normal-CTL_files/figure-pptx/inflection-points-1.png" id="0" name="Picture 1"/>
-          <p:cNvPicPr>
-            <a:picLocks noGrp="1" noChangeAspect="1"/>
-          </p:cNvPicPr>
-          <p:nvPr/>
-        </p:nvPicPr>
-        <p:blipFill>
-          <a:blip r:embed="rId2"/>
-          <a:stretch>
-            <a:fillRect/>
-          </a:stretch>
-        </p:blipFill>
-        <p:spPr bwMode="auto">
-          <a:xfrm>
-            <a:off x="3568700" y="736600"/>
-            <a:ext cx="5105400" cy="3302000"/>
-          </a:xfrm>
-          <a:prstGeom prst="rect">
-            <a:avLst/>
-          </a:prstGeom>
-          <a:noFill/>
-          <a:ln w="9525">
-            <a:noFill/>
-            <a:headEnd/>
-            <a:tailEnd/>
-          </a:ln>
-        </p:spPr>
-      </p:pic>
-      <p:sp>
-        <p:nvSpPr>
-          <p:cNvPr id="7" name="Slide Number Placeholder 6"/>
-          <p:cNvSpPr>
-            <a:spLocks noGrp="1"/>
-          </p:cNvSpPr>
-          <p:nvPr>
-            <p:ph idx="12" sz="quarter" type="sldNum"/>
-          </p:nvPr>
-        </p:nvSpPr>
-        <p:spPr/>
-        <p:txBody>
-          <a:bodyPr/>
-          <a:lstStyle/>
-          <a:p>
-            <a:fld id="{C5EF2332-01BF-834F-8236-50238282D533}" type="slidenum">
-              <a:rPr lang="en-US" smtClean="0"/>
-              <a:t>‹#›</a:t>
-            </a:fld>
-            <a:endParaRPr lang="en-US"/>
-          </a:p>
-        </p:txBody>
-      </p:sp>
-    </p:spTree>
-  </p:cSld>
-</p:sld>
-</file>
-
-<file path=ppt/slides/slide8.xml><?xml version="1.0" encoding="utf-8"?>
-<p:sld xmlns:a="http://schemas.openxmlformats.org/drawingml/2006/main" xmlns:r="http://schemas.openxmlformats.org/officeDocument/2006/relationships" xmlns:p="http://schemas.openxmlformats.org/presentationml/2006/main">
-  <p:cSld>
-    <p:spTree>
-      <p:nvGrpSpPr>
-        <p:cNvPr id="1" name=""/>
-        <p:cNvGrpSpPr/>
-        <p:nvPr/>
-      </p:nvGrpSpPr>
-      <p:grpSpPr>
-        <a:xfrm>
-          <a:off x="0" y="0"/>
-          <a:ext cx="0" cy="0"/>
-          <a:chOff x="0" y="0"/>
-          <a:chExt cx="0" cy="0"/>
-        </a:xfrm>
-      </p:grpSpPr>
-      <p:sp>
-        <p:nvSpPr>
-          <p:cNvPr id="2" name="Title 1"/>
-          <p:cNvSpPr>
-            <a:spLocks noGrp="1"/>
-          </p:cNvSpPr>
-          <p:nvPr>
-            <p:ph type="title"/>
-          </p:nvPr>
-        </p:nvSpPr>
-        <p:spPr>
-          <a:xfrm>
-            <a:off x="457201" y="204787"/>
-            <a:ext cx="3008313" cy="871538"/>
-          </a:xfrm>
-        </p:spPr>
-        <p:txBody>
-          <a:bodyPr/>
-          <a:lstStyle/>
-          <a:p>
-            <a:pPr lvl="0" indent="0" marL="0">
-              <a:buNone/>
-            </a:pPr>
-            <a:r>
-              <a:rPr/>
-              <a:t>Comparing Normal Curves</a:t>
-            </a:r>
-          </a:p>
-        </p:txBody>
-      </p:sp>
-      <mc:AlternateContent xmlns:mc="http://schemas.openxmlformats.org/markup-compatibility/2006">
-        <mc:Choice xmlns:a14="http://schemas.microsoft.com/office/drawing/2010/main" Requires="a14">
-          <p:sp>
-            <p:nvSpPr>
-              <p:cNvPr id="4" name="Text Placeholder 3"/>
-              <p:cNvSpPr>
-                <a:spLocks noGrp="1"/>
-              </p:cNvSpPr>
-              <p:nvPr>
-                <p:ph idx="2" sz="half" type="body"/>
-              </p:nvPr>
-            </p:nvSpPr>
-            <p:spPr/>
-            <p:txBody>
-              <a:bodyPr/>
-              <a:lstStyle/>
-              <a:p>
-                <a:pPr lvl="0" indent="0" marL="0">
-                  <a:buNone/>
-                </a:pPr>
-                <a:r>
-                  <a:rPr/>
-                  <a:t>Changing </a:t>
-                </a:r>
-                <a14:m>
-                  <m:oMath xmlns:m="http://schemas.openxmlformats.org/officeDocument/2006/math">
-                    <m:r>
-                      <m:t>μ</m:t>
-                    </m:r>
-                  </m:oMath>
-                </a14:m>
-                <a:r>
-                  <a:rPr/>
-                  <a:t> shifts the center. Increasing </a:t>
-                </a:r>
-                <a14:m>
-                  <m:oMath xmlns:m="http://schemas.openxmlformats.org/officeDocument/2006/math">
-                    <m:r>
-                      <m:t>σ</m:t>
-                    </m:r>
-                  </m:oMath>
-                </a14:m>
-                <a:r>
-                  <a:rPr/>
-                  <a:t> makes the curve wider and lowers its peak.</a:t>
-                </a:r>
-              </a:p>
-            </p:txBody>
-          </p:sp>
-        </mc:Choice>
-      </mc:AlternateContent>
-      <p:pic>
-        <p:nvPicPr>
-          <p:cNvPr descr="Unit-06-Normal-CTL_files/figure-pptx/compare-normal-curves-1.png" id="0" name="Picture 1"/>
-          <p:cNvPicPr>
-            <a:picLocks noGrp="1" noChangeAspect="1"/>
-          </p:cNvPicPr>
-          <p:nvPr/>
-        </p:nvPicPr>
-        <p:blipFill>
-          <a:blip r:embed="rId2"/>
-          <a:stretch>
-            <a:fillRect/>
-          </a:stretch>
-        </p:blipFill>
-        <p:spPr bwMode="auto">
-          <a:xfrm>
-            <a:off x="3568700" y="736600"/>
-            <a:ext cx="5105400" cy="3302000"/>
-          </a:xfrm>
-          <a:prstGeom prst="rect">
-            <a:avLst/>
-          </a:prstGeom>
-          <a:noFill/>
-          <a:ln w="9525">
-            <a:noFill/>
-            <a:headEnd/>
-            <a:tailEnd/>
-          </a:ln>
-        </p:spPr>
-      </p:pic>
-      <p:sp>
-        <p:nvSpPr>
-          <p:cNvPr id="7" name="Slide Number Placeholder 6"/>
-          <p:cNvSpPr>
-            <a:spLocks noGrp="1"/>
-          </p:cNvSpPr>
-          <p:nvPr>
-            <p:ph idx="12" sz="quarter" type="sldNum"/>
-          </p:nvPr>
-        </p:nvSpPr>
-        <p:spPr/>
-        <p:txBody>
-          <a:bodyPr/>
-          <a:lstStyle/>
-          <a:p>
-            <a:fld id="{C5EF2332-01BF-834F-8236-50238282D533}" type="slidenum">
-              <a:rPr lang="en-US" smtClean="0"/>
-              <a:t>‹#›</a:t>
-            </a:fld>
-            <a:endParaRPr lang="en-US"/>
-          </a:p>
-        </p:txBody>
-      </p:sp>
-    </p:spTree>
-  </p:cSld>
-</p:sld>
-</file>
-
-<file path=ppt/slides/slide9.xml><?xml version="1.0" encoding="utf-8"?>
-<p:sld xmlns:a="http://schemas.openxmlformats.org/drawingml/2006/main" xmlns:r="http://schemas.openxmlformats.org/officeDocument/2006/relationships" xmlns:p="http://schemas.openxmlformats.org/presentationml/2006/main">
-  <p:cSld>
-    <p:spTree>
-      <p:nvGrpSpPr>
-        <p:cNvPr id="1" name=""/>
-        <p:cNvGrpSpPr/>
-        <p:nvPr/>
-      </p:nvGrpSpPr>
-      <p:grpSpPr>
-        <a:xfrm>
-          <a:off x="0" y="0"/>
-          <a:ext cx="0" cy="0"/>
-          <a:chOff x="0" y="0"/>
-          <a:chExt cx="0" cy="0"/>
-        </a:xfrm>
-      </p:grpSpPr>
-      <p:sp>
-        <p:nvSpPr>
-          <p:cNvPr id="2" name="Title Placeholder 1"/>
-          <p:cNvSpPr>
-            <a:spLocks noGrp="1"/>
-          </p:cNvSpPr>
-          <p:nvPr>
-            <p:ph type="title"/>
-          </p:nvPr>
-        </p:nvSpPr>
-        <p:spPr bwMode="auto">
-          <a:xfrm>
-            <a:off x="433680" y="423297"/>
-            <a:ext cx="8229600" cy="784602"/>
-          </a:xfrm>
-          <a:prstGeom prst="rect">
-            <a:avLst/>
-          </a:prstGeom>
-          <a:noFill/>
-          <a:ln w="9525">
-            <a:noFill/>
-            <a:miter lim="800000"/>
-            <a:headEnd/>
-            <a:tailEnd/>
-          </a:ln>
-        </p:spPr>
-        <p:txBody>
-          <a:bodyPr/>
-          <a:lstStyle/>
-          <a:p>
-            <a:pPr lvl="0" indent="0" marL="0">
-              <a:buNone/>
-            </a:pPr>
-            <a:r>
-              <a:rPr/>
-              <a:t>Example: Adult Heights</a:t>
-            </a:r>
-          </a:p>
-        </p:txBody>
-      </p:sp>
-      <mc:AlternateContent xmlns:mc="http://schemas.openxmlformats.org/markup-compatibility/2006">
-        <mc:Choice xmlns:a14="http://schemas.microsoft.com/office/drawing/2010/main" Requires="a14">
-          <p:sp>
-            <p:nvSpPr>
-              <p:cNvPr id="3" name="Text Placeholder 2"/>
-              <p:cNvSpPr>
-                <a:spLocks noGrp="1"/>
-              </p:cNvSpPr>
-              <p:nvPr>
-                <p:ph idx="1"/>
-              </p:nvPr>
-            </p:nvSpPr>
-            <p:spPr/>
-            <p:txBody>
-              <a:bodyPr/>
-              <a:lstStyle/>
-              <a:p>
-                <a:pPr lvl="0" indent="0" marL="0">
-                  <a:buNone/>
-                </a:pPr>
-                <a:r>
-                  <a:rPr/>
-                  <a:t>Suppose adult men’s heights are approximately normal with mean </a:t>
-                </a:r>
-                <a14:m>
-                  <m:oMath xmlns:m="http://schemas.openxmlformats.org/officeDocument/2006/math">
-                    <m:r>
-                      <m:t>μ</m:t>
-                    </m:r>
-                    <m:r>
-                      <m:rPr>
-                        <m:sty m:val="p"/>
-                      </m:rPr>
-                      <m:t>=</m:t>
-                    </m:r>
-                    <m:r>
-                      <m:t>70</m:t>
-                    </m:r>
-                  </m:oMath>
-                </a14:m>
-                <a:r>
-                  <a:rPr/>
-                  <a:t> inches and standard deviation </a:t>
-                </a:r>
-                <a14:m>
-                  <m:oMath xmlns:m="http://schemas.openxmlformats.org/officeDocument/2006/math">
-                    <m:r>
-                      <m:t>σ</m:t>
-                    </m:r>
-                    <m:r>
-                      <m:rPr>
-                        <m:sty m:val="p"/>
-                      </m:rPr>
-                      <m:t>=</m:t>
-                    </m:r>
-                    <m:r>
-                      <m:t>4</m:t>
-                    </m:r>
-                  </m:oMath>
-                </a14:m>
-                <a:r>
-                  <a:rPr/>
-                  <a:t> inches.</a:t>
-                </a:r>
-              </a:p>
-              <a:p>
-                <a:pPr lvl="0" indent="0" marL="0">
-                  <a:buNone/>
-                </a:pPr>
-                <a:r>
-                  <a:rPr/>
-                  <a:t>How tall would someone be if their height were </a:t>
-                </a:r>
-                <a:r>
-                  <a:rPr b="1"/>
-                  <a:t>10 standard deviations above the mean</a:t>
-                </a:r>
-                <a:r>
-                  <a:rPr/>
-                  <a:t>?</a:t>
-                </a:r>
-              </a:p>
-              <a:p>
-                <a:pPr lvl="0" indent="0" marL="0">
-                  <a:buNone/>
-                </a:pPr>
-                <a14:m>
-                  <m:oMathPara xmlns:m="http://schemas.openxmlformats.org/officeDocument/2006/math">
-                    <m:oMathParaPr>
-                      <m:jc m:val="center"/>
-                    </m:oMathParaPr>
-                    <m:oMath>
-                      <m:r>
-                        <m:t>70</m:t>
-                      </m:r>
-                      <m:r>
-                        <m:rPr>
-                          <m:sty m:val="p"/>
-                        </m:rPr>
-                        <m:t>+</m:t>
-                      </m:r>
-                      <m:r>
-                        <m:t>10</m:t>
-                      </m:r>
-                      <m:d>
-                        <m:dPr>
-                          <m:begChr m:val="("/>
-                          <m:sepChr m:val=""/>
-                          <m:endChr m:val=")"/>
-                          <m:grow/>
-                        </m:dPr>
-                        <m:e>
-                          <m:r>
-                            <m:t>4</m:t>
-                          </m:r>
-                        </m:e>
-                      </m:d>
-                      <m:r>
-                        <m:rPr>
-                          <m:sty m:val="p"/>
-                        </m:rPr>
-                        <m:t>=</m:t>
-                      </m:r>
-                      <m:r>
-                        <m:t>110</m:t>
-                      </m:r>
-                      <m:r>
-                        <m:rPr>
-                          <m:nor/>
-                          <m:sty m:val="p"/>
-                        </m:rPr>
-                        <m:t> inches</m:t>
-                      </m:r>
-                      <m:r>
-                        <m:rPr>
-                          <m:sty m:val="p"/>
-                        </m:rPr>
-                        <m:t>=</m:t>
-                      </m:r>
-                      <m:r>
-                        <m:t>9</m:t>
-                      </m:r>
-                      <m:r>
-                        <m:rPr>
-                          <m:nor/>
-                          <m:sty m:val="p"/>
-                        </m:rPr>
-                        <m:t> feet </m:t>
-                      </m:r>
-                      <m:r>
-                        <m:t>2</m:t>
-                      </m:r>
-                      <m:r>
-                        <m:rPr>
-                          <m:nor/>
-                          <m:sty m:val="p"/>
-                        </m:rPr>
-                        <m:t> inches</m:t>
-                      </m:r>
-                      <m:r>
-                        <m:rPr>
-                          <m:sty m:val="p"/>
-                        </m:rPr>
-                        <m:t>.</m:t>
-                      </m:r>
-                    </m:oMath>
-                  </m:oMathPara>
-                </a14:m>
-              </a:p>
-              <a:p>
-                <a:pPr lvl="0" indent="0" marL="0">
-                  <a:buNone/>
-                </a:pPr>
-                <a:r>
-                  <a:rPr/>
-                  <a:t>This illustrates how extreme a value 10 standard deviations above the mean would be. For comparison, the source describes the tallest recorded man as approximately 8 feet 11 inches tall.</a:t>
-                </a:r>
-              </a:p>
-            </p:txBody>
-          </p:sp>
-        </mc:Choice>
-      </mc:AlternateContent>
-      <p:sp>
-        <p:nvSpPr>
-          <p:cNvPr id="4" name="Slide Number Placeholder 3"/>
-          <p:cNvSpPr>
-            <a:spLocks noGrp="1"/>
-          </p:cNvSpPr>
-          <p:nvPr>
-            <p:ph idx="10" sz="quarter" type="sldNum"/>
-          </p:nvPr>
-        </p:nvSpPr>
-        <p:spPr/>
-        <p:txBody>
-          <a:bodyPr/>
-          <a:lstStyle/>
-          <a:p>
-            <a:fld id="{9C13042B-154E-4D18-B726-07B2F714EFCF}" type="slidenum">
-              <a:rPr lang="en-US" smtClean="0"/>
-              <a:pPr/>
-              <a:t>‹#›</a:t>
-            </a:fld>
-            <a:endParaRPr dirty="0" lang="en-US"/>
-          </a:p>
-        </p:txBody>
-      </p:sp>
-    </p:spTree>
-  </p:cSld>
 </p:sld>
 </file>
 

--- a/docs/activities/Unit-06-Normal-CTL.pptx
+++ b/docs/activities/Unit-06-Normal-CTL.pptx
@@ -3249,7 +3249,7 @@
             <a:pPr lvl="0"/>
             <a:r>
               <a:rPr/>
-              <a:t>For units where Lecture Notes/Handouts are provided, they should serve as one of your core course resources. For these units, you are not expected to use the textbook as your primary study resource, but feel free to go through the related topics in the textbooks (mentioned in the class) if you want to!</a:t>
+              <a:t>For units where Lecture Notes are provided, they should serve as one of your core course resources. For these units, you are not expected to use the textbook as your primary study resource, but feel free to go through the related topics in the textbooks (mentioned in the class) if you want to!</a:t>
             </a:r>
           </a:p>
           <a:p>
@@ -3295,7 +3295,7 @@
             </a:pPr>
             <a:r>
               <a:rPr/>
-              <a:t>Always prioritize the Class Notes if you notice any difference in notation, terminology, approach, or emphasis between the Class Notes and the Lecture Notes. Occasionally, I may present a concept or use notation slightly differently in class. I will also do my best to point out any important discrepancies as we move through the semester.</a:t>
+              <a:t>Always prioritize the Class Notes (+Handouts) if you notice any difference in notation, terminology, approach, or emphasis between the Class Notes and the Lecture Notes. Occasionally, I may present a concept or use notation slightly differently in class. I will also do my best to point out any important discrepancies as we move through the semester.</a:t>
             </a:r>
           </a:p>
         </p:txBody>

--- a/docs/activities/Unit-06-Normal-CTL.pptx
+++ b/docs/activities/Unit-06-Normal-CTL.pptx
@@ -3249,7 +3249,7 @@
             <a:pPr lvl="0"/>
             <a:r>
               <a:rPr/>
-              <a:t>For units where Lecture Notes are provided, they should serve as one of your core course resources. For these units, you are not expected to use the textbook as your primary study resource, but feel free to go through the related topics in the textbooks (mentioned in the class) if you want to!</a:t>
+              <a:t>For units where Lecture Notes are provided, they should serve as one of your core course resources. Together with your Class Notes, handouts, practice problems, and activity materials available on the course website, they provide a comprehensive foundation for preparing for quizzes, homework assignments, and exams.</a:t>
             </a:r>
           </a:p>
           <a:p>
@@ -3279,14 +3279,14 @@
             <a:pPr lvl="0"/>
             <a:r>
               <a:rPr/>
-              <a:t>Lecture Notes: Your main supplementary (required) resource. Use these for additional explanations, details, examples, and review after class.</a:t>
+              <a:t>Lecture Notes/Activities in course website: Your main supplementary (required) resource. Use these for additional explanations, details, examples, and review after class.</a:t>
             </a:r>
           </a:p>
           <a:p>
             <a:pPr lvl="0"/>
             <a:r>
               <a:rPr/>
-              <a:t>Textbook: Use it when you would like to go through some additional (optional) resource.</a:t>
+              <a:t>Textbook: Use it when you would like to deepen your understanding or go through some additional (optional) resource.</a:t>
             </a:r>
           </a:p>
           <a:p>
